--- a/Curso Gas B/15 - UNE 60670 - Pruebas y puesta en servicio/15 - UNE 60670 - Pruebas y puesta en servicio - Vídeo 3.pptx
+++ b/Curso Gas B/15 - UNE 60670 - Pruebas y puesta en servicio/15 - UNE 60670 - Pruebas y puesta en servicio - Vídeo 3.pptx
@@ -23,6 +23,7 @@
     <p:sldId id="271" r:id="rId23"/>
     <p:sldId id="272" r:id="rId24"/>
     <p:sldId id="273" r:id="rId25"/>
+    <p:sldId id="274" r:id="rId26"/>
   </p:sldIdLst>
   <p:sldSz cx="12191695" cy="6858000" type="screen4x3"/>
   <p:notesSz cx="6858000" cy="9144000"/>
@@ -604,22 +605,22 @@
           <a:lstStyle/>
           <a:p>
             <a:r>
-              <a:t>N1: ¿Esta estanquidad no la hicimos ya antes?</a:t>
-            </a:r>
-          </a:p>
-          <a:p>
-            <a:r>
-              <a:t>N2: Es otra vez el último metro, pero ahora ya con gas y en la puesta en marcha. En la parte ocho comprobabas ese tramo, de la llave del aparato al aparato, con aire y a un tope de ciento diez milibares. Aquí, ya con gas circulando, compruebas todas las uniones entre la llave de conexión del aparato y el propio aparato, dejando el aparato fuera, con la llave de conexión abierta y los mandos del aparato cerrados. Y lo haces con un método cualitativo, o sea, agua jabonosa, un detector, algo que te diga sí pierde o no pierde, sin necesidad de un número exacto.</a:t>
-            </a:r>
-          </a:p>
-          <a:p>
-            <a:r>
-              <a:t>N1: ¿Y la regla si encuentro una fuga?</a:t>
-            </a:r>
-          </a:p>
-          <a:p>
-            <a:r>
-              <a:t>N2: Tajante y sin excepciones: en ningún caso se deja puesto en marcha un aparato si la comprobación de la estanquidad no es correcta. Si ese enlace pierde, no se arranca, punto. Es el mismo último metro de siempre, el sitio donde más fugas salen, y por eso se vigila en cada fase del tema.</a:t>
+              <a:t>N1: Hay casillas de la tabla con un asterisco, ¿qué significa?</a:t>
+            </a:r>
+          </a:p>
+          <a:p>
+            <a:r>
+              <a:t>N2: Ese asterisco es una condición muy lógica. Varias comprobaciones, sobre todo el monóxido en ambiente y el tiro, solo se exigen si el aparato no está en una zona exterior. La norma considera zona exterior los patios, las cubiertas y sitios así, abiertos. Si el aparato está ahí, esas comprobaciones no se piden.</a:t>
+            </a:r>
+          </a:p>
+          <a:p>
+            <a:r>
+              <a:t>N1: ¿Y por qué al aire libre no se miden?</a:t>
+            </a:r>
+          </a:p>
+          <a:p>
+            <a:r>
+              <a:t>N2: Porque al aire libre los humos se dispersan solos, se los lleva el aire, y no hay forma de que se acumule monóxido en el ambiente hasta niveles peligrosos. El riesgo de intoxicación aparece en un local cerrado, donde los gases se quedan y se concentran. Por eso allí sí se mide, y en zona exterior no hace falta. Es la norma aplicando el sentido común: se controla donde de verdad hay peligro de acumulación.</a:t>
             </a:r>
           </a:p>
         </p:txBody>
@@ -689,22 +690,22 @@
           <a:lstStyle/>
           <a:p>
             <a:r>
-              <a:t>N1: ¿Qué es eso del monóxido corregido no diluido?</a:t>
-            </a:r>
-          </a:p>
-          <a:p>
-            <a:r>
-              <a:t>N2: Vamos por partes. El monóxido de carbono es el veneno invisible de la combustión: no huele, no se ve, y mata. Se mide en los humos, en los productos de la combustión, siguiendo el procedimiento del anexo A. El tope es quinientas partes por millón: si el aparato lo supera, no se pone en marcha. Ahora lo de corregido no diluido: cuando la sonda mide, a veces se cuela aire de fuera que se mezcla con el humo y rebaja la lectura, la diluye, y te haría creer que hay menos monóxido del que hay. Corregir es referir el valor a la combustión pura, sin ese aire colado, para que quinientas sean quinientas de verdad.</a:t>
-            </a:r>
-          </a:p>
-          <a:p>
-            <a:r>
-              <a:t>N1: ¿Cómo se ve un monóxido alto en obra?</a:t>
-            </a:r>
-          </a:p>
-          <a:p>
-            <a:r>
-              <a:t>N2: Un monóxido alto es señal de llama mal aireada, mala combustión. Lo notas a ojo: llama amarilla en vez de azul, tiznado, ennegrecido en la campana o en la pared por encima del aparato. Esa mancha negra es la firma de una combustión sucia. Por eso se mide y por eso, si pasa de quinientas, ese aparato no arranca hasta arreglarlo.</a:t>
+              <a:t>N1: ¿Esta estanquidad no la hicimos ya antes?</a:t>
+            </a:r>
+          </a:p>
+          <a:p>
+            <a:r>
+              <a:t>N2: Es otra vez el último metro, pero ahora ya con gas y en la puesta en marcha. En la parte ocho comprobabas ese tramo, de la llave del aparato al aparato, con aire y a un tope de ciento diez milibares. Aquí, ya con gas circulando, compruebas todas las uniones entre la llave de conexión del aparato y el propio aparato, dejando el aparato fuera, con la llave de conexión abierta y los mandos del aparato cerrados. Y lo haces con un método cualitativo, o sea, agua jabonosa, un detector, algo que te diga sí pierde o no pierde, sin necesidad de un número exacto.</a:t>
+            </a:r>
+          </a:p>
+          <a:p>
+            <a:r>
+              <a:t>N1: ¿Y la regla si encuentro una fuga?</a:t>
+            </a:r>
+          </a:p>
+          <a:p>
+            <a:r>
+              <a:t>N2: Tajante y sin excepciones: en ningún caso se deja puesto en marcha un aparato si la comprobación de la estanquidad no es correcta. Si ese enlace pierde, no se arranca, punto. Es el mismo último metro de siempre, el sitio donde más fugas salen, y por eso se vigila en cada fase del tema.</a:t>
             </a:r>
           </a:p>
         </p:txBody>
@@ -774,22 +775,22 @@
           <a:lstStyle/>
           <a:p>
             <a:r>
-              <a:t>N1: ¿En qué se diferencia esto del monóxido de los humos?</a:t>
-            </a:r>
-          </a:p>
-          <a:p>
-            <a:r>
-              <a:t>N2: En dónde se mide. Antes medías el monóxido dentro del humo; ahora mides el monóxido que hay en el aire del local, el que respira la gente. Es otra cosa. El procedimiento: se ponen todos los aparatos en marcha a la vez, en régimen estacionario y, si son de tipo B o C, a la máxima potencia; y transcurridos cinco minutos se mide con un analizador cuya sonda se coloca aproximadamente a un metro de los aparatos y a uno coma ochenta metros de altura, más o menos a la altura de la cara de una persona de pie.</a:t>
-            </a:r>
-          </a:p>
-          <a:p>
-            <a:r>
-              <a:t>N1: ¿Y cuál es el límite?</a:t>
-            </a:r>
-          </a:p>
-          <a:p>
-            <a:r>
-              <a:t>N2: Quince partes por millón. Si la medición alcanza ese valor, se determina qué aparato está produciendo el exceso y ese aparato no se pone en marcha. Memoriza el trío de la medida: cinco minutos, un metro, uno coma ochenta metros; y el límite, quince partes por millón. Es el número que separa una cocina segura de una intoxicación lenta en un piso mal ventilado, de esas que empiezan con dolor de cabeza y nadie sabe por qué.</a:t>
+              <a:t>N1: ¿Qué es eso del monóxido corregido no diluido?</a:t>
+            </a:r>
+          </a:p>
+          <a:p>
+            <a:r>
+              <a:t>N2: Vamos por partes. El monóxido de carbono es el veneno invisible de la combustión: no huele, no se ve, y mata. Se mide en los humos, en los productos de la combustión, siguiendo el procedimiento del anexo A. El tope es quinientas partes por millón: si el aparato lo supera, no se pone en marcha. Ahora lo de corregido no diluido: cuando la sonda mide, a veces se cuela aire de fuera que se mezcla con el humo y rebaja la lectura, la diluye, y te haría creer que hay menos monóxido del que hay. Corregir es referir el valor a la combustión pura, sin ese aire colado, para que quinientas sean quinientas de verdad.</a:t>
+            </a:r>
+          </a:p>
+          <a:p>
+            <a:r>
+              <a:t>N1: ¿Cómo se ve un monóxido alto en obra?</a:t>
+            </a:r>
+          </a:p>
+          <a:p>
+            <a:r>
+              <a:t>N2: Un monóxido alto es señal de llama mal aireada, mala combustión. Lo notas a ojo: llama amarilla en vez de azul, tiznado, ennegrecido en la campana o en la pared por encima del aparato. Esa mancha negra es la firma de una combustión sucia. Por eso se mide y por eso, si pasa de quinientas, ese aparato no arranca hasta arreglarlo.</a:t>
             </a:r>
           </a:p>
         </p:txBody>
@@ -859,22 +860,22 @@
           <a:lstStyle/>
           <a:p>
             <a:r>
-              <a:t>N1: ¿Qué son el tiro y el revoco?</a:t>
-            </a:r>
-          </a:p>
-          <a:p>
-            <a:r>
-              <a:t>N2: El tiro es la fuerza con la que el conducto se traga los humos y los lleva hacia arriba y afuera. El revoco es justo lo contrario: que los humos rebotan y vuelven al local en lugar de salir. Esta comprobación solo se hace en los aparatos de tipo B de tiro natural, los que no tienen ventilador que empuje los humos y dependen solo de que el conducto tire bien. Se comprueba que el tiro es suficiente y que no hay revoco.</a:t>
-            </a:r>
-          </a:p>
-          <a:p>
-            <a:r>
-              <a:t>N1: ¿Y cómo se prueba, en condiciones normales?</a:t>
-            </a:r>
-          </a:p>
-          <a:p>
-            <a:r>
-              <a:t>N2: No, se prueba en el peor escenario posible: si en el local hay un extractor mecánico que pueda funcionar a la vez, se pone ese extractor a la máxima potencia y con las puertas y ventanas cerradas. ¿Por qué así? Porque el extractor roba aire del local y puede provocar el revoco; si aguanta en esas condiciones, aguanta siempre. Si se detecta revoco, no se puede poner en marcha el aparato hasta resolverlo. Y cuando el revoco se comprueba midiendo gases del ambiente, hay dos topes que paran la puesta en marcha: dióxido de carbono en ambiente de dos mil quinientas partes por millón, o monóxido en ambiente de quince partes por millón. El dióxido alto delata que los humos se quedan en el local; el monóxido, combustión peligrosa. Cualquiera de los dos, aparato parado.</a:t>
+              <a:t>N1: ¿En qué se diferencia esto del monóxido de los humos?</a:t>
+            </a:r>
+          </a:p>
+          <a:p>
+            <a:r>
+              <a:t>N2: En dónde se mide. Antes medías el monóxido dentro del humo; ahora mides el monóxido que hay en el aire del local, el que respira la gente. Es otra cosa. El procedimiento: se ponen todos los aparatos en marcha a la vez, en régimen estacionario y, si son de tipo B o C, a la máxima potencia; y transcurridos cinco minutos se mide con un analizador cuya sonda se coloca aproximadamente a un metro de los aparatos y a uno coma ochenta metros de altura, más o menos a la altura de la cara de una persona de pie.</a:t>
+            </a:r>
+          </a:p>
+          <a:p>
+            <a:r>
+              <a:t>N1: ¿Y cuál es el límite?</a:t>
+            </a:r>
+          </a:p>
+          <a:p>
+            <a:r>
+              <a:t>N2: Quince partes por millón. Si la medición alcanza ese valor, se determina qué aparato está produciendo el exceso y ese aparato no se pone en marcha. Memoriza el trío de la medida: cinco minutos, un metro, uno coma ochenta metros; y el límite, quince partes por millón. Es el número que separa una cocina segura de una intoxicación lenta en un piso mal ventilado, de esas que empiezan con dolor de cabeza y nadie sabe por qué.</a:t>
             </a:r>
           </a:p>
         </p:txBody>
@@ -944,22 +945,22 @@
           <a:lstStyle/>
           <a:p>
             <a:r>
-              <a:t>N1: ¿Qué es cambiar de familia de gas?</a:t>
-            </a:r>
-          </a:p>
-          <a:p>
-            <a:r>
-              <a:t>N2: Es adaptar un aparato para que funcione con un gas distinto del que tenía. El ejemplo típico es pasar un aparato de gas natural, que es la segunda familia, a propano, que es la tercera familia. Eso obliga a cambiar los inyectores y a reajustar el aparato, porque cada gas quema distinto y necesita su calibre de inyector y su reglaje.</a:t>
-            </a:r>
-          </a:p>
-          <a:p>
-            <a:r>
-              <a:t>N1: ¿Y después basta con dejarlo funcionando?</a:t>
-            </a:r>
-          </a:p>
-          <a:p>
-            <a:r>
-              <a:t>N2: No, y esto es tajante. Después de adecuar un aparato por cambio de familia hay que repetir, cuando corresponda, las comprobaciones de los apartados cuatro punto dos a cuatro punto cinco: estanquidad de la conexión, análisis de la combustión, monóxido en ambiente y tiro. Y además cumplir lo que indica la norma UNE seiscientos setenta guion once para la operación por cambio de combustible. El porqué es evidente: has tocado la combustión, así que tienes que volver a comprobar que quema bien. Adecuar sin volver a medir no vale; te quedaría un aparato que se apaga, hace mala combustión o suelta monóxido.</a:t>
+              <a:t>N1: ¿Qué son el tiro y el revoco?</a:t>
+            </a:r>
+          </a:p>
+          <a:p>
+            <a:r>
+              <a:t>N2: El tiro es la fuerza con la que el conducto se traga los humos y los lleva hacia arriba y afuera. El revoco es justo lo contrario: que los humos rebotan y vuelven al local en lugar de salir. Esta comprobación solo se hace en los aparatos de tipo B de tiro natural, los que no tienen ventilador que empuje los humos y dependen solo de que el conducto tire bien. Se comprueba que el tiro es suficiente y que no hay revoco.</a:t>
+            </a:r>
+          </a:p>
+          <a:p>
+            <a:r>
+              <a:t>N1: ¿Y cómo se prueba, en condiciones normales?</a:t>
+            </a:r>
+          </a:p>
+          <a:p>
+            <a:r>
+              <a:t>N2: No, se prueba en el peor escenario posible: si en el local hay un extractor mecánico que pueda funcionar a la vez, se pone ese extractor a la máxima potencia y con las puertas y ventanas cerradas. ¿Por qué así? Porque el extractor roba aire del local y puede provocar el revoco; si aguanta en esas condiciones, aguanta siempre. Si se detecta revoco, no se puede poner en marcha el aparato hasta resolverlo. Y cuando el revoco se comprueba midiendo gases del ambiente, hay dos topes que paran la puesta en marcha: dióxido de carbono en ambiente de dos mil quinientas partes por millón, o monóxido en ambiente de quince partes por millón. El dióxido alto delata que los humos se quedan en el local; el monóxido, combustión peligrosa. Cualquiera de los dos, aparato parado.</a:t>
             </a:r>
           </a:p>
         </p:txBody>
@@ -1029,22 +1030,22 @@
           <a:lstStyle/>
           <a:p>
             <a:r>
-              <a:t>N1: ¿Por qué importa tanto la calibración del analizador?</a:t>
-            </a:r>
-          </a:p>
-          <a:p>
-            <a:r>
-              <a:t>N2: Porque un equipo descalibrado no vale para nada, o peor: te hace aprobar un aparato con monóxido, o rechazar uno que estaba bien. Y de eso dependen vidas. Por eso la norma pone tres cifras que hay que saberse. Una: la calibración se repite como máximo cada dieciocho meses; puede ser antes si mides mucho, pero nunca más tarde. Dos: el registro documental de esas calibraciones se guarda cinco años. Y tres: la incertidumbre obtenida en la calibración no puede pasar de más menos cinco por ciento.</a:t>
-            </a:r>
-          </a:p>
-          <a:p>
-            <a:r>
-              <a:t>N1: ¿Hay un truco para no confundir los números?</a:t>
-            </a:r>
-          </a:p>
-          <a:p>
-            <a:r>
-              <a:t>N2: Sí: dieciocho meses de vigencia, cinco años de papeles, cinco por ciento de margen. Y añade un detalle que también cae: en el certificado de calibración tienen que constar las botellas patrón utilizadas, que son los gases de referencia con concentración conocida con los que se ajusta el analizador. Sin esa identificación, el certificado cojea. El certificado de calibración es, además, tu respaldo si algún día hay un incidente y te preguntan si tu equipo medía bien.</a:t>
+              <a:t>N1: ¿Qué es cambiar de familia de gas?</a:t>
+            </a:r>
+          </a:p>
+          <a:p>
+            <a:r>
+              <a:t>N2: Es adaptar un aparato para que funcione con un gas distinto del que tenía. El ejemplo típico es pasar un aparato de gas natural, que es la segunda familia, a propano, que es la tercera familia. Eso obliga a cambiar los inyectores y a reajustar el aparato, porque cada gas quema distinto y necesita su calibre de inyector y su reglaje.</a:t>
+            </a:r>
+          </a:p>
+          <a:p>
+            <a:r>
+              <a:t>N1: ¿Y después basta con dejarlo funcionando?</a:t>
+            </a:r>
+          </a:p>
+          <a:p>
+            <a:r>
+              <a:t>N2: No, y esto es tajante. Después de adecuar un aparato por cambio de familia hay que repetir, cuando corresponda, las comprobaciones de los apartados cuatro punto dos a cuatro punto cinco: estanquidad de la conexión, análisis de la combustión, monóxido en ambiente y tiro. Y además cumplir lo que indica la norma UNE seiscientos setenta guion once para la operación por cambio de combustible. El porqué es evidente: has tocado la combustión, así que tienes que volver a comprobar que quema bien. Adecuar sin volver a medir no vale; te quedaría un aparato que se apaga, hace mala combustión o suelta monóxido.</a:t>
             </a:r>
           </a:p>
         </p:txBody>
@@ -1114,22 +1115,22 @@
           <a:lstStyle/>
           <a:p>
             <a:r>
-              <a:t>N1: ¿Cómo se hace bien la medida de los humos?</a:t>
-            </a:r>
-          </a:p>
-          <a:p>
-            <a:r>
-              <a:t>N2: El anexo A lo detalla. Se pone el aparato en régimen estacionario y a la máxima potencia que alcance en ese momento; y tras dos minutos de funcionamiento, o el tiempo que necesite para estabilizarse, se mide el monóxido corregido no diluido en los humos, con un analizador de combustión adecuado. Importante: durante toda la medida hay que asegurarse de que el aparato no baja de potencia; en las calderas modulantes, que solas tienden a bajar, la única garantía es vigilar la presión del quemador.</a:t>
-            </a:r>
-          </a:p>
-          <a:p>
-            <a:r>
-              <a:t>N1: ¿Y lo de la toma de muestras y esos porcentajes?</a:t>
-            </a:r>
-          </a:p>
-          <a:p>
-            <a:r>
-              <a:t>N2: Para aparatos de potencia igual o menor de setenta kilovatios tiene que haber una toma de muestras accesible donde meter la sonda; si no la trae, se instala un sistema de evacuación certificado con esa toma, y al acabar se tapa el orificio con un tapón estanco y reutilizable. Y hay una señal de alarma de medida mala: si ves oxígeno por encima del diez por ciento o dióxido de carbono por debajo del seis por ciento, casi seguro la sonda ha cogido aire de fuera y estás midiendo humo aguado; en ese caso, recolocas la sonda y repites la medida. Las calderas de condensación son la excepción: se rigen por lo que diga el fabricante.</a:t>
+              <a:t>N1: ¿Por qué importa tanto la calibración del analizador?</a:t>
+            </a:r>
+          </a:p>
+          <a:p>
+            <a:r>
+              <a:t>N2: Porque un equipo descalibrado no vale para nada, o peor: te hace aprobar un aparato con monóxido, o rechazar uno que estaba bien. Y de eso dependen vidas. Por eso la norma pone tres cifras que hay que saberse. Una: la calibración se repite como máximo cada dieciocho meses; puede ser antes si mides mucho, pero nunca más tarde. Dos: el registro documental de esas calibraciones se guarda cinco años. Y tres: la incertidumbre obtenida en la calibración no puede pasar de más menos cinco por ciento.</a:t>
+            </a:r>
+          </a:p>
+          <a:p>
+            <a:r>
+              <a:t>N1: ¿Hay un truco para no confundir los números?</a:t>
+            </a:r>
+          </a:p>
+          <a:p>
+            <a:r>
+              <a:t>N2: Sí: dieciocho meses de vigencia, cinco años de papeles, cinco por ciento de margen. Y añade un detalle que también cae: en el certificado de calibración tienen que constar las botellas patrón utilizadas, que son los gases de referencia con concentración conocida con los que se ajusta el analizador. Sin esa identificación, el certificado cojea. El certificado de calibración es, además, tu respaldo si algún día hay un incidente y te preguntan si tu equipo medía bien.</a:t>
             </a:r>
           </a:p>
         </p:txBody>
@@ -1199,22 +1200,22 @@
           <a:lstStyle/>
           <a:p>
             <a:r>
-              <a:t>N1: ¿El anexo B es lo mismo que el A?</a:t>
-            </a:r>
-          </a:p>
-          <a:p>
-            <a:r>
-              <a:t>N2: No, y no hay que mezclarlos, que es un error típico. El anexo A analiza el humo de aparatos con evacuación: tipo B, tipo C, vitrocerámicas y generadores de aire caliente. El anexo B es distinto: mide el monóxido en el aire de un local que tiene calefactores radiantes de tipo A suspendidos, esos que ves en el techo de naves y talleres y que sueltan los humos al propio local. Como no tienen conducto, lo que se vigila es el aire que respira la gente.</a:t>
-            </a:r>
-          </a:p>
-          <a:p>
-            <a:r>
-              <a:t>N1: ¿Y los tiempos y posiciones?</a:t>
-            </a:r>
-          </a:p>
-          <a:p>
-            <a:r>
-              <a:t>N2: En el B son mayores que en el A. Se ponen todos los aparatos del local a máxima potencia y, tras quince minutos de funcionamiento, se mide el monóxido en el ambiente. La sonda se sitúa a uno coma ochenta metros de altura, y se toma un punto al menos cada veinticinco metros cuadrados, para cubrir todo el local por si el monóxido no se reparte igual. Y en cada punto se deja la sonda al menos cinco minutos. El tope de aptitud sigue siendo el general: quince partes por millón de monóxido en ambiente. Recuerda el contraste: en el A dos minutos, en el B quince minutos; el B es más lento porque el local es grande y hay que darle tiempo a que el aire se cargue.</a:t>
+              <a:t>N1: ¿Cómo se hace bien la medida de los humos?</a:t>
+            </a:r>
+          </a:p>
+          <a:p>
+            <a:r>
+              <a:t>N2: El anexo A lo detalla. Se pone el aparato en régimen estacionario y a la máxima potencia que alcance en ese momento; y tras dos minutos de funcionamiento, o el tiempo que necesite para estabilizarse, se mide el monóxido corregido no diluido en los humos, con un analizador de combustión adecuado. Importante: durante toda la medida hay que asegurarse de que el aparato no baja de potencia; en las calderas modulantes, que solas tienden a bajar, la única garantía es vigilar la presión del quemador.</a:t>
+            </a:r>
+          </a:p>
+          <a:p>
+            <a:r>
+              <a:t>N1: ¿Y lo de la toma de muestras y esos porcentajes?</a:t>
+            </a:r>
+          </a:p>
+          <a:p>
+            <a:r>
+              <a:t>N2: Para aparatos de potencia igual o menor de setenta kilovatios tiene que haber una toma de muestras accesible donde meter la sonda; si no la trae, se instala un sistema de evacuación certificado con esa toma, y al acabar se tapa el orificio con un tapón estanco y reutilizable. Y hay una señal de alarma de medida mala: si ves oxígeno por encima del diez por ciento o dióxido de carbono por debajo del seis por ciento, casi seguro la sonda ha cogido aire de fuera y estás midiendo humo aguado; en ese caso, recolocas la sonda y repites la medida. Las calderas de condensación son la excepción: se rigen por lo que diga el fabricante.</a:t>
             </a:r>
           </a:p>
         </p:txBody>
@@ -1284,6 +1285,91 @@
           <a:lstStyle/>
           <a:p>
             <a:r>
+              <a:t>N1: ¿El anexo B es lo mismo que el A?</a:t>
+            </a:r>
+          </a:p>
+          <a:p>
+            <a:r>
+              <a:t>N2: No, y no hay que mezclarlos, que es un error típico. El anexo A analiza el humo de aparatos con evacuación: tipo B, tipo C, vitrocerámicas y generadores de aire caliente. El anexo B es distinto: mide el monóxido en el aire de un local que tiene calefactores radiantes de tipo A suspendidos, esos que ves en el techo de naves y talleres y que sueltan los humos al propio local. Como no tienen conducto, lo que se vigila es el aire que respira la gente.</a:t>
+            </a:r>
+          </a:p>
+          <a:p>
+            <a:r>
+              <a:t>N1: ¿Y los tiempos y posiciones?</a:t>
+            </a:r>
+          </a:p>
+          <a:p>
+            <a:r>
+              <a:t>N2: En el B son mayores que en el A. Se ponen todos los aparatos del local a máxima potencia y, tras quince minutos de funcionamiento, se mide el monóxido en el ambiente. La sonda se sitúa a uno coma ochenta metros de altura, y se toma un punto al menos cada veinticinco metros cuadrados, para cubrir todo el local por si el monóxido no se reparte igual. Y en cada punto se deja la sonda al menos cinco minutos. El tope de aptitud sigue siendo el general: quince partes por millón de monóxido en ambiente. Recuerda el contraste: en el A dos minutos, en el B quince minutos; el B es más lento porque el local es grande y hay que darle tiempo a que el aire se cargue.</a:t>
+            </a:r>
+          </a:p>
+        </p:txBody>
+      </p:sp>
+      <p:sp>
+        <p:nvSpPr>
+          <p:cNvPr id="4" name="Slide Number Placeholder 3"/>
+          <p:cNvSpPr>
+            <a:spLocks noGrp="1"/>
+          </p:cNvSpPr>
+          <p:nvPr>
+            <p:ph type="sldNum" idx="5" sz="quarter"/>
+          </p:nvPr>
+        </p:nvSpPr>
+        <p:spPr/>
+      </p:sp>
+    </p:spTree>
+  </p:cSld>
+  <p:clrMapOvr>
+    <a:masterClrMapping/>
+  </p:clrMapOvr>
+</p:notes>
+</file>
+
+<file path=ppt/notesSlides/notesSlide19.xml><?xml version="1.0" encoding="utf-8"?>
+<p:notes xmlns:a="http://schemas.openxmlformats.org/drawingml/2006/main" xmlns:p="http://schemas.openxmlformats.org/presentationml/2006/main" xmlns:r="http://schemas.openxmlformats.org/officeDocument/2006/relationships">
+  <p:cSld>
+    <p:spTree>
+      <p:nvGrpSpPr>
+        <p:cNvPr id="1" name=""/>
+        <p:cNvGrpSpPr/>
+        <p:nvPr/>
+      </p:nvGrpSpPr>
+      <p:grpSpPr>
+        <a:xfrm>
+          <a:off x="0" y="0"/>
+          <a:ext cx="0" cy="0"/>
+          <a:chOff x="0" y="0"/>
+          <a:chExt cx="0" cy="0"/>
+        </a:xfrm>
+      </p:grpSpPr>
+      <p:sp>
+        <p:nvSpPr>
+          <p:cNvPr id="2" name="Slide Image Placeholder 1"/>
+          <p:cNvSpPr>
+            <a:spLocks noGrp="1"/>
+          </p:cNvSpPr>
+          <p:nvPr>
+            <p:ph type="sldImg" idx="2"/>
+          </p:nvPr>
+        </p:nvSpPr>
+        <p:spPr/>
+      </p:sp>
+      <p:sp>
+        <p:nvSpPr>
+          <p:cNvPr id="3" name="Notes Placeholder 2"/>
+          <p:cNvSpPr>
+            <a:spLocks noGrp="1"/>
+          </p:cNvSpPr>
+          <p:nvPr>
+            <p:ph type="body" idx="3" sz="quarter"/>
+          </p:nvPr>
+        </p:nvSpPr>
+        <p:spPr/>
+        <p:txBody>
+          <a:bodyPr/>
+          <a:lstStyle/>
+          <a:p>
+            <a:r>
               <a:t>N1: Es mucha información, ¿cómo la ordeno para que no se me caiga?</a:t>
             </a:r>
           </a:p>
@@ -1442,26 +1528,7 @@
         <p:txBody>
           <a:bodyPr/>
           <a:lstStyle/>
-          <a:p>
-            <a:r>
-              <a:t>N1: ¿Qué novedades trae esta edición de la Parte 10?</a:t>
-            </a:r>
-          </a:p>
-          <a:p>
-            <a:r>
-              <a:t>N2: Varias que conviene conocer. La primera es el propio título: antes hablaba de verificar el mantenimiento de las condiciones de seguridad, y ahora se llama comprobaciones para la puesta en marcha de los aparatos o tras su adecuación por cambio de familia de gas. O sea, ahora cubre dos cosas: encender un aparato nuevo y también readaptar uno que cambia de tipo de gas. La segunda novedad: introduce la medición del monóxido en el ambiente como criterio adicional para decidir si un aparato es apto. La tercera: recoge en el apartado cuatro punto siete los requisitos de los equipos de medida.</a:t>
-            </a:r>
-          </a:p>
-          <a:p>
-            <a:r>
-              <a:t>N1: ¿Y algo sobre la toma de muestras?</a:t>
-            </a:r>
-          </a:p>
-          <a:p>
-            <a:r>
-              <a:t>N2: Sí, en el anexo A fija que para aparatos de potencia igual o menor de setenta kilovatios tiene que haber una toma de muestras accesible donde meter la sonda; y si el aparato no la trae, se instala un sistema de evacuación con esa toma, certificado. Lo veremos al final con detalle.</a:t>
-            </a:r>
-          </a:p>
+          <a:p/>
         </p:txBody>
       </p:sp>
       <p:sp>
@@ -1529,22 +1596,22 @@
           <a:lstStyle/>
           <a:p>
             <a:r>
-              <a:t>N1: ¿Dónde estamos dentro de todo el tema?</a:t>
-            </a:r>
-          </a:p>
-          <a:p>
-            <a:r>
-              <a:t>N2: En el final de la película. Ya montaste la instalación con las partes tres, cuatro y siete; ya probaste que no pierde con la parte ocho; ya la pusiste en servicio con la parte nueve. Y ahora, con la parte diez, enciendes los aparatos y compruebas que queman bien y no envenenan el aire. Esta parte va de calderas, calentadores, cocinas y demás: su montaje, la estanquidad de su conexión, y sobre todo los gases de la combustión, el monóxido, el dióxido de carbono y el oxígeno, y el tiro del conducto.</a:t>
-            </a:r>
-          </a:p>
-          <a:p>
-            <a:r>
-              <a:t>N1: ¿Entonces aquí ya se trabaja con fuego?</a:t>
-            </a:r>
-          </a:p>
-          <a:p>
-            <a:r>
-              <a:t>N2: Exacto, es la primera vez en el tema que hay llama y humos de verdad. Por eso todo el foco está en la combustión: que el aparato encienda, que la llama sea buena y que los humos salgan por donde tienen que salir. Ahí es donde aparecen las averías graves.</a:t>
+              <a:t>N1: ¿Qué novedades trae esta edición de la Parte 10?</a:t>
+            </a:r>
+          </a:p>
+          <a:p>
+            <a:r>
+              <a:t>N2: Varias que conviene conocer. La primera es el propio título: antes hablaba de verificar el mantenimiento de las condiciones de seguridad, y ahora se llama comprobaciones para la puesta en marcha de los aparatos o tras su adecuación por cambio de familia de gas. O sea, ahora cubre dos cosas: encender un aparato nuevo y también readaptar uno que cambia de tipo de gas. La segunda novedad: introduce la medición del monóxido en el ambiente como criterio adicional para decidir si un aparato es apto. La tercera: recoge en el apartado cuatro punto siete los requisitos de los equipos de medida.</a:t>
+            </a:r>
+          </a:p>
+          <a:p>
+            <a:r>
+              <a:t>N1: ¿Y algo sobre la toma de muestras?</a:t>
+            </a:r>
+          </a:p>
+          <a:p>
+            <a:r>
+              <a:t>N2: Sí, en el anexo A fija que para aparatos de potencia igual o menor de setenta kilovatios tiene que haber una toma de muestras accesible donde meter la sonda; y si el aparato no la trae, se instala un sistema de evacuación con esa toma, certificado. Lo veremos al final con detalle.</a:t>
             </a:r>
           </a:p>
         </p:txBody>
@@ -1614,22 +1681,22 @@
           <a:lstStyle/>
           <a:p>
             <a:r>
-              <a:t>N1: Antes de encender, ¿qué miro lo primero?</a:t>
-            </a:r>
-          </a:p>
-          <a:p>
-            <a:r>
-              <a:t>N2: Dos cosas, siempre, antes de tocar nada. Una: comprobar que el aparato es adecuado para el tipo de gas que le va a llegar. Un aparato preparado para butano no se enciende con gas natural sin adecuarlo antes, y al revés tampoco; los inyectores y los reglajes son distintos. Y dos: comprobar que lleva su marcado, que es como el documento de identidad del aparato, lo que acredita que cumple la legislación.</a:t>
-            </a:r>
-          </a:p>
-          <a:p>
-            <a:r>
-              <a:t>N1: ¿Y al terminar la puesta en marcha?</a:t>
-            </a:r>
-          </a:p>
-          <a:p>
-            <a:r>
-              <a:t>N2: Al terminar hay que emitir un certificado de puesta en marcha. Es el tercer certificado del tema, y conviene que te sepas la cadena entera: primero el de la prueba de estanquidad, luego el de pruebas previas y puesta en servicio, y ahora el de puesta en marcha del aparato. La legislación de referencia es el Reglamento de gas y sus instrucciones técnicas, de la uno a la once. Tres certificados, tres momentos, y este cierra la instalación.</a:t>
+              <a:t>N1: ¿Dónde estamos dentro de todo el tema?</a:t>
+            </a:r>
+          </a:p>
+          <a:p>
+            <a:r>
+              <a:t>N2: En el final de la película. Ya montaste la instalación con las partes tres, cuatro y siete; ya probaste que no pierde con la parte ocho; ya la pusiste en servicio con la parte nueve. Y ahora, con la parte diez, enciendes los aparatos y compruebas que queman bien y no envenenan el aire. Esta parte va de calderas, calentadores, cocinas y demás: su montaje, la estanquidad de su conexión, y sobre todo los gases de la combustión, el monóxido, el dióxido de carbono y el oxígeno, y el tiro del conducto.</a:t>
+            </a:r>
+          </a:p>
+          <a:p>
+            <a:r>
+              <a:t>N1: ¿Entonces aquí ya se trabaja con fuego?</a:t>
+            </a:r>
+          </a:p>
+          <a:p>
+            <a:r>
+              <a:t>N2: Exacto, es la primera vez en el tema que hay llama y humos de verdad. Por eso todo el foco está en la combustión: que el aparato encienda, que la llama sea buena y que los humos salgan por donde tienen que salir. Ahí es donde aparecen las averías graves.</a:t>
             </a:r>
           </a:p>
         </p:txBody>
@@ -1699,22 +1766,22 @@
           <a:lstStyle/>
           <a:p>
             <a:r>
-              <a:t>N1: ¿Qué comprobaciones entran en la puesta en marcha?</a:t>
-            </a:r>
-          </a:p>
-          <a:p>
-            <a:r>
-              <a:t>N2: La norma las junta en una tabla, la tabla uno, con cinco comprobaciones posibles y una columna por cada tipo de aparato. Las cinco son: correcto montaje del aparato, estanquidad de la conexión, análisis de los productos de la combustión, medición del monóxido en el ambiente, y comprobación del tiro del conducto de evacuación. No todas se hacen a todos los aparatos; la tabla te dice, con un sí o un no, cuáles tocan según el tipo.</a:t>
-            </a:r>
-          </a:p>
-          <a:p>
-            <a:r>
-              <a:t>N1: ¿Y siempre mando yo, o mando el fabricante?</a:t>
-            </a:r>
-          </a:p>
-          <a:p>
-            <a:r>
-              <a:t>N2: Muy buena pregunta. Siempre se hacen, como mínimo, las que dice la norma según el tipo de aparato, pero además hay que hacer las que indique el fabricante en su manual de instrucciones. Es decir, la tabla es el mínimo obligatorio; el manual puede pedir más. Y una regla de oro que ya adelanto: si cualquiera de las comprobaciones no sale bien, la llave del aparato queda cerrada, bloqueada y precintada, y ese aparato no se pone en marcha.</a:t>
+              <a:t>N1: Antes de encender, ¿qué miro lo primero?</a:t>
+            </a:r>
+          </a:p>
+          <a:p>
+            <a:r>
+              <a:t>N2: Dos cosas, siempre, antes de tocar nada. Una: comprobar que el aparato es adecuado para el tipo de gas que le va a llegar. Un aparato preparado para butano no se enciende con gas natural sin adecuarlo antes, y al revés tampoco; los inyectores y los reglajes son distintos. Y dos: comprobar que lleva su marcado, que es como el documento de identidad del aparato, lo que acredita que cumple la legislación.</a:t>
+            </a:r>
+          </a:p>
+          <a:p>
+            <a:r>
+              <a:t>N1: ¿Y al terminar la puesta en marcha?</a:t>
+            </a:r>
+          </a:p>
+          <a:p>
+            <a:r>
+              <a:t>N2: Al terminar hay que emitir un certificado de puesta en marcha. Es el tercer certificado del tema, y conviene que te sepas la cadena entera: primero el de la prueba de estanquidad, luego el de pruebas previas y puesta en servicio, y ahora el de puesta en marcha del aparato. La legislación de referencia es el Reglamento de gas y sus instrucciones técnicas, de la uno a la once. Tres certificados, tres momentos, y este cierra la instalación.</a:t>
             </a:r>
           </a:p>
         </p:txBody>
@@ -1784,22 +1851,22 @@
           <a:lstStyle/>
           <a:p>
             <a:r>
-              <a:t>N1: ¿Qué diferencia hay entre tipo A, B y C?</a:t>
-            </a:r>
-          </a:p>
-          <a:p>
-            <a:r>
-              <a:t>N2: Se clasifican por cómo evacúan los humos, según la norma UNE-EN mil setecientos cuarenta y nueve, y entenderlo es la llave de toda la tabla. Tipo A: no tiene conducto de evacuación, suelta los humos al propio local. Son la cocina de gas, la encimera, algunos calefactores. Tipo B: coge el aire del local para quemar y expulsa los humos por un conducto. Es el calentador o la caldera atmosférica de toda la vida. Tipo C: es estanco, coge el aire de fuera y echa los humos fuera, por un conducto que no comunica con el local. Son las calderas modernas de ventosa.</a:t>
-            </a:r>
-          </a:p>
-          <a:p>
-            <a:r>
-              <a:t>N1: ¿Y por qué importa tanto el tipo?</a:t>
-            </a:r>
-          </a:p>
-          <a:p>
-            <a:r>
-              <a:t>N2: Porque el tipo decide qué comprobaciones tocan. Un tipo A, que suelta humos al local, exige vigilar el monóxido en el ambiente; un tipo B de tiro natural exige comprobar el tiro, porque depende de que el conducto tire bien; y un tipo C, al ser estanco, se libra del tiro y del ambiente en muchos casos. Entender el tipo es entender la tabla.</a:t>
+              <a:t>N1: ¿Qué comprobaciones entran en la puesta en marcha?</a:t>
+            </a:r>
+          </a:p>
+          <a:p>
+            <a:r>
+              <a:t>N2: La norma las junta en una tabla, la tabla uno, con cinco comprobaciones posibles y una columna por cada tipo de aparato. Las cinco son: correcto montaje del aparato, estanquidad de la conexión, análisis de los productos de la combustión, medición del monóxido en el ambiente, y comprobación del tiro del conducto de evacuación. No todas se hacen a todos los aparatos; la tabla te dice, con un sí o un no, cuáles tocan según el tipo.</a:t>
+            </a:r>
+          </a:p>
+          <a:p>
+            <a:r>
+              <a:t>N1: ¿Y siempre mando yo, o mando el fabricante?</a:t>
+            </a:r>
+          </a:p>
+          <a:p>
+            <a:r>
+              <a:t>N2: Muy buena pregunta. Siempre se hacen, como mínimo, las que dice la norma según el tipo de aparato, pero además hay que hacer las que indique el fabricante en su manual de instrucciones. Es decir, la tabla es el mínimo obligatorio; el manual puede pedir más. Y una regla de oro que ya adelanto: si cualquiera de las comprobaciones no sale bien, la llave del aparato queda cerrada, bloqueada y precintada, y ese aparato no se pone en marcha.</a:t>
             </a:r>
           </a:p>
         </p:txBody>
@@ -1869,22 +1936,22 @@
           <a:lstStyle/>
           <a:p>
             <a:r>
-              <a:t>N1: ¿Hay algo que se compruebe siempre, sea el aparato que sea?</a:t>
-            </a:r>
-          </a:p>
-          <a:p>
-            <a:r>
-              <a:t>N2: Sí, dos comprobaciones se hacen a todos, sean A, B o C: el correcto montaje del aparato y la estanquidad de su conexión. Esas dos no fallan nunca en la lista. Las demás, análisis de combustión, monóxido en ambiente y tiro, dependen del tipo y de dónde esté puesto el aparato.</a:t>
-            </a:r>
-          </a:p>
-          <a:p>
-            <a:r>
-              <a:t>N1: ¿Y qué pasa si una comprobación sale mal?</a:t>
-            </a:r>
-          </a:p>
-          <a:p>
-            <a:r>
-              <a:t>N2: Aquí está la consecuencia estrella, y cae muchísimo: si cualquier comprobación no da resultado positivo, la llave del aparato queda cerrada, bloqueada y precintada, y ese aparato no se pone en marcha hasta que se arregle. Fíjate que es la misma fórmula de las llaves que vimos en la puesta en servicio. El porqué es de peso: arrancar para que el cliente tenga agua caliente un aparato que no ha pasado las comprobaciones es firmar una posible intoxicación. Antes precintar y dejarlo parado que encender algo peligroso.</a:t>
+              <a:t>N1: ¿Qué diferencia hay entre tipo A, B y C?</a:t>
+            </a:r>
+          </a:p>
+          <a:p>
+            <a:r>
+              <a:t>N2: Se clasifican por cómo evacúan los humos, según la norma UNE-EN mil setecientos cuarenta y nueve, y entenderlo es la llave de toda la tabla. Tipo A: no tiene conducto de evacuación, suelta los humos al propio local. Son la cocina de gas, la encimera, algunos calefactores. Tipo B: coge el aire del local para quemar y expulsa los humos por un conducto. Es el calentador o la caldera atmosférica de toda la vida. Tipo C: es estanco, coge el aire de fuera y echa los humos fuera, por un conducto que no comunica con el local. Son las calderas modernas de ventosa.</a:t>
+            </a:r>
+          </a:p>
+          <a:p>
+            <a:r>
+              <a:t>N1: ¿Y por qué importa tanto el tipo?</a:t>
+            </a:r>
+          </a:p>
+          <a:p>
+            <a:r>
+              <a:t>N2: Porque el tipo decide qué comprobaciones tocan. Un tipo A, que suelta humos al local, exige vigilar el monóxido en el ambiente; un tipo B de tiro natural exige comprobar el tiro, porque depende de que el conducto tire bien; y un tipo C, al ser estanco, se libra del tiro y del ambiente en muchos casos. Entender el tipo es entender la tabla.</a:t>
             </a:r>
           </a:p>
         </p:txBody>
@@ -1954,22 +2021,22 @@
           <a:lstStyle/>
           <a:p>
             <a:r>
-              <a:t>N1: Hay casillas de la tabla con un asterisco, ¿qué significa?</a:t>
-            </a:r>
-          </a:p>
-          <a:p>
-            <a:r>
-              <a:t>N2: Ese asterisco es una condición muy lógica. Varias comprobaciones, sobre todo el monóxido en ambiente y el tiro, solo se exigen si el aparato no está en una zona exterior. La norma considera zona exterior los patios, las cubiertas y sitios así, abiertos. Si el aparato está ahí, esas comprobaciones no se piden.</a:t>
-            </a:r>
-          </a:p>
-          <a:p>
-            <a:r>
-              <a:t>N1: ¿Y por qué al aire libre no se miden?</a:t>
-            </a:r>
-          </a:p>
-          <a:p>
-            <a:r>
-              <a:t>N2: Porque al aire libre los humos se dispersan solos, se los lleva el aire, y no hay forma de que se acumule monóxido en el ambiente hasta niveles peligrosos. El riesgo de intoxicación aparece en un local cerrado, donde los gases se quedan y se concentran. Por eso allí sí se mide, y en zona exterior no hace falta. Es la norma aplicando el sentido común: se controla donde de verdad hay peligro de acumulación.</a:t>
+              <a:t>N1: ¿Hay algo que se compruebe siempre, sea el aparato que sea?</a:t>
+            </a:r>
+          </a:p>
+          <a:p>
+            <a:r>
+              <a:t>N2: Sí, dos comprobaciones se hacen a todos, sean A, B o C: el correcto montaje del aparato y la estanquidad de su conexión. Esas dos no fallan nunca en la lista. Las demás, análisis de combustión, monóxido en ambiente y tiro, dependen del tipo y de dónde esté puesto el aparato.</a:t>
+            </a:r>
+          </a:p>
+          <a:p>
+            <a:r>
+              <a:t>N1: ¿Y qué pasa si una comprobación sale mal?</a:t>
+            </a:r>
+          </a:p>
+          <a:p>
+            <a:r>
+              <a:t>N2: Aquí está la consecuencia estrella, y cae muchísimo: si cualquier comprobación no da resultado positivo, la llave del aparato queda cerrada, bloqueada y precintada, y ese aparato no se pone en marcha hasta que se arregle. Fíjate que es la misma fórmula de las llaves que vimos en la puesta en servicio. El porqué es de peso: arrancar para que el cliente tenga agua caliente un aparato que no ha pasado las comprobaciones es firmar una posible intoxicación. Antes precintar y dejarlo parado que encender algo peligroso.</a:t>
             </a:r>
           </a:p>
         </p:txBody>
@@ -5044,7 +5111,7 @@
             <a:r>
               <a:rPr sz="1400" b="1" i="0">
                 <a:solidFill>
-                  <a:srgbClr val="CADCFC"/>
+                  <a:srgbClr val="F4A24C"/>
                 </a:solidFill>
                 <a:latin typeface="Montserrat"/>
               </a:rPr>
@@ -5055,13 +5122,57 @@
       </p:sp>
       <p:sp>
         <p:nvSpPr>
-          <p:cNvPr id="4" name="TextBox 3"/>
+          <p:cNvPr id="4" name="Rounded Rectangle 3"/>
+          <p:cNvSpPr/>
+          <p:nvPr/>
+        </p:nvSpPr>
+        <p:spPr>
+          <a:xfrm>
+            <a:off x="868680" y="2057400"/>
+            <a:ext cx="1463040" cy="82296"/>
+          </a:xfrm>
+          <a:prstGeom prst="roundRect">
+            <a:avLst/>
+          </a:prstGeom>
+          <a:solidFill>
+            <a:srgbClr val="E8801A"/>
+          </a:solidFill>
+          <a:ln>
+            <a:noFill/>
+          </a:ln>
+          <a:effectLst/>
+        </p:spPr>
+        <p:style>
+          <a:lnRef idx="1">
+            <a:schemeClr val="accent1"/>
+          </a:lnRef>
+          <a:fillRef idx="3">
+            <a:schemeClr val="accent1"/>
+          </a:fillRef>
+          <a:effectRef idx="2">
+            <a:schemeClr val="accent1"/>
+          </a:effectRef>
+          <a:fontRef idx="minor">
+            <a:schemeClr val="lt1"/>
+          </a:fontRef>
+        </p:style>
+        <p:txBody>
+          <a:bodyPr rtlCol="0" anchor="ctr"/>
+          <a:lstStyle/>
+          <a:p>
+            <a:pPr algn="ctr"/>
+          </a:p>
+        </p:txBody>
+      </p:sp>
+      <p:sp>
+        <p:nvSpPr>
+          <p:cNvPr id="5" name="TextBox 4"/>
           <p:cNvSpPr txBox="1"/>
           <p:nvPr/>
         </p:nvSpPr>
         <p:spPr>
           <a:xfrm>
-            <a:off x="822960" y="2194560"/>
+            <a:off x="822960" y="2286000"/>
             <a:ext cx="10515600" cy="2011680"/>
           </a:xfrm>
           <a:prstGeom prst="rect">
@@ -5100,7 +5211,7 @@
       </p:sp>
       <p:sp>
         <p:nvSpPr>
-          <p:cNvPr id="5" name="TextBox 4"/>
+          <p:cNvPr id="6" name="TextBox 5"/>
           <p:cNvSpPr txBox="1"/>
           <p:nvPr/>
         </p:nvSpPr>
@@ -5224,7 +5335,7 @@
                 </a:solidFill>
                 <a:latin typeface="Montserrat"/>
               </a:rPr>
-              <a:t>010 / 018</a:t>
+              <a:t>010 / 019</a:t>
             </a:r>
           </a:p>
         </p:txBody>
@@ -5272,7 +5383,7 @@
         <p:spPr>
           <a:xfrm>
             <a:off x="822960" y="457200"/>
-            <a:ext cx="8229600" cy="365760"/>
+            <a:ext cx="10058400" cy="365760"/>
           </a:xfrm>
           <a:prstGeom prst="rect">
             <a:avLst/>
@@ -5286,13 +5397,13 @@
           <a:lstStyle/>
           <a:p>
             <a:r>
-              <a:rPr sz="1200" b="1" i="0">
-                <a:solidFill>
-                  <a:srgbClr val="64748B"/>
-                </a:solidFill>
-                <a:latin typeface="Montserrat"/>
-              </a:rPr>
-              <a:t>APARTADO 4.2</a:t>
+              <a:rPr sz="1300" b="1" i="0">
+                <a:solidFill>
+                  <a:srgbClr val="E8801A"/>
+                </a:solidFill>
+                <a:latin typeface="Montserrat"/>
+              </a:rPr>
+              <a:t>TABLA 1 · MATIZ</a:t>
             </a:r>
           </a:p>
         </p:txBody>
@@ -5320,26 +5431,70 @@
           <a:lstStyle/>
           <a:p>
             <a:r>
-              <a:rPr sz="2700" b="1" i="0">
+              <a:rPr sz="2800" b="1" i="0">
                 <a:solidFill>
                   <a:srgbClr val="1E2761"/>
                 </a:solidFill>
                 <a:latin typeface="Montserrat"/>
               </a:rPr>
-              <a:t>Estanquidad de la conexión</a:t>
-            </a:r>
-          </a:p>
-        </p:txBody>
-      </p:sp>
-      <p:sp>
-        <p:nvSpPr>
-          <p:cNvPr id="7" name="TextBox 6"/>
+              <a:t>La coletilla de la zona exterior</a:t>
+            </a:r>
+          </a:p>
+        </p:txBody>
+      </p:sp>
+      <p:sp>
+        <p:nvSpPr>
+          <p:cNvPr id="7" name="Rounded Rectangle 6"/>
+          <p:cNvSpPr/>
+          <p:nvPr/>
+        </p:nvSpPr>
+        <p:spPr>
+          <a:xfrm>
+            <a:off x="868680" y="1627632"/>
+            <a:ext cx="2011680" cy="73152"/>
+          </a:xfrm>
+          <a:prstGeom prst="roundRect">
+            <a:avLst/>
+          </a:prstGeom>
+          <a:solidFill>
+            <a:srgbClr val="E8801A"/>
+          </a:solidFill>
+          <a:ln>
+            <a:noFill/>
+          </a:ln>
+          <a:effectLst/>
+        </p:spPr>
+        <p:style>
+          <a:lnRef idx="1">
+            <a:schemeClr val="accent1"/>
+          </a:lnRef>
+          <a:fillRef idx="3">
+            <a:schemeClr val="accent1"/>
+          </a:fillRef>
+          <a:effectRef idx="2">
+            <a:schemeClr val="accent1"/>
+          </a:effectRef>
+          <a:fontRef idx="minor">
+            <a:schemeClr val="lt1"/>
+          </a:fontRef>
+        </p:style>
+        <p:txBody>
+          <a:bodyPr rtlCol="0" anchor="ctr"/>
+          <a:lstStyle/>
+          <a:p>
+            <a:pPr algn="ctr"/>
+          </a:p>
+        </p:txBody>
+      </p:sp>
+      <p:sp>
+        <p:nvSpPr>
+          <p:cNvPr id="8" name="TextBox 7"/>
           <p:cNvSpPr txBox="1"/>
           <p:nvPr/>
         </p:nvSpPr>
         <p:spPr>
           <a:xfrm>
-            <a:off x="822960" y="1920240"/>
+            <a:off x="822960" y="1965960"/>
             <a:ext cx="4983480" cy="4206240"/>
           </a:xfrm>
           <a:prstGeom prst="rect">
@@ -5355,17 +5510,17 @@
           <a:p>
             <a:pPr>
               <a:spcAft>
-                <a:spcPts val="1000"/>
+                <a:spcPts val="1100"/>
               </a:spcAft>
             </a:pPr>
             <a:r>
               <a:rPr sz="1600" b="1" i="0">
                 <a:solidFill>
-                  <a:srgbClr val="2E3A80"/>
-                </a:solidFill>
-                <a:latin typeface="Montserrat"/>
-              </a:rPr>
-              <a:t>•  </a:t>
+                  <a:srgbClr val="E8801A"/>
+                </a:solidFill>
+                <a:latin typeface="Montserrat"/>
+              </a:rPr>
+              <a:t>▸  </a:t>
             </a:r>
             <a:r>
               <a:rPr sz="1600" b="0" i="0">
@@ -5374,23 +5529,23 @@
                 </a:solidFill>
                 <a:latin typeface="Montserrat"/>
               </a:rPr>
-              <a:t>Llave de conexión abierta, mandos cerrados</a:t>
+              <a:t>Varias casillas llevan un asterisco</a:t>
             </a:r>
           </a:p>
           <a:p>
             <a:pPr>
               <a:spcAft>
-                <a:spcPts val="1000"/>
+                <a:spcPts val="1100"/>
               </a:spcAft>
             </a:pPr>
             <a:r>
               <a:rPr sz="1600" b="1" i="0">
                 <a:solidFill>
-                  <a:srgbClr val="2E3A80"/>
-                </a:solidFill>
-                <a:latin typeface="Montserrat"/>
-              </a:rPr>
-              <a:t>•  </a:t>
+                  <a:srgbClr val="E8801A"/>
+                </a:solidFill>
+                <a:latin typeface="Montserrat"/>
+              </a:rPr>
+              <a:t>▸  </a:t>
             </a:r>
             <a:r>
               <a:rPr sz="1600" b="0" i="0">
@@ -5399,23 +5554,23 @@
                 </a:solidFill>
                 <a:latin typeface="Montserrat"/>
               </a:rPr>
-              <a:t>Uniones entre la llave y el aparato</a:t>
+              <a:t>Solo se exigen si no es zona exterior</a:t>
             </a:r>
           </a:p>
           <a:p>
             <a:pPr>
               <a:spcAft>
-                <a:spcPts val="1000"/>
+                <a:spcPts val="1100"/>
               </a:spcAft>
             </a:pPr>
             <a:r>
               <a:rPr sz="1600" b="1" i="0">
                 <a:solidFill>
-                  <a:srgbClr val="2E3A80"/>
-                </a:solidFill>
-                <a:latin typeface="Montserrat"/>
-              </a:rPr>
-              <a:t>•  </a:t>
+                  <a:srgbClr val="E8801A"/>
+                </a:solidFill>
+                <a:latin typeface="Montserrat"/>
+              </a:rPr>
+              <a:t>▸  </a:t>
             </a:r>
             <a:r>
               <a:rPr sz="1600" b="0" i="0">
@@ -5424,23 +5579,23 @@
                 </a:solidFill>
                 <a:latin typeface="Montserrat"/>
               </a:rPr>
-              <a:t>Con método cualitativo: agua jabonosa o detector</a:t>
+              <a:t>Al aire libre los humos se dispersan</a:t>
             </a:r>
           </a:p>
           <a:p>
             <a:pPr>
               <a:spcAft>
-                <a:spcPts val="1000"/>
+                <a:spcPts val="1100"/>
               </a:spcAft>
             </a:pPr>
             <a:r>
               <a:rPr sz="1600" b="1" i="0">
                 <a:solidFill>
-                  <a:srgbClr val="2E3A80"/>
-                </a:solidFill>
-                <a:latin typeface="Montserrat"/>
-              </a:rPr>
-              <a:t>•  </a:t>
+                  <a:srgbClr val="E8801A"/>
+                </a:solidFill>
+                <a:latin typeface="Montserrat"/>
+              </a:rPr>
+              <a:t>▸  </a:t>
             </a:r>
             <a:r>
               <a:rPr sz="1600" b="0" i="0">
@@ -5449,14 +5604,14 @@
                 </a:solidFill>
                 <a:latin typeface="Montserrat"/>
               </a:rPr>
-              <a:t>Si pierde, no se arranca</a:t>
-            </a:r>
-          </a:p>
-        </p:txBody>
-      </p:sp>
-      <p:sp>
-        <p:nvSpPr>
-          <p:cNvPr id="8" name="imgph" descr="IMGQ:soapy water bubble test gas pipe"/>
+              <a:t>En local cerrado sí hay riesgo</a:t>
+            </a:r>
+          </a:p>
+        </p:txBody>
+      </p:sp>
+      <p:sp>
+        <p:nvSpPr>
+          <p:cNvPr id="9" name="imgph" descr="IMGQ:rooftop gas appliance open air"/>
           <p:cNvSpPr/>
           <p:nvPr/>
         </p:nvSpPr>
@@ -5502,7 +5657,7 @@
       </p:sp>
       <p:sp>
         <p:nvSpPr>
-          <p:cNvPr id="9" name="TextBox 8"/>
+          <p:cNvPr id="10" name="TextBox 9"/>
           <p:cNvSpPr txBox="1"/>
           <p:nvPr/>
         </p:nvSpPr>
@@ -5542,7 +5697,7 @@
                 </a:solidFill>
                 <a:latin typeface="Montserrat"/>
               </a:rPr>
-              <a:t>soapy water bubble test gas pipe</a:t>
+              <a:t>rooftop gas appliance open air</a:t>
             </a:r>
           </a:p>
         </p:txBody>
@@ -5639,7 +5794,7 @@
                 </a:solidFill>
                 <a:latin typeface="Montserrat"/>
               </a:rPr>
-              <a:t>011 / 018</a:t>
+              <a:t>011 / 019</a:t>
             </a:r>
           </a:p>
         </p:txBody>
@@ -5687,7 +5842,7 @@
         <p:spPr>
           <a:xfrm>
             <a:off x="822960" y="457200"/>
-            <a:ext cx="8229600" cy="365760"/>
+            <a:ext cx="10058400" cy="365760"/>
           </a:xfrm>
           <a:prstGeom prst="rect">
             <a:avLst/>
@@ -5701,13 +5856,13 @@
           <a:lstStyle/>
           <a:p>
             <a:r>
-              <a:rPr sz="1200" b="1" i="0">
-                <a:solidFill>
-                  <a:srgbClr val="64748B"/>
-                </a:solidFill>
-                <a:latin typeface="Montserrat"/>
-              </a:rPr>
-              <a:t>APARTADO 4.3</a:t>
+              <a:rPr sz="1300" b="1" i="0">
+                <a:solidFill>
+                  <a:srgbClr val="E8801A"/>
+                </a:solidFill>
+                <a:latin typeface="Montserrat"/>
+              </a:rPr>
+              <a:t>APARTADO 4.2</a:t>
             </a:r>
           </a:p>
         </p:txBody>
@@ -5735,26 +5890,70 @@
           <a:lstStyle/>
           <a:p>
             <a:r>
-              <a:rPr sz="2700" b="1" i="0">
+              <a:rPr sz="2800" b="1" i="0">
                 <a:solidFill>
                   <a:srgbClr val="1E2761"/>
                 </a:solidFill>
                 <a:latin typeface="Montserrat"/>
               </a:rPr>
-              <a:t>CO en humos: 500 ppm</a:t>
-            </a:r>
-          </a:p>
-        </p:txBody>
-      </p:sp>
-      <p:sp>
-        <p:nvSpPr>
-          <p:cNvPr id="7" name="TextBox 6"/>
+              <a:t>Estanquidad de la conexión</a:t>
+            </a:r>
+          </a:p>
+        </p:txBody>
+      </p:sp>
+      <p:sp>
+        <p:nvSpPr>
+          <p:cNvPr id="7" name="Rounded Rectangle 6"/>
+          <p:cNvSpPr/>
+          <p:nvPr/>
+        </p:nvSpPr>
+        <p:spPr>
+          <a:xfrm>
+            <a:off x="868680" y="1627632"/>
+            <a:ext cx="2011680" cy="73152"/>
+          </a:xfrm>
+          <a:prstGeom prst="roundRect">
+            <a:avLst/>
+          </a:prstGeom>
+          <a:solidFill>
+            <a:srgbClr val="E8801A"/>
+          </a:solidFill>
+          <a:ln>
+            <a:noFill/>
+          </a:ln>
+          <a:effectLst/>
+        </p:spPr>
+        <p:style>
+          <a:lnRef idx="1">
+            <a:schemeClr val="accent1"/>
+          </a:lnRef>
+          <a:fillRef idx="3">
+            <a:schemeClr val="accent1"/>
+          </a:fillRef>
+          <a:effectRef idx="2">
+            <a:schemeClr val="accent1"/>
+          </a:effectRef>
+          <a:fontRef idx="minor">
+            <a:schemeClr val="lt1"/>
+          </a:fontRef>
+        </p:style>
+        <p:txBody>
+          <a:bodyPr rtlCol="0" anchor="ctr"/>
+          <a:lstStyle/>
+          <a:p>
+            <a:pPr algn="ctr"/>
+          </a:p>
+        </p:txBody>
+      </p:sp>
+      <p:sp>
+        <p:nvSpPr>
+          <p:cNvPr id="8" name="TextBox 7"/>
           <p:cNvSpPr txBox="1"/>
           <p:nvPr/>
         </p:nvSpPr>
         <p:spPr>
           <a:xfrm>
-            <a:off x="822960" y="1920240"/>
+            <a:off x="822960" y="1965960"/>
             <a:ext cx="4983480" cy="4206240"/>
           </a:xfrm>
           <a:prstGeom prst="rect">
@@ -5770,17 +5969,17 @@
           <a:p>
             <a:pPr>
               <a:spcAft>
-                <a:spcPts val="1000"/>
+                <a:spcPts val="1100"/>
               </a:spcAft>
             </a:pPr>
             <a:r>
               <a:rPr sz="1600" b="1" i="0">
                 <a:solidFill>
-                  <a:srgbClr val="2E3A80"/>
-                </a:solidFill>
-                <a:latin typeface="Montserrat"/>
-              </a:rPr>
-              <a:t>•  </a:t>
+                  <a:srgbClr val="E8801A"/>
+                </a:solidFill>
+                <a:latin typeface="Montserrat"/>
+              </a:rPr>
+              <a:t>▸  </a:t>
             </a:r>
             <a:r>
               <a:rPr sz="1600" b="0" i="0">
@@ -5789,23 +5988,23 @@
                 </a:solidFill>
                 <a:latin typeface="Montserrat"/>
               </a:rPr>
-              <a:t>Se mide en los productos de combustión</a:t>
+              <a:t>Llave de conexión abierta, mandos cerrados</a:t>
             </a:r>
           </a:p>
           <a:p>
             <a:pPr>
               <a:spcAft>
-                <a:spcPts val="1000"/>
+                <a:spcPts val="1100"/>
               </a:spcAft>
             </a:pPr>
             <a:r>
               <a:rPr sz="1600" b="1" i="0">
                 <a:solidFill>
-                  <a:srgbClr val="2E3A80"/>
-                </a:solidFill>
-                <a:latin typeface="Montserrat"/>
-              </a:rPr>
-              <a:t>•  </a:t>
+                  <a:srgbClr val="E8801A"/>
+                </a:solidFill>
+                <a:latin typeface="Montserrat"/>
+              </a:rPr>
+              <a:t>▸  </a:t>
             </a:r>
             <a:r>
               <a:rPr sz="1600" b="0" i="0">
@@ -5814,23 +6013,23 @@
                 </a:solidFill>
                 <a:latin typeface="Montserrat"/>
               </a:rPr>
-              <a:t>CO corregido no diluido</a:t>
+              <a:t>Uniones entre la llave y el aparato</a:t>
             </a:r>
           </a:p>
           <a:p>
             <a:pPr>
               <a:spcAft>
-                <a:spcPts val="1000"/>
+                <a:spcPts val="1100"/>
               </a:spcAft>
             </a:pPr>
             <a:r>
               <a:rPr sz="1600" b="1" i="0">
                 <a:solidFill>
-                  <a:srgbClr val="2E3A80"/>
-                </a:solidFill>
-                <a:latin typeface="Montserrat"/>
-              </a:rPr>
-              <a:t>•  </a:t>
+                  <a:srgbClr val="E8801A"/>
+                </a:solidFill>
+                <a:latin typeface="Montserrat"/>
+              </a:rPr>
+              <a:t>▸  </a:t>
             </a:r>
             <a:r>
               <a:rPr sz="1600" b="0" i="0">
@@ -5839,23 +6038,23 @@
                 </a:solidFill>
                 <a:latin typeface="Montserrat"/>
               </a:rPr>
-              <a:t>Por encima de 500 ppm: no arranca</a:t>
+              <a:t>Con método cualitativo: agua jabonosa o detector</a:t>
             </a:r>
           </a:p>
           <a:p>
             <a:pPr>
               <a:spcAft>
-                <a:spcPts val="1000"/>
+                <a:spcPts val="1100"/>
               </a:spcAft>
             </a:pPr>
             <a:r>
               <a:rPr sz="1600" b="1" i="0">
                 <a:solidFill>
-                  <a:srgbClr val="2E3A80"/>
-                </a:solidFill>
-                <a:latin typeface="Montserrat"/>
-              </a:rPr>
-              <a:t>•  </a:t>
+                  <a:srgbClr val="E8801A"/>
+                </a:solidFill>
+                <a:latin typeface="Montserrat"/>
+              </a:rPr>
+              <a:t>▸  </a:t>
             </a:r>
             <a:r>
               <a:rPr sz="1600" b="0" i="0">
@@ -5864,14 +6063,14 @@
                 </a:solidFill>
                 <a:latin typeface="Montserrat"/>
               </a:rPr>
-              <a:t>Corregir evita que el aire rebaje la lectura</a:t>
-            </a:r>
-          </a:p>
-        </p:txBody>
-      </p:sp>
-      <p:sp>
-        <p:nvSpPr>
-          <p:cNvPr id="8" name="imgph" descr="IMGQ:yellow gas flame poor combustion"/>
+              <a:t>Si pierde, no se arranca</a:t>
+            </a:r>
+          </a:p>
+        </p:txBody>
+      </p:sp>
+      <p:sp>
+        <p:nvSpPr>
+          <p:cNvPr id="9" name="imgph" descr="IMGQ:soapy water bubble test gas pipe"/>
           <p:cNvSpPr/>
           <p:nvPr/>
         </p:nvSpPr>
@@ -5917,7 +6116,7 @@
       </p:sp>
       <p:sp>
         <p:nvSpPr>
-          <p:cNvPr id="9" name="TextBox 8"/>
+          <p:cNvPr id="10" name="TextBox 9"/>
           <p:cNvSpPr txBox="1"/>
           <p:nvPr/>
         </p:nvSpPr>
@@ -5957,7 +6156,7 @@
                 </a:solidFill>
                 <a:latin typeface="Montserrat"/>
               </a:rPr>
-              <a:t>yellow gas flame poor combustion</a:t>
+              <a:t>soapy water bubble test gas pipe</a:t>
             </a:r>
           </a:p>
         </p:txBody>
@@ -6054,7 +6253,7 @@
                 </a:solidFill>
                 <a:latin typeface="Montserrat"/>
               </a:rPr>
-              <a:t>012 / 018</a:t>
+              <a:t>012 / 019</a:t>
             </a:r>
           </a:p>
         </p:txBody>
@@ -6102,7 +6301,7 @@
         <p:spPr>
           <a:xfrm>
             <a:off x="822960" y="457200"/>
-            <a:ext cx="8229600" cy="365760"/>
+            <a:ext cx="10058400" cy="365760"/>
           </a:xfrm>
           <a:prstGeom prst="rect">
             <a:avLst/>
@@ -6116,13 +6315,13 @@
           <a:lstStyle/>
           <a:p>
             <a:r>
-              <a:rPr sz="1200" b="1" i="0">
-                <a:solidFill>
-                  <a:srgbClr val="64748B"/>
-                </a:solidFill>
-                <a:latin typeface="Montserrat"/>
-              </a:rPr>
-              <a:t>APARTADO 4.4</a:t>
+              <a:rPr sz="1300" b="1" i="0">
+                <a:solidFill>
+                  <a:srgbClr val="E8801A"/>
+                </a:solidFill>
+                <a:latin typeface="Montserrat"/>
+              </a:rPr>
+              <a:t>APARTADO 4.3</a:t>
             </a:r>
           </a:p>
         </p:txBody>
@@ -6150,26 +6349,70 @@
           <a:lstStyle/>
           <a:p>
             <a:r>
-              <a:rPr sz="2700" b="1" i="0">
+              <a:rPr sz="2800" b="1" i="0">
                 <a:solidFill>
                   <a:srgbClr val="1E2761"/>
                 </a:solidFill>
                 <a:latin typeface="Montserrat"/>
               </a:rPr>
-              <a:t>CO-ambiente: 15 ppm</a:t>
-            </a:r>
-          </a:p>
-        </p:txBody>
-      </p:sp>
-      <p:sp>
-        <p:nvSpPr>
-          <p:cNvPr id="7" name="TextBox 6"/>
+              <a:t>CO en humos: 500 ppm</a:t>
+            </a:r>
+          </a:p>
+        </p:txBody>
+      </p:sp>
+      <p:sp>
+        <p:nvSpPr>
+          <p:cNvPr id="7" name="Rounded Rectangle 6"/>
+          <p:cNvSpPr/>
+          <p:nvPr/>
+        </p:nvSpPr>
+        <p:spPr>
+          <a:xfrm>
+            <a:off x="868680" y="1627632"/>
+            <a:ext cx="2011680" cy="73152"/>
+          </a:xfrm>
+          <a:prstGeom prst="roundRect">
+            <a:avLst/>
+          </a:prstGeom>
+          <a:solidFill>
+            <a:srgbClr val="E8801A"/>
+          </a:solidFill>
+          <a:ln>
+            <a:noFill/>
+          </a:ln>
+          <a:effectLst/>
+        </p:spPr>
+        <p:style>
+          <a:lnRef idx="1">
+            <a:schemeClr val="accent1"/>
+          </a:lnRef>
+          <a:fillRef idx="3">
+            <a:schemeClr val="accent1"/>
+          </a:fillRef>
+          <a:effectRef idx="2">
+            <a:schemeClr val="accent1"/>
+          </a:effectRef>
+          <a:fontRef idx="minor">
+            <a:schemeClr val="lt1"/>
+          </a:fontRef>
+        </p:style>
+        <p:txBody>
+          <a:bodyPr rtlCol="0" anchor="ctr"/>
+          <a:lstStyle/>
+          <a:p>
+            <a:pPr algn="ctr"/>
+          </a:p>
+        </p:txBody>
+      </p:sp>
+      <p:sp>
+        <p:nvSpPr>
+          <p:cNvPr id="8" name="TextBox 7"/>
           <p:cNvSpPr txBox="1"/>
           <p:nvPr/>
         </p:nvSpPr>
         <p:spPr>
           <a:xfrm>
-            <a:off x="822960" y="1920240"/>
+            <a:off x="822960" y="1965960"/>
             <a:ext cx="4983480" cy="4206240"/>
           </a:xfrm>
           <a:prstGeom prst="rect">
@@ -6185,17 +6428,17 @@
           <a:p>
             <a:pPr>
               <a:spcAft>
-                <a:spcPts val="1000"/>
+                <a:spcPts val="1100"/>
               </a:spcAft>
             </a:pPr>
             <a:r>
               <a:rPr sz="1600" b="1" i="0">
                 <a:solidFill>
-                  <a:srgbClr val="2E3A80"/>
-                </a:solidFill>
-                <a:latin typeface="Montserrat"/>
-              </a:rPr>
-              <a:t>•  </a:t>
+                  <a:srgbClr val="E8801A"/>
+                </a:solidFill>
+                <a:latin typeface="Montserrat"/>
+              </a:rPr>
+              <a:t>▸  </a:t>
             </a:r>
             <a:r>
               <a:rPr sz="1600" b="0" i="0">
@@ -6204,23 +6447,23 @@
                 </a:solidFill>
                 <a:latin typeface="Montserrat"/>
               </a:rPr>
-              <a:t>Es el CO en el aire del local</a:t>
+              <a:t>Se mide en los productos de combustión</a:t>
             </a:r>
           </a:p>
           <a:p>
             <a:pPr>
               <a:spcAft>
-                <a:spcPts val="1000"/>
+                <a:spcPts val="1100"/>
               </a:spcAft>
             </a:pPr>
             <a:r>
               <a:rPr sz="1600" b="1" i="0">
                 <a:solidFill>
-                  <a:srgbClr val="2E3A80"/>
-                </a:solidFill>
-                <a:latin typeface="Montserrat"/>
-              </a:rPr>
-              <a:t>•  </a:t>
+                  <a:srgbClr val="E8801A"/>
+                </a:solidFill>
+                <a:latin typeface="Montserrat"/>
+              </a:rPr>
+              <a:t>▸  </a:t>
             </a:r>
             <a:r>
               <a:rPr sz="1600" b="0" i="0">
@@ -6229,23 +6472,23 @@
                 </a:solidFill>
                 <a:latin typeface="Montserrat"/>
               </a:rPr>
-              <a:t>Todos los aparatos a máxima potencia</a:t>
+              <a:t>CO corregido no diluido</a:t>
             </a:r>
           </a:p>
           <a:p>
             <a:pPr>
               <a:spcAft>
-                <a:spcPts val="1000"/>
+                <a:spcPts val="1100"/>
               </a:spcAft>
             </a:pPr>
             <a:r>
               <a:rPr sz="1600" b="1" i="0">
                 <a:solidFill>
-                  <a:srgbClr val="2E3A80"/>
-                </a:solidFill>
-                <a:latin typeface="Montserrat"/>
-              </a:rPr>
-              <a:t>•  </a:t>
+                  <a:srgbClr val="E8801A"/>
+                </a:solidFill>
+                <a:latin typeface="Montserrat"/>
+              </a:rPr>
+              <a:t>▸  </a:t>
             </a:r>
             <a:r>
               <a:rPr sz="1600" b="0" i="0">
@@ -6254,23 +6497,23 @@
                 </a:solidFill>
                 <a:latin typeface="Montserrat"/>
               </a:rPr>
-              <a:t>A los 5 minutos se mide</a:t>
+              <a:t>Por encima de 500 ppm: no arranca</a:t>
             </a:r>
           </a:p>
           <a:p>
             <a:pPr>
               <a:spcAft>
-                <a:spcPts val="1000"/>
+                <a:spcPts val="1100"/>
               </a:spcAft>
             </a:pPr>
             <a:r>
               <a:rPr sz="1600" b="1" i="0">
                 <a:solidFill>
-                  <a:srgbClr val="2E3A80"/>
-                </a:solidFill>
-                <a:latin typeface="Montserrat"/>
-              </a:rPr>
-              <a:t>•  </a:t>
+                  <a:srgbClr val="E8801A"/>
+                </a:solidFill>
+                <a:latin typeface="Montserrat"/>
+              </a:rPr>
+              <a:t>▸  </a:t>
             </a:r>
             <a:r>
               <a:rPr sz="1600" b="0" i="0">
@@ -6279,14 +6522,14 @@
                 </a:solidFill>
                 <a:latin typeface="Montserrat"/>
               </a:rPr>
-              <a:t>Sonda a 1 m y a 1,80 m de altura</a:t>
-            </a:r>
-          </a:p>
-        </p:txBody>
-      </p:sp>
-      <p:sp>
-        <p:nvSpPr>
-          <p:cNvPr id="8" name="imgph" descr="IMGQ:indoor air quality CO analyzer probe"/>
+              <a:t>Corregir evita que el aire rebaje la lectura</a:t>
+            </a:r>
+          </a:p>
+        </p:txBody>
+      </p:sp>
+      <p:sp>
+        <p:nvSpPr>
+          <p:cNvPr id="9" name="imgph" descr="IMGQ:yellow gas flame poor combustion"/>
           <p:cNvSpPr/>
           <p:nvPr/>
         </p:nvSpPr>
@@ -6332,7 +6575,7 @@
       </p:sp>
       <p:sp>
         <p:nvSpPr>
-          <p:cNvPr id="9" name="TextBox 8"/>
+          <p:cNvPr id="10" name="TextBox 9"/>
           <p:cNvSpPr txBox="1"/>
           <p:nvPr/>
         </p:nvSpPr>
@@ -6372,7 +6615,7 @@
                 </a:solidFill>
                 <a:latin typeface="Montserrat"/>
               </a:rPr>
-              <a:t>indoor air quality CO analyzer probe</a:t>
+              <a:t>yellow gas flame poor combustion</a:t>
             </a:r>
           </a:p>
         </p:txBody>
@@ -6469,7 +6712,7 @@
                 </a:solidFill>
                 <a:latin typeface="Montserrat"/>
               </a:rPr>
-              <a:t>013 / 018</a:t>
+              <a:t>013 / 019</a:t>
             </a:r>
           </a:p>
         </p:txBody>
@@ -6517,7 +6760,7 @@
         <p:spPr>
           <a:xfrm>
             <a:off x="822960" y="457200"/>
-            <a:ext cx="8229600" cy="365760"/>
+            <a:ext cx="10058400" cy="365760"/>
           </a:xfrm>
           <a:prstGeom prst="rect">
             <a:avLst/>
@@ -6531,13 +6774,13 @@
           <a:lstStyle/>
           <a:p>
             <a:r>
-              <a:rPr sz="1200" b="1" i="0">
-                <a:solidFill>
-                  <a:srgbClr val="64748B"/>
-                </a:solidFill>
-                <a:latin typeface="Montserrat"/>
-              </a:rPr>
-              <a:t>APARTADO 4.5</a:t>
+              <a:rPr sz="1300" b="1" i="0">
+                <a:solidFill>
+                  <a:srgbClr val="E8801A"/>
+                </a:solidFill>
+                <a:latin typeface="Montserrat"/>
+              </a:rPr>
+              <a:t>APARTADO 4.4</a:t>
             </a:r>
           </a:p>
         </p:txBody>
@@ -6565,26 +6808,70 @@
           <a:lstStyle/>
           <a:p>
             <a:r>
-              <a:rPr sz="2700" b="1" i="0">
+              <a:rPr sz="2800" b="1" i="0">
                 <a:solidFill>
                   <a:srgbClr val="1E2761"/>
                 </a:solidFill>
                 <a:latin typeface="Montserrat"/>
               </a:rPr>
-              <a:t>Tiro y revoco</a:t>
-            </a:r>
-          </a:p>
-        </p:txBody>
-      </p:sp>
-      <p:sp>
-        <p:nvSpPr>
-          <p:cNvPr id="7" name="TextBox 6"/>
+              <a:t>CO-ambiente: 15 ppm</a:t>
+            </a:r>
+          </a:p>
+        </p:txBody>
+      </p:sp>
+      <p:sp>
+        <p:nvSpPr>
+          <p:cNvPr id="7" name="Rounded Rectangle 6"/>
+          <p:cNvSpPr/>
+          <p:nvPr/>
+        </p:nvSpPr>
+        <p:spPr>
+          <a:xfrm>
+            <a:off x="868680" y="1627632"/>
+            <a:ext cx="2011680" cy="73152"/>
+          </a:xfrm>
+          <a:prstGeom prst="roundRect">
+            <a:avLst/>
+          </a:prstGeom>
+          <a:solidFill>
+            <a:srgbClr val="E8801A"/>
+          </a:solidFill>
+          <a:ln>
+            <a:noFill/>
+          </a:ln>
+          <a:effectLst/>
+        </p:spPr>
+        <p:style>
+          <a:lnRef idx="1">
+            <a:schemeClr val="accent1"/>
+          </a:lnRef>
+          <a:fillRef idx="3">
+            <a:schemeClr val="accent1"/>
+          </a:fillRef>
+          <a:effectRef idx="2">
+            <a:schemeClr val="accent1"/>
+          </a:effectRef>
+          <a:fontRef idx="minor">
+            <a:schemeClr val="lt1"/>
+          </a:fontRef>
+        </p:style>
+        <p:txBody>
+          <a:bodyPr rtlCol="0" anchor="ctr"/>
+          <a:lstStyle/>
+          <a:p>
+            <a:pPr algn="ctr"/>
+          </a:p>
+        </p:txBody>
+      </p:sp>
+      <p:sp>
+        <p:nvSpPr>
+          <p:cNvPr id="8" name="TextBox 7"/>
           <p:cNvSpPr txBox="1"/>
           <p:nvPr/>
         </p:nvSpPr>
         <p:spPr>
           <a:xfrm>
-            <a:off x="822960" y="1920240"/>
+            <a:off x="822960" y="1965960"/>
             <a:ext cx="4983480" cy="4206240"/>
           </a:xfrm>
           <a:prstGeom prst="rect">
@@ -6600,17 +6887,17 @@
           <a:p>
             <a:pPr>
               <a:spcAft>
-                <a:spcPts val="1000"/>
+                <a:spcPts val="1100"/>
               </a:spcAft>
             </a:pPr>
             <a:r>
               <a:rPr sz="1600" b="1" i="0">
                 <a:solidFill>
-                  <a:srgbClr val="2E3A80"/>
-                </a:solidFill>
-                <a:latin typeface="Montserrat"/>
-              </a:rPr>
-              <a:t>•  </a:t>
+                  <a:srgbClr val="E8801A"/>
+                </a:solidFill>
+                <a:latin typeface="Montserrat"/>
+              </a:rPr>
+              <a:t>▸  </a:t>
             </a:r>
             <a:r>
               <a:rPr sz="1600" b="0" i="0">
@@ -6619,23 +6906,23 @@
                 </a:solidFill>
                 <a:latin typeface="Montserrat"/>
               </a:rPr>
-              <a:t>Solo en tipo B de tiro natural</a:t>
+              <a:t>Es el CO en el aire del local</a:t>
             </a:r>
           </a:p>
           <a:p>
             <a:pPr>
               <a:spcAft>
-                <a:spcPts val="1000"/>
+                <a:spcPts val="1100"/>
               </a:spcAft>
             </a:pPr>
             <a:r>
               <a:rPr sz="1600" b="1" i="0">
                 <a:solidFill>
-                  <a:srgbClr val="2E3A80"/>
-                </a:solidFill>
-                <a:latin typeface="Montserrat"/>
-              </a:rPr>
-              <a:t>•  </a:t>
+                  <a:srgbClr val="E8801A"/>
+                </a:solidFill>
+                <a:latin typeface="Montserrat"/>
+              </a:rPr>
+              <a:t>▸  </a:t>
             </a:r>
             <a:r>
               <a:rPr sz="1600" b="0" i="0">
@@ -6644,23 +6931,23 @@
                 </a:solidFill>
                 <a:latin typeface="Montserrat"/>
               </a:rPr>
-              <a:t>Peor escenario: extractor al máximo, todo cerrado</a:t>
+              <a:t>Todos los aparatos a máxima potencia</a:t>
             </a:r>
           </a:p>
           <a:p>
             <a:pPr>
               <a:spcAft>
-                <a:spcPts val="1000"/>
+                <a:spcPts val="1100"/>
               </a:spcAft>
             </a:pPr>
             <a:r>
               <a:rPr sz="1600" b="1" i="0">
                 <a:solidFill>
-                  <a:srgbClr val="2E3A80"/>
-                </a:solidFill>
-                <a:latin typeface="Montserrat"/>
-              </a:rPr>
-              <a:t>•  </a:t>
+                  <a:srgbClr val="E8801A"/>
+                </a:solidFill>
+                <a:latin typeface="Montserrat"/>
+              </a:rPr>
+              <a:t>▸  </a:t>
             </a:r>
             <a:r>
               <a:rPr sz="1600" b="0" i="0">
@@ -6669,23 +6956,23 @@
                 </a:solidFill>
                 <a:latin typeface="Montserrat"/>
               </a:rPr>
-              <a:t>Si hay revoco, no se arranca</a:t>
+              <a:t>A los 5 minutos se mide</a:t>
             </a:r>
           </a:p>
           <a:p>
             <a:pPr>
               <a:spcAft>
-                <a:spcPts val="1000"/>
+                <a:spcPts val="1100"/>
               </a:spcAft>
             </a:pPr>
             <a:r>
               <a:rPr sz="1600" b="1" i="0">
                 <a:solidFill>
-                  <a:srgbClr val="2E3A80"/>
-                </a:solidFill>
-                <a:latin typeface="Montserrat"/>
-              </a:rPr>
-              <a:t>•  </a:t>
+                  <a:srgbClr val="E8801A"/>
+                </a:solidFill>
+                <a:latin typeface="Montserrat"/>
+              </a:rPr>
+              <a:t>▸  </a:t>
             </a:r>
             <a:r>
               <a:rPr sz="1600" b="0" i="0">
@@ -6694,14 +6981,14 @@
                 </a:solidFill>
                 <a:latin typeface="Montserrat"/>
               </a:rPr>
-              <a:t>Por gases: CO₂ 2 500 ppm o CO 15 ppm</a:t>
-            </a:r>
-          </a:p>
-        </p:txBody>
-      </p:sp>
-      <p:sp>
-        <p:nvSpPr>
-          <p:cNvPr id="8" name="imgph" descr="IMGQ:flue draft chimney smoke test"/>
+              <a:t>Sonda a 1 m y a 1,80 m de altura</a:t>
+            </a:r>
+          </a:p>
+        </p:txBody>
+      </p:sp>
+      <p:sp>
+        <p:nvSpPr>
+          <p:cNvPr id="9" name="imgph" descr="IMGQ:indoor air quality CO analyzer probe"/>
           <p:cNvSpPr/>
           <p:nvPr/>
         </p:nvSpPr>
@@ -6747,7 +7034,7 @@
       </p:sp>
       <p:sp>
         <p:nvSpPr>
-          <p:cNvPr id="9" name="TextBox 8"/>
+          <p:cNvPr id="10" name="TextBox 9"/>
           <p:cNvSpPr txBox="1"/>
           <p:nvPr/>
         </p:nvSpPr>
@@ -6787,7 +7074,7 @@
                 </a:solidFill>
                 <a:latin typeface="Montserrat"/>
               </a:rPr>
-              <a:t>flue draft chimney smoke test</a:t>
+              <a:t>indoor air quality CO analyzer probe</a:t>
             </a:r>
           </a:p>
         </p:txBody>
@@ -6884,7 +7171,7 @@
                 </a:solidFill>
                 <a:latin typeface="Montserrat"/>
               </a:rPr>
-              <a:t>014 / 018</a:t>
+              <a:t>014 / 019</a:t>
             </a:r>
           </a:p>
         </p:txBody>
@@ -6932,7 +7219,7 @@
         <p:spPr>
           <a:xfrm>
             <a:off x="822960" y="457200"/>
-            <a:ext cx="8229600" cy="365760"/>
+            <a:ext cx="10058400" cy="365760"/>
           </a:xfrm>
           <a:prstGeom prst="rect">
             <a:avLst/>
@@ -6946,13 +7233,13 @@
           <a:lstStyle/>
           <a:p>
             <a:r>
-              <a:rPr sz="1200" b="1" i="0">
-                <a:solidFill>
-                  <a:srgbClr val="64748B"/>
-                </a:solidFill>
-                <a:latin typeface="Montserrat"/>
-              </a:rPr>
-              <a:t>APARTADO 4.6</a:t>
+              <a:rPr sz="1300" b="1" i="0">
+                <a:solidFill>
+                  <a:srgbClr val="E8801A"/>
+                </a:solidFill>
+                <a:latin typeface="Montserrat"/>
+              </a:rPr>
+              <a:t>APARTADO 4.5</a:t>
             </a:r>
           </a:p>
         </p:txBody>
@@ -6980,26 +7267,70 @@
           <a:lstStyle/>
           <a:p>
             <a:r>
-              <a:rPr sz="2700" b="1" i="0">
+              <a:rPr sz="2800" b="1" i="0">
                 <a:solidFill>
                   <a:srgbClr val="1E2761"/>
                 </a:solidFill>
                 <a:latin typeface="Montserrat"/>
               </a:rPr>
-              <a:t>Cambio de familia de gas</a:t>
-            </a:r>
-          </a:p>
-        </p:txBody>
-      </p:sp>
-      <p:sp>
-        <p:nvSpPr>
-          <p:cNvPr id="7" name="TextBox 6"/>
+              <a:t>Tiro y revoco</a:t>
+            </a:r>
+          </a:p>
+        </p:txBody>
+      </p:sp>
+      <p:sp>
+        <p:nvSpPr>
+          <p:cNvPr id="7" name="Rounded Rectangle 6"/>
+          <p:cNvSpPr/>
+          <p:nvPr/>
+        </p:nvSpPr>
+        <p:spPr>
+          <a:xfrm>
+            <a:off x="868680" y="1627632"/>
+            <a:ext cx="2011680" cy="73152"/>
+          </a:xfrm>
+          <a:prstGeom prst="roundRect">
+            <a:avLst/>
+          </a:prstGeom>
+          <a:solidFill>
+            <a:srgbClr val="E8801A"/>
+          </a:solidFill>
+          <a:ln>
+            <a:noFill/>
+          </a:ln>
+          <a:effectLst/>
+        </p:spPr>
+        <p:style>
+          <a:lnRef idx="1">
+            <a:schemeClr val="accent1"/>
+          </a:lnRef>
+          <a:fillRef idx="3">
+            <a:schemeClr val="accent1"/>
+          </a:fillRef>
+          <a:effectRef idx="2">
+            <a:schemeClr val="accent1"/>
+          </a:effectRef>
+          <a:fontRef idx="minor">
+            <a:schemeClr val="lt1"/>
+          </a:fontRef>
+        </p:style>
+        <p:txBody>
+          <a:bodyPr rtlCol="0" anchor="ctr"/>
+          <a:lstStyle/>
+          <a:p>
+            <a:pPr algn="ctr"/>
+          </a:p>
+        </p:txBody>
+      </p:sp>
+      <p:sp>
+        <p:nvSpPr>
+          <p:cNvPr id="8" name="TextBox 7"/>
           <p:cNvSpPr txBox="1"/>
           <p:nvPr/>
         </p:nvSpPr>
         <p:spPr>
           <a:xfrm>
-            <a:off x="822960" y="1920240"/>
+            <a:off x="822960" y="1965960"/>
             <a:ext cx="4983480" cy="4206240"/>
           </a:xfrm>
           <a:prstGeom prst="rect">
@@ -7015,17 +7346,17 @@
           <a:p>
             <a:pPr>
               <a:spcAft>
-                <a:spcPts val="1000"/>
+                <a:spcPts val="1100"/>
               </a:spcAft>
             </a:pPr>
             <a:r>
               <a:rPr sz="1600" b="1" i="0">
                 <a:solidFill>
-                  <a:srgbClr val="2E3A80"/>
-                </a:solidFill>
-                <a:latin typeface="Montserrat"/>
-              </a:rPr>
-              <a:t>•  </a:t>
+                  <a:srgbClr val="E8801A"/>
+                </a:solidFill>
+                <a:latin typeface="Montserrat"/>
+              </a:rPr>
+              <a:t>▸  </a:t>
             </a:r>
             <a:r>
               <a:rPr sz="1600" b="0" i="0">
@@ -7034,23 +7365,23 @@
                 </a:solidFill>
                 <a:latin typeface="Montserrat"/>
               </a:rPr>
-              <a:t>Ejemplo: gas natural a propano</a:t>
+              <a:t>Solo en tipo B de tiro natural</a:t>
             </a:r>
           </a:p>
           <a:p>
             <a:pPr>
               <a:spcAft>
-                <a:spcPts val="1000"/>
+                <a:spcPts val="1100"/>
               </a:spcAft>
             </a:pPr>
             <a:r>
               <a:rPr sz="1600" b="1" i="0">
                 <a:solidFill>
-                  <a:srgbClr val="2E3A80"/>
-                </a:solidFill>
-                <a:latin typeface="Montserrat"/>
-              </a:rPr>
-              <a:t>•  </a:t>
+                  <a:srgbClr val="E8801A"/>
+                </a:solidFill>
+                <a:latin typeface="Montserrat"/>
+              </a:rPr>
+              <a:t>▸  </a:t>
             </a:r>
             <a:r>
               <a:rPr sz="1600" b="0" i="0">
@@ -7059,23 +7390,23 @@
                 </a:solidFill>
                 <a:latin typeface="Montserrat"/>
               </a:rPr>
-              <a:t>Se cambian inyectores y reglajes</a:t>
+              <a:t>Peor escenario: extractor al máximo, todo cerrado</a:t>
             </a:r>
           </a:p>
           <a:p>
             <a:pPr>
               <a:spcAft>
-                <a:spcPts val="1000"/>
+                <a:spcPts val="1100"/>
               </a:spcAft>
             </a:pPr>
             <a:r>
               <a:rPr sz="1600" b="1" i="0">
                 <a:solidFill>
-                  <a:srgbClr val="2E3A80"/>
-                </a:solidFill>
-                <a:latin typeface="Montserrat"/>
-              </a:rPr>
-              <a:t>•  </a:t>
+                  <a:srgbClr val="E8801A"/>
+                </a:solidFill>
+                <a:latin typeface="Montserrat"/>
+              </a:rPr>
+              <a:t>▸  </a:t>
             </a:r>
             <a:r>
               <a:rPr sz="1600" b="0" i="0">
@@ -7084,23 +7415,23 @@
                 </a:solidFill>
                 <a:latin typeface="Montserrat"/>
               </a:rPr>
-              <a:t>Repetir comprobaciones 4.2 a 4.5</a:t>
+              <a:t>Si hay revoco, no se arranca</a:t>
             </a:r>
           </a:p>
           <a:p>
             <a:pPr>
               <a:spcAft>
-                <a:spcPts val="1000"/>
+                <a:spcPts val="1100"/>
               </a:spcAft>
             </a:pPr>
             <a:r>
               <a:rPr sz="1600" b="1" i="0">
                 <a:solidFill>
-                  <a:srgbClr val="2E3A80"/>
-                </a:solidFill>
-                <a:latin typeface="Montserrat"/>
-              </a:rPr>
-              <a:t>•  </a:t>
+                  <a:srgbClr val="E8801A"/>
+                </a:solidFill>
+                <a:latin typeface="Montserrat"/>
+              </a:rPr>
+              <a:t>▸  </a:t>
             </a:r>
             <a:r>
               <a:rPr sz="1600" b="0" i="0">
@@ -7109,14 +7440,14 @@
                 </a:solidFill>
                 <a:latin typeface="Montserrat"/>
               </a:rPr>
-              <a:t>Aplicar además la UNE 60670-11</a:t>
-            </a:r>
-          </a:p>
-        </p:txBody>
-      </p:sp>
-      <p:sp>
-        <p:nvSpPr>
-          <p:cNvPr id="8" name="imgph" descr="IMGQ:gas injector nozzle replacement burner"/>
+              <a:t>Por gases: CO₂ 2 500 ppm o CO 15 ppm</a:t>
+            </a:r>
+          </a:p>
+        </p:txBody>
+      </p:sp>
+      <p:sp>
+        <p:nvSpPr>
+          <p:cNvPr id="9" name="imgph" descr="IMGQ:flue draft chimney smoke test"/>
           <p:cNvSpPr/>
           <p:nvPr/>
         </p:nvSpPr>
@@ -7162,7 +7493,7 @@
       </p:sp>
       <p:sp>
         <p:nvSpPr>
-          <p:cNvPr id="9" name="TextBox 8"/>
+          <p:cNvPr id="10" name="TextBox 9"/>
           <p:cNvSpPr txBox="1"/>
           <p:nvPr/>
         </p:nvSpPr>
@@ -7202,7 +7533,7 @@
                 </a:solidFill>
                 <a:latin typeface="Montserrat"/>
               </a:rPr>
-              <a:t>gas injector nozzle replacement burner</a:t>
+              <a:t>flue draft chimney smoke test</a:t>
             </a:r>
           </a:p>
         </p:txBody>
@@ -7299,7 +7630,7 @@
                 </a:solidFill>
                 <a:latin typeface="Montserrat"/>
               </a:rPr>
-              <a:t>015 / 018</a:t>
+              <a:t>015 / 019</a:t>
             </a:r>
           </a:p>
         </p:txBody>
@@ -7347,7 +7678,7 @@
         <p:spPr>
           <a:xfrm>
             <a:off x="822960" y="457200"/>
-            <a:ext cx="8229600" cy="365760"/>
+            <a:ext cx="10058400" cy="365760"/>
           </a:xfrm>
           <a:prstGeom prst="rect">
             <a:avLst/>
@@ -7361,13 +7692,13 @@
           <a:lstStyle/>
           <a:p>
             <a:r>
-              <a:rPr sz="1200" b="1" i="0">
-                <a:solidFill>
-                  <a:srgbClr val="64748B"/>
-                </a:solidFill>
-                <a:latin typeface="Montserrat"/>
-              </a:rPr>
-              <a:t>APARTADO 4.7</a:t>
+              <a:rPr sz="1300" b="1" i="0">
+                <a:solidFill>
+                  <a:srgbClr val="E8801A"/>
+                </a:solidFill>
+                <a:latin typeface="Montserrat"/>
+              </a:rPr>
+              <a:t>APARTADO 4.6</a:t>
             </a:r>
           </a:p>
         </p:txBody>
@@ -7395,26 +7726,70 @@
           <a:lstStyle/>
           <a:p>
             <a:r>
-              <a:rPr sz="2700" b="1" i="0">
+              <a:rPr sz="2800" b="1" i="0">
                 <a:solidFill>
                   <a:srgbClr val="1E2761"/>
                 </a:solidFill>
                 <a:latin typeface="Montserrat"/>
               </a:rPr>
-              <a:t>Equipos de medida</a:t>
-            </a:r>
-          </a:p>
-        </p:txBody>
-      </p:sp>
-      <p:sp>
-        <p:nvSpPr>
-          <p:cNvPr id="7" name="TextBox 6"/>
+              <a:t>Cambio de familia de gas</a:t>
+            </a:r>
+          </a:p>
+        </p:txBody>
+      </p:sp>
+      <p:sp>
+        <p:nvSpPr>
+          <p:cNvPr id="7" name="Rounded Rectangle 6"/>
+          <p:cNvSpPr/>
+          <p:nvPr/>
+        </p:nvSpPr>
+        <p:spPr>
+          <a:xfrm>
+            <a:off x="868680" y="1627632"/>
+            <a:ext cx="2011680" cy="73152"/>
+          </a:xfrm>
+          <a:prstGeom prst="roundRect">
+            <a:avLst/>
+          </a:prstGeom>
+          <a:solidFill>
+            <a:srgbClr val="E8801A"/>
+          </a:solidFill>
+          <a:ln>
+            <a:noFill/>
+          </a:ln>
+          <a:effectLst/>
+        </p:spPr>
+        <p:style>
+          <a:lnRef idx="1">
+            <a:schemeClr val="accent1"/>
+          </a:lnRef>
+          <a:fillRef idx="3">
+            <a:schemeClr val="accent1"/>
+          </a:fillRef>
+          <a:effectRef idx="2">
+            <a:schemeClr val="accent1"/>
+          </a:effectRef>
+          <a:fontRef idx="minor">
+            <a:schemeClr val="lt1"/>
+          </a:fontRef>
+        </p:style>
+        <p:txBody>
+          <a:bodyPr rtlCol="0" anchor="ctr"/>
+          <a:lstStyle/>
+          <a:p>
+            <a:pPr algn="ctr"/>
+          </a:p>
+        </p:txBody>
+      </p:sp>
+      <p:sp>
+        <p:nvSpPr>
+          <p:cNvPr id="8" name="TextBox 7"/>
           <p:cNvSpPr txBox="1"/>
           <p:nvPr/>
         </p:nvSpPr>
         <p:spPr>
           <a:xfrm>
-            <a:off x="822960" y="1920240"/>
+            <a:off x="822960" y="1965960"/>
             <a:ext cx="4983480" cy="4206240"/>
           </a:xfrm>
           <a:prstGeom prst="rect">
@@ -7430,17 +7805,17 @@
           <a:p>
             <a:pPr>
               <a:spcAft>
-                <a:spcPts val="1000"/>
+                <a:spcPts val="1100"/>
               </a:spcAft>
             </a:pPr>
             <a:r>
               <a:rPr sz="1600" b="1" i="0">
                 <a:solidFill>
-                  <a:srgbClr val="2E3A80"/>
-                </a:solidFill>
-                <a:latin typeface="Montserrat"/>
-              </a:rPr>
-              <a:t>•  </a:t>
+                  <a:srgbClr val="E8801A"/>
+                </a:solidFill>
+                <a:latin typeface="Montserrat"/>
+              </a:rPr>
+              <a:t>▸  </a:t>
             </a:r>
             <a:r>
               <a:rPr sz="1600" b="0" i="0">
@@ -7449,23 +7824,23 @@
                 </a:solidFill>
                 <a:latin typeface="Montserrat"/>
               </a:rPr>
-              <a:t>Calibración: máximo cada 18 meses</a:t>
+              <a:t>Ejemplo: gas natural a propano</a:t>
             </a:r>
           </a:p>
           <a:p>
             <a:pPr>
               <a:spcAft>
-                <a:spcPts val="1000"/>
+                <a:spcPts val="1100"/>
               </a:spcAft>
             </a:pPr>
             <a:r>
               <a:rPr sz="1600" b="1" i="0">
                 <a:solidFill>
-                  <a:srgbClr val="2E3A80"/>
-                </a:solidFill>
-                <a:latin typeface="Montserrat"/>
-              </a:rPr>
-              <a:t>•  </a:t>
+                  <a:srgbClr val="E8801A"/>
+                </a:solidFill>
+                <a:latin typeface="Montserrat"/>
+              </a:rPr>
+              <a:t>▸  </a:t>
             </a:r>
             <a:r>
               <a:rPr sz="1600" b="0" i="0">
@@ -7474,23 +7849,23 @@
                 </a:solidFill>
                 <a:latin typeface="Montserrat"/>
               </a:rPr>
-              <a:t>Registro documental: 5 años</a:t>
+              <a:t>Se cambian inyectores y reglajes</a:t>
             </a:r>
           </a:p>
           <a:p>
             <a:pPr>
               <a:spcAft>
-                <a:spcPts val="1000"/>
+                <a:spcPts val="1100"/>
               </a:spcAft>
             </a:pPr>
             <a:r>
               <a:rPr sz="1600" b="1" i="0">
                 <a:solidFill>
-                  <a:srgbClr val="2E3A80"/>
-                </a:solidFill>
-                <a:latin typeface="Montserrat"/>
-              </a:rPr>
-              <a:t>•  </a:t>
+                  <a:srgbClr val="E8801A"/>
+                </a:solidFill>
+                <a:latin typeface="Montserrat"/>
+              </a:rPr>
+              <a:t>▸  </a:t>
             </a:r>
             <a:r>
               <a:rPr sz="1600" b="0" i="0">
@@ -7499,23 +7874,23 @@
                 </a:solidFill>
                 <a:latin typeface="Montserrat"/>
               </a:rPr>
-              <a:t>Incertidumbre: no más de ± 5 %</a:t>
+              <a:t>Repetir comprobaciones 4.2 a 4.5</a:t>
             </a:r>
           </a:p>
           <a:p>
             <a:pPr>
               <a:spcAft>
-                <a:spcPts val="1000"/>
+                <a:spcPts val="1100"/>
               </a:spcAft>
             </a:pPr>
             <a:r>
               <a:rPr sz="1600" b="1" i="0">
                 <a:solidFill>
-                  <a:srgbClr val="2E3A80"/>
-                </a:solidFill>
-                <a:latin typeface="Montserrat"/>
-              </a:rPr>
-              <a:t>•  </a:t>
+                  <a:srgbClr val="E8801A"/>
+                </a:solidFill>
+                <a:latin typeface="Montserrat"/>
+              </a:rPr>
+              <a:t>▸  </a:t>
             </a:r>
             <a:r>
               <a:rPr sz="1600" b="0" i="0">
@@ -7524,14 +7899,14 @@
                 </a:solidFill>
                 <a:latin typeface="Montserrat"/>
               </a:rPr>
-              <a:t>Botellas patrón identificadas en el certificado</a:t>
-            </a:r>
-          </a:p>
-        </p:txBody>
-      </p:sp>
-      <p:sp>
-        <p:nvSpPr>
-          <p:cNvPr id="8" name="imgph" descr="IMGQ:gas analyzer calibration laboratory"/>
+              <a:t>Aplicar además la UNE 60670-11</a:t>
+            </a:r>
+          </a:p>
+        </p:txBody>
+      </p:sp>
+      <p:sp>
+        <p:nvSpPr>
+          <p:cNvPr id="9" name="imgph" descr="IMGQ:gas injector nozzle replacement burner"/>
           <p:cNvSpPr/>
           <p:nvPr/>
         </p:nvSpPr>
@@ -7577,7 +7952,7 @@
       </p:sp>
       <p:sp>
         <p:nvSpPr>
-          <p:cNvPr id="9" name="TextBox 8"/>
+          <p:cNvPr id="10" name="TextBox 9"/>
           <p:cNvSpPr txBox="1"/>
           <p:nvPr/>
         </p:nvSpPr>
@@ -7617,7 +7992,7 @@
                 </a:solidFill>
                 <a:latin typeface="Montserrat"/>
               </a:rPr>
-              <a:t>gas analyzer calibration laboratory</a:t>
+              <a:t>gas injector nozzle replacement burner</a:t>
             </a:r>
           </a:p>
         </p:txBody>
@@ -7714,7 +8089,7 @@
                 </a:solidFill>
                 <a:latin typeface="Montserrat"/>
               </a:rPr>
-              <a:t>016 / 018</a:t>
+              <a:t>016 / 019</a:t>
             </a:r>
           </a:p>
         </p:txBody>
@@ -7762,7 +8137,7 @@
         <p:spPr>
           <a:xfrm>
             <a:off x="822960" y="457200"/>
-            <a:ext cx="8229600" cy="365760"/>
+            <a:ext cx="10058400" cy="365760"/>
           </a:xfrm>
           <a:prstGeom prst="rect">
             <a:avLst/>
@@ -7776,13 +8151,13 @@
           <a:lstStyle/>
           <a:p>
             <a:r>
-              <a:rPr sz="1200" b="1" i="0">
-                <a:solidFill>
-                  <a:srgbClr val="64748B"/>
-                </a:solidFill>
-                <a:latin typeface="Montserrat"/>
-              </a:rPr>
-              <a:t>ANEXO A</a:t>
+              <a:rPr sz="1300" b="1" i="0">
+                <a:solidFill>
+                  <a:srgbClr val="E8801A"/>
+                </a:solidFill>
+                <a:latin typeface="Montserrat"/>
+              </a:rPr>
+              <a:t>APARTADO 4.7</a:t>
             </a:r>
           </a:p>
         </p:txBody>
@@ -7810,26 +8185,70 @@
           <a:lstStyle/>
           <a:p>
             <a:r>
-              <a:rPr sz="2700" b="1" i="0">
+              <a:rPr sz="2800" b="1" i="0">
                 <a:solidFill>
                   <a:srgbClr val="1E2761"/>
                 </a:solidFill>
                 <a:latin typeface="Montserrat"/>
               </a:rPr>
-              <a:t>Análisis de la combustión</a:t>
-            </a:r>
-          </a:p>
-        </p:txBody>
-      </p:sp>
-      <p:sp>
-        <p:nvSpPr>
-          <p:cNvPr id="7" name="TextBox 6"/>
+              <a:t>Equipos de medida</a:t>
+            </a:r>
+          </a:p>
+        </p:txBody>
+      </p:sp>
+      <p:sp>
+        <p:nvSpPr>
+          <p:cNvPr id="7" name="Rounded Rectangle 6"/>
+          <p:cNvSpPr/>
+          <p:nvPr/>
+        </p:nvSpPr>
+        <p:spPr>
+          <a:xfrm>
+            <a:off x="868680" y="1627632"/>
+            <a:ext cx="2011680" cy="73152"/>
+          </a:xfrm>
+          <a:prstGeom prst="roundRect">
+            <a:avLst/>
+          </a:prstGeom>
+          <a:solidFill>
+            <a:srgbClr val="E8801A"/>
+          </a:solidFill>
+          <a:ln>
+            <a:noFill/>
+          </a:ln>
+          <a:effectLst/>
+        </p:spPr>
+        <p:style>
+          <a:lnRef idx="1">
+            <a:schemeClr val="accent1"/>
+          </a:lnRef>
+          <a:fillRef idx="3">
+            <a:schemeClr val="accent1"/>
+          </a:fillRef>
+          <a:effectRef idx="2">
+            <a:schemeClr val="accent1"/>
+          </a:effectRef>
+          <a:fontRef idx="minor">
+            <a:schemeClr val="lt1"/>
+          </a:fontRef>
+        </p:style>
+        <p:txBody>
+          <a:bodyPr rtlCol="0" anchor="ctr"/>
+          <a:lstStyle/>
+          <a:p>
+            <a:pPr algn="ctr"/>
+          </a:p>
+        </p:txBody>
+      </p:sp>
+      <p:sp>
+        <p:nvSpPr>
+          <p:cNvPr id="8" name="TextBox 7"/>
           <p:cNvSpPr txBox="1"/>
           <p:nvPr/>
         </p:nvSpPr>
         <p:spPr>
           <a:xfrm>
-            <a:off x="822960" y="1920240"/>
+            <a:off x="822960" y="1965960"/>
             <a:ext cx="4983480" cy="4206240"/>
           </a:xfrm>
           <a:prstGeom prst="rect">
@@ -7845,17 +8264,17 @@
           <a:p>
             <a:pPr>
               <a:spcAft>
-                <a:spcPts val="1000"/>
+                <a:spcPts val="1100"/>
               </a:spcAft>
             </a:pPr>
             <a:r>
               <a:rPr sz="1600" b="1" i="0">
                 <a:solidFill>
-                  <a:srgbClr val="2E3A80"/>
-                </a:solidFill>
-                <a:latin typeface="Montserrat"/>
-              </a:rPr>
-              <a:t>•  </a:t>
+                  <a:srgbClr val="E8801A"/>
+                </a:solidFill>
+                <a:latin typeface="Montserrat"/>
+              </a:rPr>
+              <a:t>▸  </a:t>
             </a:r>
             <a:r>
               <a:rPr sz="1600" b="0" i="0">
@@ -7864,23 +8283,23 @@
                 </a:solidFill>
                 <a:latin typeface="Montserrat"/>
               </a:rPr>
-              <a:t>Régimen estacionario, máxima potencia</a:t>
+              <a:t>Calibración: máximo cada 18 meses</a:t>
             </a:r>
           </a:p>
           <a:p>
             <a:pPr>
               <a:spcAft>
-                <a:spcPts val="1000"/>
+                <a:spcPts val="1100"/>
               </a:spcAft>
             </a:pPr>
             <a:r>
               <a:rPr sz="1600" b="1" i="0">
                 <a:solidFill>
-                  <a:srgbClr val="2E3A80"/>
-                </a:solidFill>
-                <a:latin typeface="Montserrat"/>
-              </a:rPr>
-              <a:t>•  </a:t>
+                  <a:srgbClr val="E8801A"/>
+                </a:solidFill>
+                <a:latin typeface="Montserrat"/>
+              </a:rPr>
+              <a:t>▸  </a:t>
             </a:r>
             <a:r>
               <a:rPr sz="1600" b="0" i="0">
@@ -7889,23 +8308,23 @@
                 </a:solidFill>
                 <a:latin typeface="Montserrat"/>
               </a:rPr>
-              <a:t>Tras 2 minutos se mide</a:t>
+              <a:t>Registro documental: 5 años</a:t>
             </a:r>
           </a:p>
           <a:p>
             <a:pPr>
               <a:spcAft>
-                <a:spcPts val="1000"/>
+                <a:spcPts val="1100"/>
               </a:spcAft>
             </a:pPr>
             <a:r>
               <a:rPr sz="1600" b="1" i="0">
                 <a:solidFill>
-                  <a:srgbClr val="2E3A80"/>
-                </a:solidFill>
-                <a:latin typeface="Montserrat"/>
-              </a:rPr>
-              <a:t>•  </a:t>
+                  <a:srgbClr val="E8801A"/>
+                </a:solidFill>
+                <a:latin typeface="Montserrat"/>
+              </a:rPr>
+              <a:t>▸  </a:t>
             </a:r>
             <a:r>
               <a:rPr sz="1600" b="0" i="0">
@@ -7914,23 +8333,23 @@
                 </a:solidFill>
                 <a:latin typeface="Montserrat"/>
               </a:rPr>
-              <a:t>Toma de muestras en aparatos ≤ 70 kW</a:t>
+              <a:t>Incertidumbre: no más de ± 5 %</a:t>
             </a:r>
           </a:p>
           <a:p>
             <a:pPr>
               <a:spcAft>
-                <a:spcPts val="1000"/>
+                <a:spcPts val="1100"/>
               </a:spcAft>
             </a:pPr>
             <a:r>
               <a:rPr sz="1600" b="1" i="0">
                 <a:solidFill>
-                  <a:srgbClr val="2E3A80"/>
-                </a:solidFill>
-                <a:latin typeface="Montserrat"/>
-              </a:rPr>
-              <a:t>•  </a:t>
+                  <a:srgbClr val="E8801A"/>
+                </a:solidFill>
+                <a:latin typeface="Montserrat"/>
+              </a:rPr>
+              <a:t>▸  </a:t>
             </a:r>
             <a:r>
               <a:rPr sz="1600" b="0" i="0">
@@ -7939,14 +8358,14 @@
                 </a:solidFill>
                 <a:latin typeface="Montserrat"/>
               </a:rPr>
-              <a:t>O₂ &gt; 10 % o CO₂ &lt; 6 %: repetir medida</a:t>
-            </a:r>
-          </a:p>
-        </p:txBody>
-      </p:sp>
-      <p:sp>
-        <p:nvSpPr>
-          <p:cNvPr id="8" name="imgph" descr="IMGQ:flue gas sampling probe boiler"/>
+              <a:t>Botellas patrón identificadas en el certificado</a:t>
+            </a:r>
+          </a:p>
+        </p:txBody>
+      </p:sp>
+      <p:sp>
+        <p:nvSpPr>
+          <p:cNvPr id="9" name="imgph" descr="IMGQ:gas analyzer calibration laboratory"/>
           <p:cNvSpPr/>
           <p:nvPr/>
         </p:nvSpPr>
@@ -7992,7 +8411,7 @@
       </p:sp>
       <p:sp>
         <p:nvSpPr>
-          <p:cNvPr id="9" name="TextBox 8"/>
+          <p:cNvPr id="10" name="TextBox 9"/>
           <p:cNvSpPr txBox="1"/>
           <p:nvPr/>
         </p:nvSpPr>
@@ -8032,7 +8451,7 @@
                 </a:solidFill>
                 <a:latin typeface="Montserrat"/>
               </a:rPr>
-              <a:t>flue gas sampling probe boiler</a:t>
+              <a:t>gas analyzer calibration laboratory</a:t>
             </a:r>
           </a:p>
         </p:txBody>
@@ -8129,7 +8548,7 @@
                 </a:solidFill>
                 <a:latin typeface="Montserrat"/>
               </a:rPr>
-              <a:t>017 / 018</a:t>
+              <a:t>017 / 019</a:t>
             </a:r>
           </a:p>
         </p:txBody>
@@ -8177,7 +8596,7 @@
         <p:spPr>
           <a:xfrm>
             <a:off x="822960" y="457200"/>
-            <a:ext cx="8229600" cy="365760"/>
+            <a:ext cx="10058400" cy="365760"/>
           </a:xfrm>
           <a:prstGeom prst="rect">
             <a:avLst/>
@@ -8191,13 +8610,13 @@
           <a:lstStyle/>
           <a:p>
             <a:r>
-              <a:rPr sz="1200" b="1" i="0">
-                <a:solidFill>
-                  <a:srgbClr val="64748B"/>
-                </a:solidFill>
-                <a:latin typeface="Montserrat"/>
-              </a:rPr>
-              <a:t>ANEXO B</a:t>
+              <a:rPr sz="1300" b="1" i="0">
+                <a:solidFill>
+                  <a:srgbClr val="E8801A"/>
+                </a:solidFill>
+                <a:latin typeface="Montserrat"/>
+              </a:rPr>
+              <a:t>ANEXO A</a:t>
             </a:r>
           </a:p>
         </p:txBody>
@@ -8225,26 +8644,70 @@
           <a:lstStyle/>
           <a:p>
             <a:r>
-              <a:rPr sz="2700" b="1" i="0">
+              <a:rPr sz="2800" b="1" i="0">
                 <a:solidFill>
                   <a:srgbClr val="1E2761"/>
                 </a:solidFill>
                 <a:latin typeface="Montserrat"/>
               </a:rPr>
-              <a:t>Medición del CO-ambiente</a:t>
-            </a:r>
-          </a:p>
-        </p:txBody>
-      </p:sp>
-      <p:sp>
-        <p:nvSpPr>
-          <p:cNvPr id="7" name="TextBox 6"/>
+              <a:t>Análisis de la combustión</a:t>
+            </a:r>
+          </a:p>
+        </p:txBody>
+      </p:sp>
+      <p:sp>
+        <p:nvSpPr>
+          <p:cNvPr id="7" name="Rounded Rectangle 6"/>
+          <p:cNvSpPr/>
+          <p:nvPr/>
+        </p:nvSpPr>
+        <p:spPr>
+          <a:xfrm>
+            <a:off x="868680" y="1627632"/>
+            <a:ext cx="2011680" cy="73152"/>
+          </a:xfrm>
+          <a:prstGeom prst="roundRect">
+            <a:avLst/>
+          </a:prstGeom>
+          <a:solidFill>
+            <a:srgbClr val="E8801A"/>
+          </a:solidFill>
+          <a:ln>
+            <a:noFill/>
+          </a:ln>
+          <a:effectLst/>
+        </p:spPr>
+        <p:style>
+          <a:lnRef idx="1">
+            <a:schemeClr val="accent1"/>
+          </a:lnRef>
+          <a:fillRef idx="3">
+            <a:schemeClr val="accent1"/>
+          </a:fillRef>
+          <a:effectRef idx="2">
+            <a:schemeClr val="accent1"/>
+          </a:effectRef>
+          <a:fontRef idx="minor">
+            <a:schemeClr val="lt1"/>
+          </a:fontRef>
+        </p:style>
+        <p:txBody>
+          <a:bodyPr rtlCol="0" anchor="ctr"/>
+          <a:lstStyle/>
+          <a:p>
+            <a:pPr algn="ctr"/>
+          </a:p>
+        </p:txBody>
+      </p:sp>
+      <p:sp>
+        <p:nvSpPr>
+          <p:cNvPr id="8" name="TextBox 7"/>
           <p:cNvSpPr txBox="1"/>
           <p:nvPr/>
         </p:nvSpPr>
         <p:spPr>
           <a:xfrm>
-            <a:off x="822960" y="1920240"/>
+            <a:off x="822960" y="1965960"/>
             <a:ext cx="4983480" cy="4206240"/>
           </a:xfrm>
           <a:prstGeom prst="rect">
@@ -8260,17 +8723,17 @@
           <a:p>
             <a:pPr>
               <a:spcAft>
-                <a:spcPts val="1000"/>
+                <a:spcPts val="1100"/>
               </a:spcAft>
             </a:pPr>
             <a:r>
               <a:rPr sz="1600" b="1" i="0">
                 <a:solidFill>
-                  <a:srgbClr val="2E3A80"/>
-                </a:solidFill>
-                <a:latin typeface="Montserrat"/>
-              </a:rPr>
-              <a:t>•  </a:t>
+                  <a:srgbClr val="E8801A"/>
+                </a:solidFill>
+                <a:latin typeface="Montserrat"/>
+              </a:rPr>
+              <a:t>▸  </a:t>
             </a:r>
             <a:r>
               <a:rPr sz="1600" b="0" i="0">
@@ -8279,23 +8742,23 @@
                 </a:solidFill>
                 <a:latin typeface="Montserrat"/>
               </a:rPr>
-              <a:t>Para radiantes tipo A de naves y talleres</a:t>
+              <a:t>Régimen estacionario, máxima potencia</a:t>
             </a:r>
           </a:p>
           <a:p>
             <a:pPr>
               <a:spcAft>
-                <a:spcPts val="1000"/>
+                <a:spcPts val="1100"/>
               </a:spcAft>
             </a:pPr>
             <a:r>
               <a:rPr sz="1600" b="1" i="0">
                 <a:solidFill>
-                  <a:srgbClr val="2E3A80"/>
-                </a:solidFill>
-                <a:latin typeface="Montserrat"/>
-              </a:rPr>
-              <a:t>•  </a:t>
+                  <a:srgbClr val="E8801A"/>
+                </a:solidFill>
+                <a:latin typeface="Montserrat"/>
+              </a:rPr>
+              <a:t>▸  </a:t>
             </a:r>
             <a:r>
               <a:rPr sz="1600" b="0" i="0">
@@ -8304,23 +8767,23 @@
                 </a:solidFill>
                 <a:latin typeface="Montserrat"/>
               </a:rPr>
-              <a:t>15 minutos de calentamiento</a:t>
+              <a:t>Tras 2 minutos se mide</a:t>
             </a:r>
           </a:p>
           <a:p>
             <a:pPr>
               <a:spcAft>
-                <a:spcPts val="1000"/>
+                <a:spcPts val="1100"/>
               </a:spcAft>
             </a:pPr>
             <a:r>
               <a:rPr sz="1600" b="1" i="0">
                 <a:solidFill>
-                  <a:srgbClr val="2E3A80"/>
-                </a:solidFill>
-                <a:latin typeface="Montserrat"/>
-              </a:rPr>
-              <a:t>•  </a:t>
+                  <a:srgbClr val="E8801A"/>
+                </a:solidFill>
+                <a:latin typeface="Montserrat"/>
+              </a:rPr>
+              <a:t>▸  </a:t>
             </a:r>
             <a:r>
               <a:rPr sz="1600" b="0" i="0">
@@ -8329,23 +8792,23 @@
                 </a:solidFill>
                 <a:latin typeface="Montserrat"/>
               </a:rPr>
-              <a:t>Sonda a 1,80 m; un punto cada 25 m²</a:t>
+              <a:t>Toma de muestras en aparatos ≤ 70 kW</a:t>
             </a:r>
           </a:p>
           <a:p>
             <a:pPr>
               <a:spcAft>
-                <a:spcPts val="1000"/>
+                <a:spcPts val="1100"/>
               </a:spcAft>
             </a:pPr>
             <a:r>
               <a:rPr sz="1600" b="1" i="0">
                 <a:solidFill>
-                  <a:srgbClr val="2E3A80"/>
-                </a:solidFill>
-                <a:latin typeface="Montserrat"/>
-              </a:rPr>
-              <a:t>•  </a:t>
+                  <a:srgbClr val="E8801A"/>
+                </a:solidFill>
+                <a:latin typeface="Montserrat"/>
+              </a:rPr>
+              <a:t>▸  </a:t>
             </a:r>
             <a:r>
               <a:rPr sz="1600" b="0" i="0">
@@ -8354,14 +8817,14 @@
                 </a:solidFill>
                 <a:latin typeface="Montserrat"/>
               </a:rPr>
-              <a:t>5 minutos por posición</a:t>
-            </a:r>
-          </a:p>
-        </p:txBody>
-      </p:sp>
-      <p:sp>
-        <p:nvSpPr>
-          <p:cNvPr id="8" name="imgph" descr="IMGQ:industrial radiant heater workshop ceiling"/>
+              <a:t>O₂ &gt; 10 % o CO₂ &lt; 6 %: repetir medida</a:t>
+            </a:r>
+          </a:p>
+        </p:txBody>
+      </p:sp>
+      <p:sp>
+        <p:nvSpPr>
+          <p:cNvPr id="9" name="imgph" descr="IMGQ:flue gas sampling probe boiler"/>
           <p:cNvSpPr/>
           <p:nvPr/>
         </p:nvSpPr>
@@ -8407,7 +8870,7 @@
       </p:sp>
       <p:sp>
         <p:nvSpPr>
-          <p:cNvPr id="9" name="TextBox 8"/>
+          <p:cNvPr id="10" name="TextBox 9"/>
           <p:cNvSpPr txBox="1"/>
           <p:nvPr/>
         </p:nvSpPr>
@@ -8447,7 +8910,7 @@
                 </a:solidFill>
                 <a:latin typeface="Montserrat"/>
               </a:rPr>
-              <a:t>industrial radiant heater workshop ceiling</a:t>
+              <a:t>flue gas sampling probe boiler</a:t>
             </a:r>
           </a:p>
         </p:txBody>
@@ -8485,6 +8948,465 @@
             <a:avLst/>
           </a:prstGeom>
           <a:solidFill>
+            <a:srgbClr val="FFFFFF"/>
+          </a:solidFill>
+          <a:ln>
+            <a:noFill/>
+          </a:ln>
+          <a:effectLst/>
+        </p:spPr>
+        <p:style>
+          <a:lnRef idx="1">
+            <a:schemeClr val="accent1"/>
+          </a:lnRef>
+          <a:fillRef idx="3">
+            <a:schemeClr val="accent1"/>
+          </a:fillRef>
+          <a:effectRef idx="2">
+            <a:schemeClr val="accent1"/>
+          </a:effectRef>
+          <a:fontRef idx="minor">
+            <a:schemeClr val="lt1"/>
+          </a:fontRef>
+        </p:style>
+        <p:txBody>
+          <a:bodyPr rtlCol="0" anchor="ctr"/>
+          <a:lstStyle/>
+          <a:p>
+            <a:pPr algn="ctr"/>
+          </a:p>
+        </p:txBody>
+      </p:sp>
+      <p:sp>
+        <p:nvSpPr>
+          <p:cNvPr id="3" name="TextBox 2"/>
+          <p:cNvSpPr txBox="1"/>
+          <p:nvPr/>
+        </p:nvSpPr>
+        <p:spPr>
+          <a:xfrm>
+            <a:off x="10607040" y="320040"/>
+            <a:ext cx="1371600" cy="365760"/>
+          </a:xfrm>
+          <a:prstGeom prst="rect">
+            <a:avLst/>
+          </a:prstGeom>
+          <a:noFill/>
+        </p:spPr>
+        <p:txBody>
+          <a:bodyPr wrap="square">
+            <a:spAutoFit/>
+          </a:bodyPr>
+          <a:lstStyle/>
+          <a:p>
+            <a:pPr algn="r"/>
+            <a:r>
+              <a:rPr sz="1000" b="1" i="0">
+                <a:solidFill>
+                  <a:srgbClr val="64748B"/>
+                </a:solidFill>
+                <a:latin typeface="Montserrat"/>
+              </a:rPr>
+              <a:t>018 / 019</a:t>
+            </a:r>
+          </a:p>
+        </p:txBody>
+      </p:sp>
+      <p:sp>
+        <p:nvSpPr>
+          <p:cNvPr id="4" name="TextBox 3"/>
+          <p:cNvSpPr txBox="1"/>
+          <p:nvPr/>
+        </p:nvSpPr>
+        <p:spPr>
+          <a:xfrm>
+            <a:off x="457200" y="6419088"/>
+            <a:ext cx="8229600" cy="365760"/>
+          </a:xfrm>
+          <a:prstGeom prst="rect">
+            <a:avLst/>
+          </a:prstGeom>
+          <a:noFill/>
+        </p:spPr>
+        <p:txBody>
+          <a:bodyPr wrap="square">
+            <a:spAutoFit/>
+          </a:bodyPr>
+          <a:lstStyle/>
+          <a:p>
+            <a:r>
+              <a:rPr sz="900" b="0" i="0">
+                <a:solidFill>
+                  <a:srgbClr val="64748B"/>
+                </a:solidFill>
+                <a:latin typeface="Montserrat"/>
+              </a:rPr>
+              <a:t>Curso Gas B · Tema 15 · UNE 60670-10 · Puesta en marcha de aparatos</a:t>
+            </a:r>
+          </a:p>
+        </p:txBody>
+      </p:sp>
+      <p:sp>
+        <p:nvSpPr>
+          <p:cNvPr id="5" name="TextBox 4"/>
+          <p:cNvSpPr txBox="1"/>
+          <p:nvPr/>
+        </p:nvSpPr>
+        <p:spPr>
+          <a:xfrm>
+            <a:off x="822960" y="457200"/>
+            <a:ext cx="10058400" cy="365760"/>
+          </a:xfrm>
+          <a:prstGeom prst="rect">
+            <a:avLst/>
+          </a:prstGeom>
+          <a:noFill/>
+        </p:spPr>
+        <p:txBody>
+          <a:bodyPr wrap="square">
+            <a:spAutoFit/>
+          </a:bodyPr>
+          <a:lstStyle/>
+          <a:p>
+            <a:r>
+              <a:rPr sz="1300" b="1" i="0">
+                <a:solidFill>
+                  <a:srgbClr val="E8801A"/>
+                </a:solidFill>
+                <a:latin typeface="Montserrat"/>
+              </a:rPr>
+              <a:t>ANEXO B</a:t>
+            </a:r>
+          </a:p>
+        </p:txBody>
+      </p:sp>
+      <p:sp>
+        <p:nvSpPr>
+          <p:cNvPr id="6" name="TextBox 5"/>
+          <p:cNvSpPr txBox="1"/>
+          <p:nvPr/>
+        </p:nvSpPr>
+        <p:spPr>
+          <a:xfrm>
+            <a:off x="822960" y="868680"/>
+            <a:ext cx="10515600" cy="914400"/>
+          </a:xfrm>
+          <a:prstGeom prst="rect">
+            <a:avLst/>
+          </a:prstGeom>
+          <a:noFill/>
+        </p:spPr>
+        <p:txBody>
+          <a:bodyPr wrap="square">
+            <a:spAutoFit/>
+          </a:bodyPr>
+          <a:lstStyle/>
+          <a:p>
+            <a:r>
+              <a:rPr sz="2800" b="1" i="0">
+                <a:solidFill>
+                  <a:srgbClr val="1E2761"/>
+                </a:solidFill>
+                <a:latin typeface="Montserrat"/>
+              </a:rPr>
+              <a:t>Medición del CO-ambiente</a:t>
+            </a:r>
+          </a:p>
+        </p:txBody>
+      </p:sp>
+      <p:sp>
+        <p:nvSpPr>
+          <p:cNvPr id="7" name="Rounded Rectangle 6"/>
+          <p:cNvSpPr/>
+          <p:nvPr/>
+        </p:nvSpPr>
+        <p:spPr>
+          <a:xfrm>
+            <a:off x="868680" y="1627632"/>
+            <a:ext cx="2011680" cy="73152"/>
+          </a:xfrm>
+          <a:prstGeom prst="roundRect">
+            <a:avLst/>
+          </a:prstGeom>
+          <a:solidFill>
+            <a:srgbClr val="E8801A"/>
+          </a:solidFill>
+          <a:ln>
+            <a:noFill/>
+          </a:ln>
+          <a:effectLst/>
+        </p:spPr>
+        <p:style>
+          <a:lnRef idx="1">
+            <a:schemeClr val="accent1"/>
+          </a:lnRef>
+          <a:fillRef idx="3">
+            <a:schemeClr val="accent1"/>
+          </a:fillRef>
+          <a:effectRef idx="2">
+            <a:schemeClr val="accent1"/>
+          </a:effectRef>
+          <a:fontRef idx="minor">
+            <a:schemeClr val="lt1"/>
+          </a:fontRef>
+        </p:style>
+        <p:txBody>
+          <a:bodyPr rtlCol="0" anchor="ctr"/>
+          <a:lstStyle/>
+          <a:p>
+            <a:pPr algn="ctr"/>
+          </a:p>
+        </p:txBody>
+      </p:sp>
+      <p:sp>
+        <p:nvSpPr>
+          <p:cNvPr id="8" name="TextBox 7"/>
+          <p:cNvSpPr txBox="1"/>
+          <p:nvPr/>
+        </p:nvSpPr>
+        <p:spPr>
+          <a:xfrm>
+            <a:off x="822960" y="1965960"/>
+            <a:ext cx="4983480" cy="4206240"/>
+          </a:xfrm>
+          <a:prstGeom prst="rect">
+            <a:avLst/>
+          </a:prstGeom>
+          <a:noFill/>
+        </p:spPr>
+        <p:txBody>
+          <a:bodyPr wrap="square">
+            <a:spAutoFit/>
+          </a:bodyPr>
+          <a:lstStyle/>
+          <a:p>
+            <a:pPr>
+              <a:spcAft>
+                <a:spcPts val="1100"/>
+              </a:spcAft>
+            </a:pPr>
+            <a:r>
+              <a:rPr sz="1600" b="1" i="0">
+                <a:solidFill>
+                  <a:srgbClr val="E8801A"/>
+                </a:solidFill>
+                <a:latin typeface="Montserrat"/>
+              </a:rPr>
+              <a:t>▸  </a:t>
+            </a:r>
+            <a:r>
+              <a:rPr sz="1600" b="0" i="0">
+                <a:solidFill>
+                  <a:srgbClr val="1B2330"/>
+                </a:solidFill>
+                <a:latin typeface="Montserrat"/>
+              </a:rPr>
+              <a:t>Para radiantes tipo A de naves y talleres</a:t>
+            </a:r>
+          </a:p>
+          <a:p>
+            <a:pPr>
+              <a:spcAft>
+                <a:spcPts val="1100"/>
+              </a:spcAft>
+            </a:pPr>
+            <a:r>
+              <a:rPr sz="1600" b="1" i="0">
+                <a:solidFill>
+                  <a:srgbClr val="E8801A"/>
+                </a:solidFill>
+                <a:latin typeface="Montserrat"/>
+              </a:rPr>
+              <a:t>▸  </a:t>
+            </a:r>
+            <a:r>
+              <a:rPr sz="1600" b="0" i="0">
+                <a:solidFill>
+                  <a:srgbClr val="1B2330"/>
+                </a:solidFill>
+                <a:latin typeface="Montserrat"/>
+              </a:rPr>
+              <a:t>15 minutos de calentamiento</a:t>
+            </a:r>
+          </a:p>
+          <a:p>
+            <a:pPr>
+              <a:spcAft>
+                <a:spcPts val="1100"/>
+              </a:spcAft>
+            </a:pPr>
+            <a:r>
+              <a:rPr sz="1600" b="1" i="0">
+                <a:solidFill>
+                  <a:srgbClr val="E8801A"/>
+                </a:solidFill>
+                <a:latin typeface="Montserrat"/>
+              </a:rPr>
+              <a:t>▸  </a:t>
+            </a:r>
+            <a:r>
+              <a:rPr sz="1600" b="0" i="0">
+                <a:solidFill>
+                  <a:srgbClr val="1B2330"/>
+                </a:solidFill>
+                <a:latin typeface="Montserrat"/>
+              </a:rPr>
+              <a:t>Sonda a 1,80 m; un punto cada 25 m²</a:t>
+            </a:r>
+          </a:p>
+          <a:p>
+            <a:pPr>
+              <a:spcAft>
+                <a:spcPts val="1100"/>
+              </a:spcAft>
+            </a:pPr>
+            <a:r>
+              <a:rPr sz="1600" b="1" i="0">
+                <a:solidFill>
+                  <a:srgbClr val="E8801A"/>
+                </a:solidFill>
+                <a:latin typeface="Montserrat"/>
+              </a:rPr>
+              <a:t>▸  </a:t>
+            </a:r>
+            <a:r>
+              <a:rPr sz="1600" b="0" i="0">
+                <a:solidFill>
+                  <a:srgbClr val="1B2330"/>
+                </a:solidFill>
+                <a:latin typeface="Montserrat"/>
+              </a:rPr>
+              <a:t>5 minutos por posición</a:t>
+            </a:r>
+          </a:p>
+        </p:txBody>
+      </p:sp>
+      <p:sp>
+        <p:nvSpPr>
+          <p:cNvPr id="9" name="imgph" descr="IMGQ:industrial radiant heater workshop ceiling"/>
+          <p:cNvSpPr/>
+          <p:nvPr/>
+        </p:nvSpPr>
+        <p:spPr>
+          <a:xfrm>
+            <a:off x="5806440" y="1051560"/>
+            <a:ext cx="5298947" cy="4629150"/>
+          </a:xfrm>
+          <a:prstGeom prst="roundRect">
+            <a:avLst/>
+          </a:prstGeom>
+          <a:solidFill>
+            <a:srgbClr val="F3F6FB"/>
+          </a:solidFill>
+          <a:ln w="12700">
+            <a:solidFill>
+              <a:srgbClr val="C7D2E6"/>
+            </a:solidFill>
+          </a:ln>
+          <a:effectLst/>
+        </p:spPr>
+        <p:style>
+          <a:lnRef idx="1">
+            <a:schemeClr val="accent1"/>
+          </a:lnRef>
+          <a:fillRef idx="3">
+            <a:schemeClr val="accent1"/>
+          </a:fillRef>
+          <a:effectRef idx="2">
+            <a:schemeClr val="accent1"/>
+          </a:effectRef>
+          <a:fontRef idx="minor">
+            <a:schemeClr val="lt1"/>
+          </a:fontRef>
+        </p:style>
+        <p:txBody>
+          <a:bodyPr rtlCol="0" anchor="ctr"/>
+          <a:lstStyle/>
+          <a:p>
+            <a:pPr algn="ctr"/>
+          </a:p>
+        </p:txBody>
+      </p:sp>
+      <p:sp>
+        <p:nvSpPr>
+          <p:cNvPr id="10" name="TextBox 9"/>
+          <p:cNvSpPr txBox="1"/>
+          <p:nvPr/>
+        </p:nvSpPr>
+        <p:spPr>
+          <a:xfrm>
+            <a:off x="6080760" y="2726055"/>
+            <a:ext cx="4750307" cy="1280160"/>
+          </a:xfrm>
+          <a:prstGeom prst="rect">
+            <a:avLst/>
+          </a:prstGeom>
+          <a:noFill/>
+        </p:spPr>
+        <p:txBody>
+          <a:bodyPr wrap="square">
+            <a:spAutoFit/>
+          </a:bodyPr>
+          <a:lstStyle/>
+          <a:p>
+            <a:pPr algn="ctr"/>
+            <a:r>
+              <a:rPr sz="1400" b="1" i="0">
+                <a:solidFill>
+                  <a:srgbClr val="64748B"/>
+                </a:solidFill>
+                <a:latin typeface="Montserrat"/>
+              </a:rPr>
+              <a:t>IMAGEN REALISTA</a:t>
+            </a:r>
+          </a:p>
+          <a:p>
+            <a:pPr algn="ctr"/>
+            <a:r>
+              <a:rPr sz="1100" b="0" i="1">
+                <a:solidFill>
+                  <a:srgbClr val="64748B"/>
+                </a:solidFill>
+                <a:latin typeface="Montserrat"/>
+              </a:rPr>
+              <a:t>industrial radiant heater workshop ceiling</a:t>
+            </a:r>
+          </a:p>
+        </p:txBody>
+      </p:sp>
+    </p:spTree>
+  </p:cSld>
+  <p:clrMapOvr>
+    <a:masterClrMapping/>
+  </p:clrMapOvr>
+</p:sld>
+</file>
+
+<file path=ppt/slides/slide19.xml><?xml version="1.0" encoding="utf-8"?>
+<p:sld xmlns:a="http://schemas.openxmlformats.org/drawingml/2006/main" xmlns:p="http://schemas.openxmlformats.org/presentationml/2006/main" xmlns:r="http://schemas.openxmlformats.org/officeDocument/2006/relationships">
+  <p:cSld>
+    <p:spTree>
+      <p:nvGrpSpPr>
+        <p:cNvPr id="1" name=""/>
+        <p:cNvGrpSpPr/>
+        <p:nvPr/>
+      </p:nvGrpSpPr>
+      <p:grpSpPr/>
+      <p:sp>
+        <p:nvSpPr>
+          <p:cNvPr id="2" name="Rectangle 1"/>
+          <p:cNvSpPr/>
+          <p:nvPr/>
+        </p:nvSpPr>
+        <p:spPr>
+          <a:xfrm>
+            <a:off x="0" y="0"/>
+            <a:ext cx="12191695" cy="6858000"/>
+          </a:xfrm>
+          <a:prstGeom prst="rect">
+            <a:avLst/>
+          </a:prstGeom>
+          <a:solidFill>
             <a:srgbClr val="1E2761"/>
           </a:solidFill>
           <a:ln>
@@ -8539,7 +9461,7 @@
             <a:r>
               <a:rPr sz="1400" b="1" i="0">
                 <a:solidFill>
-                  <a:srgbClr val="CADCFC"/>
+                  <a:srgbClr val="F4A24C"/>
                 </a:solidFill>
                 <a:latin typeface="Montserrat"/>
               </a:rPr>
@@ -8550,13 +9472,57 @@
       </p:sp>
       <p:sp>
         <p:nvSpPr>
-          <p:cNvPr id="4" name="TextBox 3"/>
+          <p:cNvPr id="4" name="Rounded Rectangle 3"/>
+          <p:cNvSpPr/>
+          <p:nvPr/>
+        </p:nvSpPr>
+        <p:spPr>
+          <a:xfrm>
+            <a:off x="868680" y="1051560"/>
+            <a:ext cx="1463040" cy="82296"/>
+          </a:xfrm>
+          <a:prstGeom prst="roundRect">
+            <a:avLst/>
+          </a:prstGeom>
+          <a:solidFill>
+            <a:srgbClr val="E8801A"/>
+          </a:solidFill>
+          <a:ln>
+            <a:noFill/>
+          </a:ln>
+          <a:effectLst/>
+        </p:spPr>
+        <p:style>
+          <a:lnRef idx="1">
+            <a:schemeClr val="accent1"/>
+          </a:lnRef>
+          <a:fillRef idx="3">
+            <a:schemeClr val="accent1"/>
+          </a:fillRef>
+          <a:effectRef idx="2">
+            <a:schemeClr val="accent1"/>
+          </a:effectRef>
+          <a:fontRef idx="minor">
+            <a:schemeClr val="lt1"/>
+          </a:fontRef>
+        </p:style>
+        <p:txBody>
+          <a:bodyPr rtlCol="0" anchor="ctr"/>
+          <a:lstStyle/>
+          <a:p>
+            <a:pPr algn="ctr"/>
+          </a:p>
+        </p:txBody>
+      </p:sp>
+      <p:sp>
+        <p:nvSpPr>
+          <p:cNvPr id="5" name="TextBox 4"/>
           <p:cNvSpPr txBox="1"/>
           <p:nvPr/>
         </p:nvSpPr>
         <p:spPr>
           <a:xfrm>
-            <a:off x="822960" y="1143000"/>
+            <a:off x="822960" y="1234440"/>
             <a:ext cx="10515600" cy="1097280"/>
           </a:xfrm>
           <a:prstGeom prst="rect">
@@ -8584,14 +9550,14 @@
       </p:sp>
       <p:sp>
         <p:nvSpPr>
-          <p:cNvPr id="5" name="TextBox 4"/>
+          <p:cNvPr id="6" name="TextBox 5"/>
           <p:cNvSpPr txBox="1"/>
           <p:nvPr/>
         </p:nvSpPr>
         <p:spPr>
           <a:xfrm>
-            <a:off x="822960" y="2514600"/>
-            <a:ext cx="10515600" cy="2834640"/>
+            <a:off x="822960" y="2606040"/>
+            <a:ext cx="10515600" cy="2743200"/>
           </a:xfrm>
           <a:prstGeom prst="rect">
             <a:avLst/>
@@ -8612,7 +9578,7 @@
             <a:r>
               <a:rPr sz="2000" b="1" i="0">
                 <a:solidFill>
-                  <a:srgbClr val="CADCFC"/>
+                  <a:srgbClr val="F4A24C"/>
                 </a:solidFill>
                 <a:latin typeface="Montserrat"/>
               </a:rPr>
@@ -8637,7 +9603,7 @@
             <a:r>
               <a:rPr sz="2000" b="1" i="0">
                 <a:solidFill>
-                  <a:srgbClr val="CADCFC"/>
+                  <a:srgbClr val="F4A24C"/>
                 </a:solidFill>
                 <a:latin typeface="Montserrat"/>
               </a:rPr>
@@ -8662,7 +9628,7 @@
             <a:r>
               <a:rPr sz="2000" b="1" i="0">
                 <a:solidFill>
-                  <a:srgbClr val="CADCFC"/>
+                  <a:srgbClr val="F4A24C"/>
                 </a:solidFill>
                 <a:latin typeface="Montserrat"/>
               </a:rPr>
@@ -8687,7 +9653,7 @@
             <a:r>
               <a:rPr sz="2000" b="1" i="0">
                 <a:solidFill>
-                  <a:srgbClr val="CADCFC"/>
+                  <a:srgbClr val="F4A24C"/>
                 </a:solidFill>
                 <a:latin typeface="Montserrat"/>
               </a:rPr>
@@ -8707,20 +9673,20 @@
       </p:sp>
       <p:sp>
         <p:nvSpPr>
-          <p:cNvPr id="6" name="Rounded Rectangle 5"/>
+          <p:cNvPr id="7" name="Rounded Rectangle 6"/>
           <p:cNvSpPr/>
           <p:nvPr/>
         </p:nvSpPr>
         <p:spPr>
           <a:xfrm>
             <a:off x="822960" y="5532120"/>
-            <a:ext cx="10515600" cy="777240"/>
+            <a:ext cx="10515600" cy="822960"/>
           </a:xfrm>
           <a:prstGeom prst="roundRect">
             <a:avLst/>
           </a:prstGeom>
           <a:solidFill>
-            <a:srgbClr val="2E3A80"/>
+            <a:srgbClr val="E8801A"/>
           </a:solidFill>
           <a:ln>
             <a:noFill/>
@@ -8751,13 +9717,13 @@
       </p:sp>
       <p:sp>
         <p:nvSpPr>
-          <p:cNvPr id="7" name="TextBox 6"/>
+          <p:cNvPr id="8" name="TextBox 7"/>
           <p:cNvSpPr txBox="1"/>
           <p:nvPr/>
         </p:nvSpPr>
         <p:spPr>
           <a:xfrm>
-            <a:off x="1051560" y="5605272"/>
+            <a:off x="1051560" y="5623560"/>
             <a:ext cx="10058400" cy="640080"/>
           </a:xfrm>
           <a:prstGeom prst="rect">
@@ -8774,7 +9740,7 @@
             <a:r>
               <a:rPr sz="1500" b="1" i="1">
                 <a:solidFill>
-                  <a:srgbClr val="CADCFC"/>
+                  <a:srgbClr val="1E2761"/>
                 </a:solidFill>
                 <a:latin typeface="Montserrat"/>
               </a:rPr>
@@ -8875,7 +9841,7 @@
                 </a:solidFill>
                 <a:latin typeface="Montserrat"/>
               </a:rPr>
-              <a:t>002 / 018</a:t>
+              <a:t>002 / 019</a:t>
             </a:r>
           </a:p>
         </p:txBody>
@@ -8939,7 +9905,7 @@
             <a:r>
               <a:rPr sz="2700" b="1" i="0">
                 <a:solidFill>
-                  <a:srgbClr val="1E2761"/>
+                  <a:srgbClr val="E8801A"/>
                 </a:solidFill>
                 <a:latin typeface="Montserrat"/>
               </a:rPr>
@@ -8951,6 +9917,50 @@
       <p:sp>
         <p:nvSpPr>
           <p:cNvPr id="6" name="Rounded Rectangle 5"/>
+          <p:cNvSpPr/>
+          <p:nvPr/>
+        </p:nvSpPr>
+        <p:spPr>
+          <a:xfrm>
+            <a:off x="868680" y="1234440"/>
+            <a:ext cx="1463040" cy="73152"/>
+          </a:xfrm>
+          <a:prstGeom prst="roundRect">
+            <a:avLst/>
+          </a:prstGeom>
+          <a:solidFill>
+            <a:srgbClr val="1E2761"/>
+          </a:solidFill>
+          <a:ln>
+            <a:noFill/>
+          </a:ln>
+          <a:effectLst/>
+        </p:spPr>
+        <p:style>
+          <a:lnRef idx="1">
+            <a:schemeClr val="accent1"/>
+          </a:lnRef>
+          <a:fillRef idx="3">
+            <a:schemeClr val="accent1"/>
+          </a:fillRef>
+          <a:effectRef idx="2">
+            <a:schemeClr val="accent1"/>
+          </a:effectRef>
+          <a:fontRef idx="minor">
+            <a:schemeClr val="lt1"/>
+          </a:fontRef>
+        </p:style>
+        <p:txBody>
+          <a:bodyPr rtlCol="0" anchor="ctr"/>
+          <a:lstStyle/>
+          <a:p>
+            <a:pPr algn="ctr"/>
+          </a:p>
+        </p:txBody>
+      </p:sp>
+      <p:sp>
+        <p:nvSpPr>
+          <p:cNvPr id="7" name="Rounded Rectangle 6"/>
           <p:cNvSpPr/>
           <p:nvPr/>
         </p:nvSpPr>
@@ -8996,7 +10006,7 @@
       </p:sp>
       <p:sp>
         <p:nvSpPr>
-          <p:cNvPr id="7" name="TextBox 6"/>
+          <p:cNvPr id="8" name="TextBox 7"/>
           <p:cNvSpPr txBox="1"/>
           <p:nvPr/>
         </p:nvSpPr>
@@ -9031,7 +10041,7 @@
       </p:sp>
       <p:sp>
         <p:nvSpPr>
-          <p:cNvPr id="8" name="TextBox 7"/>
+          <p:cNvPr id="9" name="TextBox 8"/>
           <p:cNvSpPr txBox="1"/>
           <p:nvPr/>
         </p:nvSpPr>
@@ -9066,7 +10076,7 @@
       </p:sp>
       <p:sp>
         <p:nvSpPr>
-          <p:cNvPr id="9" name="Rounded Rectangle 8"/>
+          <p:cNvPr id="10" name="Rounded Rectangle 9"/>
           <p:cNvSpPr/>
           <p:nvPr/>
         </p:nvSpPr>
@@ -9112,7 +10122,7 @@
       </p:sp>
       <p:sp>
         <p:nvSpPr>
-          <p:cNvPr id="10" name="TextBox 9"/>
+          <p:cNvPr id="11" name="TextBox 10"/>
           <p:cNvSpPr txBox="1"/>
           <p:nvPr/>
         </p:nvSpPr>
@@ -9147,7 +10157,7 @@
       </p:sp>
       <p:sp>
         <p:nvSpPr>
-          <p:cNvPr id="11" name="TextBox 10"/>
+          <p:cNvPr id="12" name="TextBox 11"/>
           <p:cNvSpPr txBox="1"/>
           <p:nvPr/>
         </p:nvSpPr>
@@ -9182,7 +10192,7 @@
       </p:sp>
       <p:sp>
         <p:nvSpPr>
-          <p:cNvPr id="12" name="Rounded Rectangle 11"/>
+          <p:cNvPr id="13" name="Rounded Rectangle 12"/>
           <p:cNvSpPr/>
           <p:nvPr/>
         </p:nvSpPr>
@@ -9228,7 +10238,7 @@
       </p:sp>
       <p:sp>
         <p:nvSpPr>
-          <p:cNvPr id="13" name="TextBox 12"/>
+          <p:cNvPr id="14" name="TextBox 13"/>
           <p:cNvSpPr txBox="1"/>
           <p:nvPr/>
         </p:nvSpPr>
@@ -9263,7 +10273,7 @@
       </p:sp>
       <p:sp>
         <p:nvSpPr>
-          <p:cNvPr id="14" name="TextBox 13"/>
+          <p:cNvPr id="15" name="TextBox 14"/>
           <p:cNvSpPr txBox="1"/>
           <p:nvPr/>
         </p:nvSpPr>
@@ -9388,7 +10398,7 @@
                 </a:solidFill>
                 <a:latin typeface="Montserrat"/>
               </a:rPr>
-              <a:t>003 / 018</a:t>
+              <a:t>003 / 019</a:t>
             </a:r>
           </a:p>
         </p:txBody>
@@ -9435,7 +10445,7 @@
         </p:nvSpPr>
         <p:spPr>
           <a:xfrm>
-            <a:off x="822960" y="457200"/>
+            <a:off x="822960" y="502920"/>
             <a:ext cx="8229600" cy="365760"/>
           </a:xfrm>
           <a:prstGeom prst="rect">
@@ -9450,13 +10460,13 @@
           <a:lstStyle/>
           <a:p>
             <a:r>
-              <a:rPr sz="1200" b="1" i="0">
-                <a:solidFill>
-                  <a:srgbClr val="64748B"/>
-                </a:solidFill>
-                <a:latin typeface="Montserrat"/>
-              </a:rPr>
-              <a:t>MARCO · UNE 60670</a:t>
+              <a:rPr sz="1300" b="1" i="0">
+                <a:solidFill>
+                  <a:srgbClr val="E8801A"/>
+                </a:solidFill>
+                <a:latin typeface="Montserrat"/>
+              </a:rPr>
+              <a:t>PARTES DE ESTE VÍDEO</a:t>
             </a:r>
           </a:p>
         </p:txBody>
@@ -9469,7 +10479,7 @@
         </p:nvSpPr>
         <p:spPr>
           <a:xfrm>
-            <a:off x="822960" y="868680"/>
+            <a:off x="822960" y="914400"/>
             <a:ext cx="10515600" cy="914400"/>
           </a:xfrm>
           <a:prstGeom prst="rect">
@@ -9490,155 +10500,30 @@
                 </a:solidFill>
                 <a:latin typeface="Montserrat"/>
               </a:rPr>
-              <a:t>Qué trae la Parte 10</a:t>
-            </a:r>
-          </a:p>
-        </p:txBody>
-      </p:sp>
-      <p:sp>
-        <p:nvSpPr>
-          <p:cNvPr id="7" name="TextBox 6"/>
-          <p:cNvSpPr txBox="1"/>
-          <p:nvPr/>
-        </p:nvSpPr>
-        <p:spPr>
-          <a:xfrm>
-            <a:off x="822960" y="1920240"/>
-            <a:ext cx="4983480" cy="4206240"/>
-          </a:xfrm>
-          <a:prstGeom prst="rect">
-            <a:avLst/>
-          </a:prstGeom>
-          <a:noFill/>
-        </p:spPr>
-        <p:txBody>
-          <a:bodyPr wrap="square">
-            <a:spAutoFit/>
-          </a:bodyPr>
-          <a:lstStyle/>
-          <a:p>
-            <a:pPr>
-              <a:spcAft>
-                <a:spcPts val="1000"/>
-              </a:spcAft>
-            </a:pPr>
-            <a:r>
-              <a:rPr sz="1600" b="1" i="0">
-                <a:solidFill>
-                  <a:srgbClr val="2E3A80"/>
-                </a:solidFill>
-                <a:latin typeface="Montserrat"/>
-              </a:rPr>
-              <a:t>•  </a:t>
-            </a:r>
-            <a:r>
-              <a:rPr sz="1600" b="0" i="0">
-                <a:solidFill>
-                  <a:srgbClr val="1B2330"/>
-                </a:solidFill>
-                <a:latin typeface="Montserrat"/>
-              </a:rPr>
-              <a:t>Cierra la secuencia de arranque</a:t>
-            </a:r>
-          </a:p>
-          <a:p>
-            <a:pPr>
-              <a:spcAft>
-                <a:spcPts val="1000"/>
-              </a:spcAft>
-            </a:pPr>
-            <a:r>
-              <a:rPr sz="1600" b="1" i="0">
-                <a:solidFill>
-                  <a:srgbClr val="2E3A80"/>
-                </a:solidFill>
-                <a:latin typeface="Montserrat"/>
-              </a:rPr>
-              <a:t>•  </a:t>
-            </a:r>
-            <a:r>
-              <a:rPr sz="1600" b="0" i="0">
-                <a:solidFill>
-                  <a:srgbClr val="1B2330"/>
-                </a:solidFill>
-                <a:latin typeface="Montserrat"/>
-              </a:rPr>
-              <a:t>Puesta en marcha y cambio de familia</a:t>
-            </a:r>
-          </a:p>
-          <a:p>
-            <a:pPr>
-              <a:spcAft>
-                <a:spcPts val="1000"/>
-              </a:spcAft>
-            </a:pPr>
-            <a:r>
-              <a:rPr sz="1600" b="1" i="0">
-                <a:solidFill>
-                  <a:srgbClr val="2E3A80"/>
-                </a:solidFill>
-                <a:latin typeface="Montserrat"/>
-              </a:rPr>
-              <a:t>•  </a:t>
-            </a:r>
-            <a:r>
-              <a:rPr sz="1600" b="0" i="0">
-                <a:solidFill>
-                  <a:srgbClr val="1B2330"/>
-                </a:solidFill>
-                <a:latin typeface="Montserrat"/>
-              </a:rPr>
-              <a:t>Novedad: medición del CO-ambiente</a:t>
-            </a:r>
-          </a:p>
-          <a:p>
-            <a:pPr>
-              <a:spcAft>
-                <a:spcPts val="1000"/>
-              </a:spcAft>
-            </a:pPr>
-            <a:r>
-              <a:rPr sz="1600" b="1" i="0">
-                <a:solidFill>
-                  <a:srgbClr val="2E3A80"/>
-                </a:solidFill>
-                <a:latin typeface="Montserrat"/>
-              </a:rPr>
-              <a:t>•  </a:t>
-            </a:r>
-            <a:r>
-              <a:rPr sz="1600" b="0" i="0">
-                <a:solidFill>
-                  <a:srgbClr val="1B2330"/>
-                </a:solidFill>
-                <a:latin typeface="Montserrat"/>
-              </a:rPr>
-              <a:t>Equipos de medida en el apartado 4.7</a:t>
-            </a:r>
-          </a:p>
-        </p:txBody>
-      </p:sp>
-      <p:sp>
-        <p:nvSpPr>
-          <p:cNvPr id="8" name="imgph" descr="IMGQ:modern gas boiler wall mounted"/>
+              <a:t>En este vídeo</a:t>
+            </a:r>
+          </a:p>
+        </p:txBody>
+      </p:sp>
+      <p:sp>
+        <p:nvSpPr>
+          <p:cNvPr id="7" name="Rounded Rectangle 6"/>
           <p:cNvSpPr/>
           <p:nvPr/>
         </p:nvSpPr>
         <p:spPr>
           <a:xfrm>
-            <a:off x="5806440" y="1051560"/>
-            <a:ext cx="5298947" cy="4629150"/>
+            <a:off x="868680" y="1673352"/>
+            <a:ext cx="2011680" cy="73152"/>
           </a:xfrm>
           <a:prstGeom prst="roundRect">
             <a:avLst/>
           </a:prstGeom>
           <a:solidFill>
-            <a:srgbClr val="F3F6FB"/>
+            <a:srgbClr val="E8801A"/>
           </a:solidFill>
-          <a:ln w="12700">
-            <a:solidFill>
-              <a:srgbClr val="C7D2E6"/>
-            </a:solidFill>
+          <a:ln>
+            <a:noFill/>
           </a:ln>
           <a:effectLst/>
         </p:spPr>
@@ -9666,14 +10551,14 @@
       </p:sp>
       <p:sp>
         <p:nvSpPr>
-          <p:cNvPr id="9" name="TextBox 8"/>
+          <p:cNvPr id="8" name="TextBox 7"/>
           <p:cNvSpPr txBox="1"/>
           <p:nvPr/>
         </p:nvSpPr>
         <p:spPr>
           <a:xfrm>
-            <a:off x="6080760" y="2726055"/>
-            <a:ext cx="4750307" cy="1280160"/>
+            <a:off x="822960" y="2103120"/>
+            <a:ext cx="10515600" cy="4023360"/>
           </a:xfrm>
           <a:prstGeom prst="rect">
             <a:avLst/>
@@ -9686,27 +10571,228 @@
           </a:bodyPr>
           <a:lstStyle/>
           <a:p>
-            <a:pPr algn="ctr"/>
-            <a:r>
-              <a:rPr sz="1400" b="1" i="0">
-                <a:solidFill>
-                  <a:srgbClr val="64748B"/>
-                </a:solidFill>
-                <a:latin typeface="Montserrat"/>
-              </a:rPr>
-              <a:t>IMAGEN REALISTA</a:t>
-            </a:r>
-          </a:p>
-          <a:p>
-            <a:pPr algn="ctr"/>
-            <a:r>
-              <a:rPr sz="1100" b="0" i="1">
-                <a:solidFill>
-                  <a:srgbClr val="64748B"/>
-                </a:solidFill>
-                <a:latin typeface="Montserrat"/>
-              </a:rPr>
-              <a:t>modern gas boiler wall mounted</a:t>
+            <a:pPr>
+              <a:spcAft>
+                <a:spcPts val="900"/>
+              </a:spcAft>
+            </a:pPr>
+            <a:r>
+              <a:rPr sz="1800" b="1" i="0">
+                <a:solidFill>
+                  <a:srgbClr val="E8801A"/>
+                </a:solidFill>
+                <a:latin typeface="Montserrat"/>
+              </a:rPr>
+              <a:t>01   </a:t>
+            </a:r>
+            <a:r>
+              <a:rPr sz="1700" b="0" i="0">
+                <a:solidFill>
+                  <a:srgbClr val="1B2330"/>
+                </a:solidFill>
+                <a:latin typeface="Montserrat"/>
+              </a:rPr>
+              <a:t>Marco</a:t>
+            </a:r>
+          </a:p>
+          <a:p>
+            <a:pPr>
+              <a:spcAft>
+                <a:spcPts val="900"/>
+              </a:spcAft>
+            </a:pPr>
+            <a:r>
+              <a:rPr sz="1800" b="1" i="0">
+                <a:solidFill>
+                  <a:srgbClr val="E8801A"/>
+                </a:solidFill>
+                <a:latin typeface="Montserrat"/>
+              </a:rPr>
+              <a:t>02   </a:t>
+            </a:r>
+            <a:r>
+              <a:rPr sz="1700" b="0" i="0">
+                <a:solidFill>
+                  <a:srgbClr val="1B2330"/>
+                </a:solidFill>
+                <a:latin typeface="Montserrat"/>
+              </a:rPr>
+              <a:t>Ubicar la Parte 10</a:t>
+            </a:r>
+          </a:p>
+          <a:p>
+            <a:pPr>
+              <a:spcAft>
+                <a:spcPts val="900"/>
+              </a:spcAft>
+            </a:pPr>
+            <a:r>
+              <a:rPr sz="1800" b="1" i="0">
+                <a:solidFill>
+                  <a:srgbClr val="E8801A"/>
+                </a:solidFill>
+                <a:latin typeface="Montserrat"/>
+              </a:rPr>
+              <a:t>03   </a:t>
+            </a:r>
+            <a:r>
+              <a:rPr sz="1700" b="0" i="0">
+                <a:solidFill>
+                  <a:srgbClr val="1B2330"/>
+                </a:solidFill>
+                <a:latin typeface="Montserrat"/>
+              </a:rPr>
+              <a:t>Generalidades</a:t>
+            </a:r>
+          </a:p>
+          <a:p>
+            <a:pPr>
+              <a:spcAft>
+                <a:spcPts val="900"/>
+              </a:spcAft>
+            </a:pPr>
+            <a:r>
+              <a:rPr sz="1800" b="1" i="0">
+                <a:solidFill>
+                  <a:srgbClr val="E8801A"/>
+                </a:solidFill>
+                <a:latin typeface="Montserrat"/>
+              </a:rPr>
+              <a:t>04   </a:t>
+            </a:r>
+            <a:r>
+              <a:rPr sz="1700" b="0" i="0">
+                <a:solidFill>
+                  <a:srgbClr val="1B2330"/>
+                </a:solidFill>
+                <a:latin typeface="Montserrat"/>
+              </a:rPr>
+              <a:t>Tabla 1</a:t>
+            </a:r>
+          </a:p>
+          <a:p>
+            <a:pPr>
+              <a:spcAft>
+                <a:spcPts val="900"/>
+              </a:spcAft>
+            </a:pPr>
+            <a:r>
+              <a:rPr sz="1800" b="1" i="0">
+                <a:solidFill>
+                  <a:srgbClr val="E8801A"/>
+                </a:solidFill>
+                <a:latin typeface="Montserrat"/>
+              </a:rPr>
+              <a:t>05   </a:t>
+            </a:r>
+            <a:r>
+              <a:rPr sz="1700" b="0" i="0">
+                <a:solidFill>
+                  <a:srgbClr val="1B2330"/>
+                </a:solidFill>
+                <a:latin typeface="Montserrat"/>
+              </a:rPr>
+              <a:t>Apartado 4.2</a:t>
+            </a:r>
+          </a:p>
+          <a:p>
+            <a:pPr>
+              <a:spcAft>
+                <a:spcPts val="900"/>
+              </a:spcAft>
+            </a:pPr>
+            <a:r>
+              <a:rPr sz="1800" b="1" i="0">
+                <a:solidFill>
+                  <a:srgbClr val="E8801A"/>
+                </a:solidFill>
+                <a:latin typeface="Montserrat"/>
+              </a:rPr>
+              <a:t>06   </a:t>
+            </a:r>
+            <a:r>
+              <a:rPr sz="1700" b="0" i="0">
+                <a:solidFill>
+                  <a:srgbClr val="1B2330"/>
+                </a:solidFill>
+                <a:latin typeface="Montserrat"/>
+              </a:rPr>
+              <a:t>Apartado 4.3</a:t>
+            </a:r>
+          </a:p>
+          <a:p>
+            <a:pPr>
+              <a:spcAft>
+                <a:spcPts val="900"/>
+              </a:spcAft>
+            </a:pPr>
+            <a:r>
+              <a:rPr sz="1800" b="1" i="0">
+                <a:solidFill>
+                  <a:srgbClr val="E8801A"/>
+                </a:solidFill>
+                <a:latin typeface="Montserrat"/>
+              </a:rPr>
+              <a:t>07   </a:t>
+            </a:r>
+            <a:r>
+              <a:rPr sz="1700" b="0" i="0">
+                <a:solidFill>
+                  <a:srgbClr val="1B2330"/>
+                </a:solidFill>
+                <a:latin typeface="Montserrat"/>
+              </a:rPr>
+              <a:t>Apartado 4.4</a:t>
+            </a:r>
+          </a:p>
+          <a:p>
+            <a:pPr>
+              <a:spcAft>
+                <a:spcPts val="900"/>
+              </a:spcAft>
+            </a:pPr>
+            <a:r>
+              <a:rPr sz="1800" b="1" i="0">
+                <a:solidFill>
+                  <a:srgbClr val="E8801A"/>
+                </a:solidFill>
+                <a:latin typeface="Montserrat"/>
+              </a:rPr>
+              <a:t>08   </a:t>
+            </a:r>
+            <a:r>
+              <a:rPr sz="1700" b="0" i="0">
+                <a:solidFill>
+                  <a:srgbClr val="1B2330"/>
+                </a:solidFill>
+                <a:latin typeface="Montserrat"/>
+              </a:rPr>
+              <a:t>Apartado 4.5</a:t>
+            </a:r>
+          </a:p>
+          <a:p>
+            <a:pPr>
+              <a:spcAft>
+                <a:spcPts val="900"/>
+              </a:spcAft>
+            </a:pPr>
+            <a:r>
+              <a:rPr sz="1800" b="1" i="0">
+                <a:solidFill>
+                  <a:srgbClr val="E8801A"/>
+                </a:solidFill>
+                <a:latin typeface="Montserrat"/>
+              </a:rPr>
+              <a:t>09   </a:t>
+            </a:r>
+            <a:r>
+              <a:rPr sz="1700" b="0" i="0">
+                <a:solidFill>
+                  <a:srgbClr val="1B2330"/>
+                </a:solidFill>
+                <a:latin typeface="Montserrat"/>
+              </a:rPr>
+              <a:t>Apartado 4.6</a:t>
             </a:r>
           </a:p>
         </p:txBody>
@@ -9803,7 +10889,7 @@
                 </a:solidFill>
                 <a:latin typeface="Montserrat"/>
               </a:rPr>
-              <a:t>004 / 018</a:t>
+              <a:t>004 / 019</a:t>
             </a:r>
           </a:p>
         </p:txBody>
@@ -9851,7 +10937,7 @@
         <p:spPr>
           <a:xfrm>
             <a:off x="822960" y="457200"/>
-            <a:ext cx="8229600" cy="365760"/>
+            <a:ext cx="10058400" cy="365760"/>
           </a:xfrm>
           <a:prstGeom prst="rect">
             <a:avLst/>
@@ -9865,13 +10951,13 @@
           <a:lstStyle/>
           <a:p>
             <a:r>
-              <a:rPr sz="1200" b="1" i="0">
-                <a:solidFill>
-                  <a:srgbClr val="64748B"/>
-                </a:solidFill>
-                <a:latin typeface="Montserrat"/>
-              </a:rPr>
-              <a:t>UBICAR LA PARTE 10</a:t>
+              <a:rPr sz="1300" b="1" i="0">
+                <a:solidFill>
+                  <a:srgbClr val="E8801A"/>
+                </a:solidFill>
+                <a:latin typeface="Montserrat"/>
+              </a:rPr>
+              <a:t>MARCO · UNE 60670</a:t>
             </a:r>
           </a:p>
         </p:txBody>
@@ -9899,26 +10985,70 @@
           <a:lstStyle/>
           <a:p>
             <a:r>
-              <a:rPr sz="2700" b="1" i="0">
+              <a:rPr sz="2800" b="1" i="0">
                 <a:solidFill>
                   <a:srgbClr val="1E2761"/>
                 </a:solidFill>
                 <a:latin typeface="Montserrat"/>
               </a:rPr>
-              <a:t>El último paso del arranque</a:t>
-            </a:r>
-          </a:p>
-        </p:txBody>
-      </p:sp>
-      <p:sp>
-        <p:nvSpPr>
-          <p:cNvPr id="7" name="TextBox 6"/>
+              <a:t>Qué trae la Parte 10</a:t>
+            </a:r>
+          </a:p>
+        </p:txBody>
+      </p:sp>
+      <p:sp>
+        <p:nvSpPr>
+          <p:cNvPr id="7" name="Rounded Rectangle 6"/>
+          <p:cNvSpPr/>
+          <p:nvPr/>
+        </p:nvSpPr>
+        <p:spPr>
+          <a:xfrm>
+            <a:off x="868680" y="1627632"/>
+            <a:ext cx="2011680" cy="73152"/>
+          </a:xfrm>
+          <a:prstGeom prst="roundRect">
+            <a:avLst/>
+          </a:prstGeom>
+          <a:solidFill>
+            <a:srgbClr val="E8801A"/>
+          </a:solidFill>
+          <a:ln>
+            <a:noFill/>
+          </a:ln>
+          <a:effectLst/>
+        </p:spPr>
+        <p:style>
+          <a:lnRef idx="1">
+            <a:schemeClr val="accent1"/>
+          </a:lnRef>
+          <a:fillRef idx="3">
+            <a:schemeClr val="accent1"/>
+          </a:fillRef>
+          <a:effectRef idx="2">
+            <a:schemeClr val="accent1"/>
+          </a:effectRef>
+          <a:fontRef idx="minor">
+            <a:schemeClr val="lt1"/>
+          </a:fontRef>
+        </p:style>
+        <p:txBody>
+          <a:bodyPr rtlCol="0" anchor="ctr"/>
+          <a:lstStyle/>
+          <a:p>
+            <a:pPr algn="ctr"/>
+          </a:p>
+        </p:txBody>
+      </p:sp>
+      <p:sp>
+        <p:nvSpPr>
+          <p:cNvPr id="8" name="TextBox 7"/>
           <p:cNvSpPr txBox="1"/>
           <p:nvPr/>
         </p:nvSpPr>
         <p:spPr>
           <a:xfrm>
-            <a:off x="822960" y="1920240"/>
+            <a:off x="822960" y="1965960"/>
             <a:ext cx="4983480" cy="4206240"/>
           </a:xfrm>
           <a:prstGeom prst="rect">
@@ -9934,17 +11064,17 @@
           <a:p>
             <a:pPr>
               <a:spcAft>
-                <a:spcPts val="1000"/>
+                <a:spcPts val="1100"/>
               </a:spcAft>
             </a:pPr>
             <a:r>
               <a:rPr sz="1600" b="1" i="0">
                 <a:solidFill>
-                  <a:srgbClr val="2E3A80"/>
-                </a:solidFill>
-                <a:latin typeface="Montserrat"/>
-              </a:rPr>
-              <a:t>•  </a:t>
+                  <a:srgbClr val="E8801A"/>
+                </a:solidFill>
+                <a:latin typeface="Montserrat"/>
+              </a:rPr>
+              <a:t>▸  </a:t>
             </a:r>
             <a:r>
               <a:rPr sz="1600" b="0" i="0">
@@ -9953,23 +11083,23 @@
                 </a:solidFill>
                 <a:latin typeface="Montserrat"/>
               </a:rPr>
-              <a:t>Ya montaste, probaste y diste servicio</a:t>
+              <a:t>Cierra la secuencia de arranque</a:t>
             </a:r>
           </a:p>
           <a:p>
             <a:pPr>
               <a:spcAft>
-                <a:spcPts val="1000"/>
+                <a:spcPts val="1100"/>
               </a:spcAft>
             </a:pPr>
             <a:r>
               <a:rPr sz="1600" b="1" i="0">
                 <a:solidFill>
-                  <a:srgbClr val="2E3A80"/>
-                </a:solidFill>
-                <a:latin typeface="Montserrat"/>
-              </a:rPr>
-              <a:t>•  </a:t>
+                  <a:srgbClr val="E8801A"/>
+                </a:solidFill>
+                <a:latin typeface="Montserrat"/>
+              </a:rPr>
+              <a:t>▸  </a:t>
             </a:r>
             <a:r>
               <a:rPr sz="1600" b="0" i="0">
@@ -9978,23 +11108,23 @@
                 </a:solidFill>
                 <a:latin typeface="Montserrat"/>
               </a:rPr>
-              <a:t>Ahora enciendes los aparatos</a:t>
+              <a:t>Puesta en marcha y cambio de familia</a:t>
             </a:r>
           </a:p>
           <a:p>
             <a:pPr>
               <a:spcAft>
-                <a:spcPts val="1000"/>
+                <a:spcPts val="1100"/>
               </a:spcAft>
             </a:pPr>
             <a:r>
               <a:rPr sz="1600" b="1" i="0">
                 <a:solidFill>
-                  <a:srgbClr val="2E3A80"/>
-                </a:solidFill>
-                <a:latin typeface="Montserrat"/>
-              </a:rPr>
-              <a:t>•  </a:t>
+                  <a:srgbClr val="E8801A"/>
+                </a:solidFill>
+                <a:latin typeface="Montserrat"/>
+              </a:rPr>
+              <a:t>▸  </a:t>
             </a:r>
             <a:r>
               <a:rPr sz="1600" b="0" i="0">
@@ -10003,23 +11133,23 @@
                 </a:solidFill>
                 <a:latin typeface="Montserrat"/>
               </a:rPr>
-              <a:t>Calderas, calentadores, cocinas</a:t>
+              <a:t>Novedad: medición del CO-ambiente</a:t>
             </a:r>
           </a:p>
           <a:p>
             <a:pPr>
               <a:spcAft>
-                <a:spcPts val="1000"/>
+                <a:spcPts val="1100"/>
               </a:spcAft>
             </a:pPr>
             <a:r>
               <a:rPr sz="1600" b="1" i="0">
                 <a:solidFill>
-                  <a:srgbClr val="2E3A80"/>
-                </a:solidFill>
-                <a:latin typeface="Montserrat"/>
-              </a:rPr>
-              <a:t>•  </a:t>
+                  <a:srgbClr val="E8801A"/>
+                </a:solidFill>
+                <a:latin typeface="Montserrat"/>
+              </a:rPr>
+              <a:t>▸  </a:t>
             </a:r>
             <a:r>
               <a:rPr sz="1600" b="0" i="0">
@@ -10028,14 +11158,14 @@
                 </a:solidFill>
                 <a:latin typeface="Montserrat"/>
               </a:rPr>
-              <a:t>Foco: gases de combustión y tiro</a:t>
-            </a:r>
-          </a:p>
-        </p:txBody>
-      </p:sp>
-      <p:sp>
-        <p:nvSpPr>
-          <p:cNvPr id="8" name="imgph" descr="IMGQ:technician igniting gas boiler flame"/>
+              <a:t>Equipos de medida en el apartado 4.7</a:t>
+            </a:r>
+          </a:p>
+        </p:txBody>
+      </p:sp>
+      <p:sp>
+        <p:nvSpPr>
+          <p:cNvPr id="9" name="imgph" descr="IMGQ:modern gas boiler wall mounted"/>
           <p:cNvSpPr/>
           <p:nvPr/>
         </p:nvSpPr>
@@ -10081,7 +11211,7 @@
       </p:sp>
       <p:sp>
         <p:nvSpPr>
-          <p:cNvPr id="9" name="TextBox 8"/>
+          <p:cNvPr id="10" name="TextBox 9"/>
           <p:cNvSpPr txBox="1"/>
           <p:nvPr/>
         </p:nvSpPr>
@@ -10121,7 +11251,7 @@
                 </a:solidFill>
                 <a:latin typeface="Montserrat"/>
               </a:rPr>
-              <a:t>technician igniting gas boiler flame</a:t>
+              <a:t>modern gas boiler wall mounted</a:t>
             </a:r>
           </a:p>
         </p:txBody>
@@ -10218,7 +11348,7 @@
                 </a:solidFill>
                 <a:latin typeface="Montserrat"/>
               </a:rPr>
-              <a:t>005 / 018</a:t>
+              <a:t>005 / 019</a:t>
             </a:r>
           </a:p>
         </p:txBody>
@@ -10266,7 +11396,7 @@
         <p:spPr>
           <a:xfrm>
             <a:off x="822960" y="457200"/>
-            <a:ext cx="8229600" cy="365760"/>
+            <a:ext cx="10058400" cy="365760"/>
           </a:xfrm>
           <a:prstGeom prst="rect">
             <a:avLst/>
@@ -10280,13 +11410,13 @@
           <a:lstStyle/>
           <a:p>
             <a:r>
-              <a:rPr sz="1200" b="1" i="0">
-                <a:solidFill>
-                  <a:srgbClr val="64748B"/>
-                </a:solidFill>
-                <a:latin typeface="Montserrat"/>
-              </a:rPr>
-              <a:t>GENERALIDADES</a:t>
+              <a:rPr sz="1300" b="1" i="0">
+                <a:solidFill>
+                  <a:srgbClr val="E8801A"/>
+                </a:solidFill>
+                <a:latin typeface="Montserrat"/>
+              </a:rPr>
+              <a:t>UBICAR LA PARTE 10</a:t>
             </a:r>
           </a:p>
         </p:txBody>
@@ -10314,26 +11444,70 @@
           <a:lstStyle/>
           <a:p>
             <a:r>
-              <a:rPr sz="2700" b="1" i="0">
+              <a:rPr sz="2800" b="1" i="0">
                 <a:solidFill>
                   <a:srgbClr val="1E2761"/>
                 </a:solidFill>
                 <a:latin typeface="Montserrat"/>
               </a:rPr>
-              <a:t>Dos comprobaciones de partida</a:t>
-            </a:r>
-          </a:p>
-        </p:txBody>
-      </p:sp>
-      <p:sp>
-        <p:nvSpPr>
-          <p:cNvPr id="7" name="TextBox 6"/>
+              <a:t>El último paso del arranque</a:t>
+            </a:r>
+          </a:p>
+        </p:txBody>
+      </p:sp>
+      <p:sp>
+        <p:nvSpPr>
+          <p:cNvPr id="7" name="Rounded Rectangle 6"/>
+          <p:cNvSpPr/>
+          <p:nvPr/>
+        </p:nvSpPr>
+        <p:spPr>
+          <a:xfrm>
+            <a:off x="868680" y="1627632"/>
+            <a:ext cx="2011680" cy="73152"/>
+          </a:xfrm>
+          <a:prstGeom prst="roundRect">
+            <a:avLst/>
+          </a:prstGeom>
+          <a:solidFill>
+            <a:srgbClr val="E8801A"/>
+          </a:solidFill>
+          <a:ln>
+            <a:noFill/>
+          </a:ln>
+          <a:effectLst/>
+        </p:spPr>
+        <p:style>
+          <a:lnRef idx="1">
+            <a:schemeClr val="accent1"/>
+          </a:lnRef>
+          <a:fillRef idx="3">
+            <a:schemeClr val="accent1"/>
+          </a:fillRef>
+          <a:effectRef idx="2">
+            <a:schemeClr val="accent1"/>
+          </a:effectRef>
+          <a:fontRef idx="minor">
+            <a:schemeClr val="lt1"/>
+          </a:fontRef>
+        </p:style>
+        <p:txBody>
+          <a:bodyPr rtlCol="0" anchor="ctr"/>
+          <a:lstStyle/>
+          <a:p>
+            <a:pPr algn="ctr"/>
+          </a:p>
+        </p:txBody>
+      </p:sp>
+      <p:sp>
+        <p:nvSpPr>
+          <p:cNvPr id="8" name="TextBox 7"/>
           <p:cNvSpPr txBox="1"/>
           <p:nvPr/>
         </p:nvSpPr>
         <p:spPr>
           <a:xfrm>
-            <a:off x="822960" y="1920240"/>
+            <a:off x="822960" y="1965960"/>
             <a:ext cx="4983480" cy="4206240"/>
           </a:xfrm>
           <a:prstGeom prst="rect">
@@ -10349,17 +11523,17 @@
           <a:p>
             <a:pPr>
               <a:spcAft>
-                <a:spcPts val="1000"/>
+                <a:spcPts val="1100"/>
               </a:spcAft>
             </a:pPr>
             <a:r>
               <a:rPr sz="1600" b="1" i="0">
                 <a:solidFill>
-                  <a:srgbClr val="2E3A80"/>
-                </a:solidFill>
-                <a:latin typeface="Montserrat"/>
-              </a:rPr>
-              <a:t>•  </a:t>
+                  <a:srgbClr val="E8801A"/>
+                </a:solidFill>
+                <a:latin typeface="Montserrat"/>
+              </a:rPr>
+              <a:t>▸  </a:t>
             </a:r>
             <a:r>
               <a:rPr sz="1600" b="0" i="0">
@@ -10368,23 +11542,23 @@
                 </a:solidFill>
                 <a:latin typeface="Montserrat"/>
               </a:rPr>
-              <a:t>¿El aparato es para este gas?</a:t>
+              <a:t>Ya montaste, probaste y diste servicio</a:t>
             </a:r>
           </a:p>
           <a:p>
             <a:pPr>
               <a:spcAft>
-                <a:spcPts val="1000"/>
+                <a:spcPts val="1100"/>
               </a:spcAft>
             </a:pPr>
             <a:r>
               <a:rPr sz="1600" b="1" i="0">
                 <a:solidFill>
-                  <a:srgbClr val="2E3A80"/>
-                </a:solidFill>
-                <a:latin typeface="Montserrat"/>
-              </a:rPr>
-              <a:t>•  </a:t>
+                  <a:srgbClr val="E8801A"/>
+                </a:solidFill>
+                <a:latin typeface="Montserrat"/>
+              </a:rPr>
+              <a:t>▸  </a:t>
             </a:r>
             <a:r>
               <a:rPr sz="1600" b="0" i="0">
@@ -10393,23 +11567,23 @@
                 </a:solidFill>
                 <a:latin typeface="Montserrat"/>
               </a:rPr>
-              <a:t>¿Lleva su marcado?</a:t>
+              <a:t>Ahora enciendes los aparatos</a:t>
             </a:r>
           </a:p>
           <a:p>
             <a:pPr>
               <a:spcAft>
-                <a:spcPts val="1000"/>
+                <a:spcPts val="1100"/>
               </a:spcAft>
             </a:pPr>
             <a:r>
               <a:rPr sz="1600" b="1" i="0">
                 <a:solidFill>
-                  <a:srgbClr val="2E3A80"/>
-                </a:solidFill>
-                <a:latin typeface="Montserrat"/>
-              </a:rPr>
-              <a:t>•  </a:t>
+                  <a:srgbClr val="E8801A"/>
+                </a:solidFill>
+                <a:latin typeface="Montserrat"/>
+              </a:rPr>
+              <a:t>▸  </a:t>
             </a:r>
             <a:r>
               <a:rPr sz="1600" b="0" i="0">
@@ -10418,23 +11592,23 @@
                 </a:solidFill>
                 <a:latin typeface="Montserrat"/>
               </a:rPr>
-              <a:t>Al terminar: certificado de puesta en marcha</a:t>
+              <a:t>Calderas, calentadores, cocinas</a:t>
             </a:r>
           </a:p>
           <a:p>
             <a:pPr>
               <a:spcAft>
-                <a:spcPts val="1000"/>
+                <a:spcPts val="1100"/>
               </a:spcAft>
             </a:pPr>
             <a:r>
               <a:rPr sz="1600" b="1" i="0">
                 <a:solidFill>
-                  <a:srgbClr val="2E3A80"/>
-                </a:solidFill>
-                <a:latin typeface="Montserrat"/>
-              </a:rPr>
-              <a:t>•  </a:t>
+                  <a:srgbClr val="E8801A"/>
+                </a:solidFill>
+                <a:latin typeface="Montserrat"/>
+              </a:rPr>
+              <a:t>▸  </a:t>
             </a:r>
             <a:r>
               <a:rPr sz="1600" b="0" i="0">
@@ -10443,14 +11617,14 @@
                 </a:solidFill>
                 <a:latin typeface="Montserrat"/>
               </a:rPr>
-              <a:t>Es el tercer certificado del tema</a:t>
-            </a:r>
-          </a:p>
-        </p:txBody>
-      </p:sp>
-      <p:sp>
-        <p:nvSpPr>
-          <p:cNvPr id="8" name="imgph" descr="IMGQ:gas appliance rating label plate"/>
+              <a:t>Foco: gases de combustión y tiro</a:t>
+            </a:r>
+          </a:p>
+        </p:txBody>
+      </p:sp>
+      <p:sp>
+        <p:nvSpPr>
+          <p:cNvPr id="9" name="imgph" descr="IMGQ:technician igniting gas boiler flame"/>
           <p:cNvSpPr/>
           <p:nvPr/>
         </p:nvSpPr>
@@ -10496,7 +11670,7 @@
       </p:sp>
       <p:sp>
         <p:nvSpPr>
-          <p:cNvPr id="9" name="TextBox 8"/>
+          <p:cNvPr id="10" name="TextBox 9"/>
           <p:cNvSpPr txBox="1"/>
           <p:nvPr/>
         </p:nvSpPr>
@@ -10536,7 +11710,7 @@
                 </a:solidFill>
                 <a:latin typeface="Montserrat"/>
               </a:rPr>
-              <a:t>gas appliance rating label plate</a:t>
+              <a:t>technician igniting gas boiler flame</a:t>
             </a:r>
           </a:p>
         </p:txBody>
@@ -10633,7 +11807,7 @@
                 </a:solidFill>
                 <a:latin typeface="Montserrat"/>
               </a:rPr>
-              <a:t>006 / 018</a:t>
+              <a:t>006 / 019</a:t>
             </a:r>
           </a:p>
         </p:txBody>
@@ -10681,7 +11855,7 @@
         <p:spPr>
           <a:xfrm>
             <a:off x="822960" y="457200"/>
-            <a:ext cx="8229600" cy="365760"/>
+            <a:ext cx="10058400" cy="365760"/>
           </a:xfrm>
           <a:prstGeom prst="rect">
             <a:avLst/>
@@ -10695,13 +11869,13 @@
           <a:lstStyle/>
           <a:p>
             <a:r>
-              <a:rPr sz="1200" b="1" i="0">
-                <a:solidFill>
-                  <a:srgbClr val="64748B"/>
-                </a:solidFill>
-                <a:latin typeface="Montserrat"/>
-              </a:rPr>
-              <a:t>TABLA 1</a:t>
+              <a:rPr sz="1300" b="1" i="0">
+                <a:solidFill>
+                  <a:srgbClr val="E8801A"/>
+                </a:solidFill>
+                <a:latin typeface="Montserrat"/>
+              </a:rPr>
+              <a:t>GENERALIDADES</a:t>
             </a:r>
           </a:p>
         </p:txBody>
@@ -10729,26 +11903,70 @@
           <a:lstStyle/>
           <a:p>
             <a:r>
-              <a:rPr sz="2700" b="1" i="0">
+              <a:rPr sz="2800" b="1" i="0">
                 <a:solidFill>
                   <a:srgbClr val="1E2761"/>
                 </a:solidFill>
                 <a:latin typeface="Montserrat"/>
               </a:rPr>
-              <a:t>Las comprobaciones por tipo</a:t>
-            </a:r>
-          </a:p>
-        </p:txBody>
-      </p:sp>
-      <p:sp>
-        <p:nvSpPr>
-          <p:cNvPr id="7" name="TextBox 6"/>
+              <a:t>Dos comprobaciones de partida</a:t>
+            </a:r>
+          </a:p>
+        </p:txBody>
+      </p:sp>
+      <p:sp>
+        <p:nvSpPr>
+          <p:cNvPr id="7" name="Rounded Rectangle 6"/>
+          <p:cNvSpPr/>
+          <p:nvPr/>
+        </p:nvSpPr>
+        <p:spPr>
+          <a:xfrm>
+            <a:off x="868680" y="1627632"/>
+            <a:ext cx="2011680" cy="73152"/>
+          </a:xfrm>
+          <a:prstGeom prst="roundRect">
+            <a:avLst/>
+          </a:prstGeom>
+          <a:solidFill>
+            <a:srgbClr val="E8801A"/>
+          </a:solidFill>
+          <a:ln>
+            <a:noFill/>
+          </a:ln>
+          <a:effectLst/>
+        </p:spPr>
+        <p:style>
+          <a:lnRef idx="1">
+            <a:schemeClr val="accent1"/>
+          </a:lnRef>
+          <a:fillRef idx="3">
+            <a:schemeClr val="accent1"/>
+          </a:fillRef>
+          <a:effectRef idx="2">
+            <a:schemeClr val="accent1"/>
+          </a:effectRef>
+          <a:fontRef idx="minor">
+            <a:schemeClr val="lt1"/>
+          </a:fontRef>
+        </p:style>
+        <p:txBody>
+          <a:bodyPr rtlCol="0" anchor="ctr"/>
+          <a:lstStyle/>
+          <a:p>
+            <a:pPr algn="ctr"/>
+          </a:p>
+        </p:txBody>
+      </p:sp>
+      <p:sp>
+        <p:nvSpPr>
+          <p:cNvPr id="8" name="TextBox 7"/>
           <p:cNvSpPr txBox="1"/>
           <p:nvPr/>
         </p:nvSpPr>
         <p:spPr>
           <a:xfrm>
-            <a:off x="822960" y="1920240"/>
+            <a:off x="822960" y="1965960"/>
             <a:ext cx="4983480" cy="4206240"/>
           </a:xfrm>
           <a:prstGeom prst="rect">
@@ -10764,17 +11982,17 @@
           <a:p>
             <a:pPr>
               <a:spcAft>
-                <a:spcPts val="1000"/>
+                <a:spcPts val="1100"/>
               </a:spcAft>
             </a:pPr>
             <a:r>
               <a:rPr sz="1600" b="1" i="0">
                 <a:solidFill>
-                  <a:srgbClr val="2E3A80"/>
-                </a:solidFill>
-                <a:latin typeface="Montserrat"/>
-              </a:rPr>
-              <a:t>•  </a:t>
+                  <a:srgbClr val="E8801A"/>
+                </a:solidFill>
+                <a:latin typeface="Montserrat"/>
+              </a:rPr>
+              <a:t>▸  </a:t>
             </a:r>
             <a:r>
               <a:rPr sz="1600" b="0" i="0">
@@ -10783,23 +12001,23 @@
                 </a:solidFill>
                 <a:latin typeface="Montserrat"/>
               </a:rPr>
-              <a:t>Correcto montaje del aparato</a:t>
+              <a:t>¿El aparato es para este gas?</a:t>
             </a:r>
           </a:p>
           <a:p>
             <a:pPr>
               <a:spcAft>
-                <a:spcPts val="1000"/>
+                <a:spcPts val="1100"/>
               </a:spcAft>
             </a:pPr>
             <a:r>
               <a:rPr sz="1600" b="1" i="0">
                 <a:solidFill>
-                  <a:srgbClr val="2E3A80"/>
-                </a:solidFill>
-                <a:latin typeface="Montserrat"/>
-              </a:rPr>
-              <a:t>•  </a:t>
+                  <a:srgbClr val="E8801A"/>
+                </a:solidFill>
+                <a:latin typeface="Montserrat"/>
+              </a:rPr>
+              <a:t>▸  </a:t>
             </a:r>
             <a:r>
               <a:rPr sz="1600" b="0" i="0">
@@ -10808,23 +12026,23 @@
                 </a:solidFill>
                 <a:latin typeface="Montserrat"/>
               </a:rPr>
-              <a:t>Estanquidad de la conexión</a:t>
+              <a:t>¿Lleva su marcado?</a:t>
             </a:r>
           </a:p>
           <a:p>
             <a:pPr>
               <a:spcAft>
-                <a:spcPts val="1000"/>
+                <a:spcPts val="1100"/>
               </a:spcAft>
             </a:pPr>
             <a:r>
               <a:rPr sz="1600" b="1" i="0">
                 <a:solidFill>
-                  <a:srgbClr val="2E3A80"/>
-                </a:solidFill>
-                <a:latin typeface="Montserrat"/>
-              </a:rPr>
-              <a:t>•  </a:t>
+                  <a:srgbClr val="E8801A"/>
+                </a:solidFill>
+                <a:latin typeface="Montserrat"/>
+              </a:rPr>
+              <a:t>▸  </a:t>
             </a:r>
             <a:r>
               <a:rPr sz="1600" b="0" i="0">
@@ -10833,23 +12051,23 @@
                 </a:solidFill>
                 <a:latin typeface="Montserrat"/>
               </a:rPr>
-              <a:t>Análisis de los productos de combustión</a:t>
+              <a:t>Al terminar: certificado de puesta en marcha</a:t>
             </a:r>
           </a:p>
           <a:p>
             <a:pPr>
               <a:spcAft>
-                <a:spcPts val="1000"/>
+                <a:spcPts val="1100"/>
               </a:spcAft>
             </a:pPr>
             <a:r>
               <a:rPr sz="1600" b="1" i="0">
                 <a:solidFill>
-                  <a:srgbClr val="2E3A80"/>
-                </a:solidFill>
-                <a:latin typeface="Montserrat"/>
-              </a:rPr>
-              <a:t>•  </a:t>
+                  <a:srgbClr val="E8801A"/>
+                </a:solidFill>
+                <a:latin typeface="Montserrat"/>
+              </a:rPr>
+              <a:t>▸  </a:t>
             </a:r>
             <a:r>
               <a:rPr sz="1600" b="0" i="0">
@@ -10858,14 +12076,14 @@
                 </a:solidFill>
                 <a:latin typeface="Montserrat"/>
               </a:rPr>
-              <a:t>Medición de CO-ambiente y tiro</a:t>
-            </a:r>
-          </a:p>
-        </p:txBody>
-      </p:sp>
-      <p:sp>
-        <p:nvSpPr>
-          <p:cNvPr id="8" name="imgph" descr="IMGQ:combustion gas analyzer flue measurement"/>
+              <a:t>Es el tercer certificado del tema</a:t>
+            </a:r>
+          </a:p>
+        </p:txBody>
+      </p:sp>
+      <p:sp>
+        <p:nvSpPr>
+          <p:cNvPr id="9" name="imgph" descr="IMGQ:gas appliance rating label plate"/>
           <p:cNvSpPr/>
           <p:nvPr/>
         </p:nvSpPr>
@@ -10911,7 +12129,7 @@
       </p:sp>
       <p:sp>
         <p:nvSpPr>
-          <p:cNvPr id="9" name="TextBox 8"/>
+          <p:cNvPr id="10" name="TextBox 9"/>
           <p:cNvSpPr txBox="1"/>
           <p:nvPr/>
         </p:nvSpPr>
@@ -10951,7 +12169,7 @@
                 </a:solidFill>
                 <a:latin typeface="Montserrat"/>
               </a:rPr>
-              <a:t>combustion gas analyzer flue measurement</a:t>
+              <a:t>gas appliance rating label plate</a:t>
             </a:r>
           </a:p>
         </p:txBody>
@@ -11048,7 +12266,7 @@
                 </a:solidFill>
                 <a:latin typeface="Montserrat"/>
               </a:rPr>
-              <a:t>007 / 018</a:t>
+              <a:t>007 / 019</a:t>
             </a:r>
           </a:p>
         </p:txBody>
@@ -11096,7 +12314,7 @@
         <p:spPr>
           <a:xfrm>
             <a:off x="822960" y="457200"/>
-            <a:ext cx="8229600" cy="365760"/>
+            <a:ext cx="10058400" cy="365760"/>
           </a:xfrm>
           <a:prstGeom prst="rect">
             <a:avLst/>
@@ -11110,13 +12328,13 @@
           <a:lstStyle/>
           <a:p>
             <a:r>
-              <a:rPr sz="1200" b="1" i="0">
-                <a:solidFill>
-                  <a:srgbClr val="64748B"/>
-                </a:solidFill>
-                <a:latin typeface="Montserrat"/>
-              </a:rPr>
-              <a:t>TABLA 1 · TIPOS</a:t>
+              <a:rPr sz="1300" b="1" i="0">
+                <a:solidFill>
+                  <a:srgbClr val="E8801A"/>
+                </a:solidFill>
+                <a:latin typeface="Montserrat"/>
+              </a:rPr>
+              <a:t>TABLA 1</a:t>
             </a:r>
           </a:p>
         </p:txBody>
@@ -11144,26 +12362,70 @@
           <a:lstStyle/>
           <a:p>
             <a:r>
-              <a:rPr sz="2700" b="1" i="0">
+              <a:rPr sz="2800" b="1" i="0">
                 <a:solidFill>
                   <a:srgbClr val="1E2761"/>
                 </a:solidFill>
                 <a:latin typeface="Montserrat"/>
               </a:rPr>
-              <a:t>Tipos A, B y C en cristiano</a:t>
-            </a:r>
-          </a:p>
-        </p:txBody>
-      </p:sp>
-      <p:sp>
-        <p:nvSpPr>
-          <p:cNvPr id="7" name="TextBox 6"/>
+              <a:t>Las comprobaciones por tipo</a:t>
+            </a:r>
+          </a:p>
+        </p:txBody>
+      </p:sp>
+      <p:sp>
+        <p:nvSpPr>
+          <p:cNvPr id="7" name="Rounded Rectangle 6"/>
+          <p:cNvSpPr/>
+          <p:nvPr/>
+        </p:nvSpPr>
+        <p:spPr>
+          <a:xfrm>
+            <a:off x="868680" y="1627632"/>
+            <a:ext cx="2011680" cy="73152"/>
+          </a:xfrm>
+          <a:prstGeom prst="roundRect">
+            <a:avLst/>
+          </a:prstGeom>
+          <a:solidFill>
+            <a:srgbClr val="E8801A"/>
+          </a:solidFill>
+          <a:ln>
+            <a:noFill/>
+          </a:ln>
+          <a:effectLst/>
+        </p:spPr>
+        <p:style>
+          <a:lnRef idx="1">
+            <a:schemeClr val="accent1"/>
+          </a:lnRef>
+          <a:fillRef idx="3">
+            <a:schemeClr val="accent1"/>
+          </a:fillRef>
+          <a:effectRef idx="2">
+            <a:schemeClr val="accent1"/>
+          </a:effectRef>
+          <a:fontRef idx="minor">
+            <a:schemeClr val="lt1"/>
+          </a:fontRef>
+        </p:style>
+        <p:txBody>
+          <a:bodyPr rtlCol="0" anchor="ctr"/>
+          <a:lstStyle/>
+          <a:p>
+            <a:pPr algn="ctr"/>
+          </a:p>
+        </p:txBody>
+      </p:sp>
+      <p:sp>
+        <p:nvSpPr>
+          <p:cNvPr id="8" name="TextBox 7"/>
           <p:cNvSpPr txBox="1"/>
           <p:nvPr/>
         </p:nvSpPr>
         <p:spPr>
           <a:xfrm>
-            <a:off x="822960" y="1920240"/>
+            <a:off x="822960" y="1965960"/>
             <a:ext cx="4983480" cy="4206240"/>
           </a:xfrm>
           <a:prstGeom prst="rect">
@@ -11179,17 +12441,17 @@
           <a:p>
             <a:pPr>
               <a:spcAft>
-                <a:spcPts val="1000"/>
+                <a:spcPts val="1100"/>
               </a:spcAft>
             </a:pPr>
             <a:r>
               <a:rPr sz="1600" b="1" i="0">
                 <a:solidFill>
-                  <a:srgbClr val="2E3A80"/>
-                </a:solidFill>
-                <a:latin typeface="Montserrat"/>
-              </a:rPr>
-              <a:t>•  </a:t>
+                  <a:srgbClr val="E8801A"/>
+                </a:solidFill>
+                <a:latin typeface="Montserrat"/>
+              </a:rPr>
+              <a:t>▸  </a:t>
             </a:r>
             <a:r>
               <a:rPr sz="1600" b="0" i="0">
@@ -11198,23 +12460,23 @@
                 </a:solidFill>
                 <a:latin typeface="Montserrat"/>
               </a:rPr>
-              <a:t>Tipo A: sin conducto, humos al local</a:t>
+              <a:t>Correcto montaje del aparato</a:t>
             </a:r>
           </a:p>
           <a:p>
             <a:pPr>
               <a:spcAft>
-                <a:spcPts val="1000"/>
+                <a:spcPts val="1100"/>
               </a:spcAft>
             </a:pPr>
             <a:r>
               <a:rPr sz="1600" b="1" i="0">
                 <a:solidFill>
-                  <a:srgbClr val="2E3A80"/>
-                </a:solidFill>
-                <a:latin typeface="Montserrat"/>
-              </a:rPr>
-              <a:t>•  </a:t>
+                  <a:srgbClr val="E8801A"/>
+                </a:solidFill>
+                <a:latin typeface="Montserrat"/>
+              </a:rPr>
+              <a:t>▸  </a:t>
             </a:r>
             <a:r>
               <a:rPr sz="1600" b="0" i="0">
@@ -11223,23 +12485,23 @@
                 </a:solidFill>
                 <a:latin typeface="Montserrat"/>
               </a:rPr>
-              <a:t>Tipo B: aire del local, humos por conducto</a:t>
+              <a:t>Estanquidad de la conexión</a:t>
             </a:r>
           </a:p>
           <a:p>
             <a:pPr>
               <a:spcAft>
-                <a:spcPts val="1000"/>
+                <a:spcPts val="1100"/>
               </a:spcAft>
             </a:pPr>
             <a:r>
               <a:rPr sz="1600" b="1" i="0">
                 <a:solidFill>
-                  <a:srgbClr val="2E3A80"/>
-                </a:solidFill>
-                <a:latin typeface="Montserrat"/>
-              </a:rPr>
-              <a:t>•  </a:t>
+                  <a:srgbClr val="E8801A"/>
+                </a:solidFill>
+                <a:latin typeface="Montserrat"/>
+              </a:rPr>
+              <a:t>▸  </a:t>
             </a:r>
             <a:r>
               <a:rPr sz="1600" b="0" i="0">
@@ -11248,23 +12510,23 @@
                 </a:solidFill>
                 <a:latin typeface="Montserrat"/>
               </a:rPr>
-              <a:t>Tipo C: estanco, aire y humos de fuera</a:t>
+              <a:t>Análisis de los productos de combustión</a:t>
             </a:r>
           </a:p>
           <a:p>
             <a:pPr>
               <a:spcAft>
-                <a:spcPts val="1000"/>
+                <a:spcPts val="1100"/>
               </a:spcAft>
             </a:pPr>
             <a:r>
               <a:rPr sz="1600" b="1" i="0">
                 <a:solidFill>
-                  <a:srgbClr val="2E3A80"/>
-                </a:solidFill>
-                <a:latin typeface="Montserrat"/>
-              </a:rPr>
-              <a:t>•  </a:t>
+                  <a:srgbClr val="E8801A"/>
+                </a:solidFill>
+                <a:latin typeface="Montserrat"/>
+              </a:rPr>
+              <a:t>▸  </a:t>
             </a:r>
             <a:r>
               <a:rPr sz="1600" b="0" i="0">
@@ -11273,14 +12535,14 @@
                 </a:solidFill>
                 <a:latin typeface="Montserrat"/>
               </a:rPr>
-              <a:t>El tipo marca qué comprobaciones tocan</a:t>
-            </a:r>
-          </a:p>
-        </p:txBody>
-      </p:sp>
-      <p:sp>
-        <p:nvSpPr>
-          <p:cNvPr id="8" name="imgph" descr="IMGQ:sealed balanced flue gas boiler"/>
+              <a:t>Medición de CO-ambiente y tiro</a:t>
+            </a:r>
+          </a:p>
+        </p:txBody>
+      </p:sp>
+      <p:sp>
+        <p:nvSpPr>
+          <p:cNvPr id="9" name="imgph" descr="IMGQ:combustion gas analyzer flue measurement"/>
           <p:cNvSpPr/>
           <p:nvPr/>
         </p:nvSpPr>
@@ -11326,7 +12588,7 @@
       </p:sp>
       <p:sp>
         <p:nvSpPr>
-          <p:cNvPr id="9" name="TextBox 8"/>
+          <p:cNvPr id="10" name="TextBox 9"/>
           <p:cNvSpPr txBox="1"/>
           <p:nvPr/>
         </p:nvSpPr>
@@ -11366,7 +12628,7 @@
                 </a:solidFill>
                 <a:latin typeface="Montserrat"/>
               </a:rPr>
-              <a:t>sealed balanced flue gas boiler</a:t>
+              <a:t>combustion gas analyzer flue measurement</a:t>
             </a:r>
           </a:p>
         </p:txBody>
@@ -11463,7 +12725,7 @@
                 </a:solidFill>
                 <a:latin typeface="Montserrat"/>
               </a:rPr>
-              <a:t>008 / 018</a:t>
+              <a:t>008 / 019</a:t>
             </a:r>
           </a:p>
         </p:txBody>
@@ -11511,7 +12773,7 @@
         <p:spPr>
           <a:xfrm>
             <a:off x="822960" y="457200"/>
-            <a:ext cx="8229600" cy="365760"/>
+            <a:ext cx="10058400" cy="365760"/>
           </a:xfrm>
           <a:prstGeom prst="rect">
             <a:avLst/>
@@ -11525,13 +12787,13 @@
           <a:lstStyle/>
           <a:p>
             <a:r>
-              <a:rPr sz="1200" b="1" i="0">
-                <a:solidFill>
-                  <a:srgbClr val="64748B"/>
-                </a:solidFill>
-                <a:latin typeface="Montserrat"/>
-              </a:rPr>
-              <a:t>TABLA 1 · REGLAS</a:t>
+              <a:rPr sz="1300" b="1" i="0">
+                <a:solidFill>
+                  <a:srgbClr val="E8801A"/>
+                </a:solidFill>
+                <a:latin typeface="Montserrat"/>
+              </a:rPr>
+              <a:t>TABLA 1 · TIPOS</a:t>
             </a:r>
           </a:p>
         </p:txBody>
@@ -11559,26 +12821,70 @@
           <a:lstStyle/>
           <a:p>
             <a:r>
-              <a:rPr sz="2700" b="1" i="0">
+              <a:rPr sz="2800" b="1" i="0">
                 <a:solidFill>
                   <a:srgbClr val="1E2761"/>
                 </a:solidFill>
                 <a:latin typeface="Montserrat"/>
               </a:rPr>
-              <a:t>Dos a todos, y la consecuencia</a:t>
-            </a:r>
-          </a:p>
-        </p:txBody>
-      </p:sp>
-      <p:sp>
-        <p:nvSpPr>
-          <p:cNvPr id="7" name="TextBox 6"/>
+              <a:t>Tipos A, B y C en cristiano</a:t>
+            </a:r>
+          </a:p>
+        </p:txBody>
+      </p:sp>
+      <p:sp>
+        <p:nvSpPr>
+          <p:cNvPr id="7" name="Rounded Rectangle 6"/>
+          <p:cNvSpPr/>
+          <p:nvPr/>
+        </p:nvSpPr>
+        <p:spPr>
+          <a:xfrm>
+            <a:off x="868680" y="1627632"/>
+            <a:ext cx="2011680" cy="73152"/>
+          </a:xfrm>
+          <a:prstGeom prst="roundRect">
+            <a:avLst/>
+          </a:prstGeom>
+          <a:solidFill>
+            <a:srgbClr val="E8801A"/>
+          </a:solidFill>
+          <a:ln>
+            <a:noFill/>
+          </a:ln>
+          <a:effectLst/>
+        </p:spPr>
+        <p:style>
+          <a:lnRef idx="1">
+            <a:schemeClr val="accent1"/>
+          </a:lnRef>
+          <a:fillRef idx="3">
+            <a:schemeClr val="accent1"/>
+          </a:fillRef>
+          <a:effectRef idx="2">
+            <a:schemeClr val="accent1"/>
+          </a:effectRef>
+          <a:fontRef idx="minor">
+            <a:schemeClr val="lt1"/>
+          </a:fontRef>
+        </p:style>
+        <p:txBody>
+          <a:bodyPr rtlCol="0" anchor="ctr"/>
+          <a:lstStyle/>
+          <a:p>
+            <a:pPr algn="ctr"/>
+          </a:p>
+        </p:txBody>
+      </p:sp>
+      <p:sp>
+        <p:nvSpPr>
+          <p:cNvPr id="8" name="TextBox 7"/>
           <p:cNvSpPr txBox="1"/>
           <p:nvPr/>
         </p:nvSpPr>
         <p:spPr>
           <a:xfrm>
-            <a:off x="822960" y="1920240"/>
+            <a:off x="822960" y="1965960"/>
             <a:ext cx="4983480" cy="4206240"/>
           </a:xfrm>
           <a:prstGeom prst="rect">
@@ -11594,17 +12900,17 @@
           <a:p>
             <a:pPr>
               <a:spcAft>
-                <a:spcPts val="1000"/>
+                <a:spcPts val="1100"/>
               </a:spcAft>
             </a:pPr>
             <a:r>
               <a:rPr sz="1600" b="1" i="0">
                 <a:solidFill>
-                  <a:srgbClr val="2E3A80"/>
-                </a:solidFill>
-                <a:latin typeface="Montserrat"/>
-              </a:rPr>
-              <a:t>•  </a:t>
+                  <a:srgbClr val="E8801A"/>
+                </a:solidFill>
+                <a:latin typeface="Montserrat"/>
+              </a:rPr>
+              <a:t>▸  </a:t>
             </a:r>
             <a:r>
               <a:rPr sz="1600" b="0" i="0">
@@ -11613,23 +12919,23 @@
                 </a:solidFill>
                 <a:latin typeface="Montserrat"/>
               </a:rPr>
-              <a:t>Montaje y estanquidad: a todos los aparatos</a:t>
+              <a:t>Tipo A: sin conducto, humos al local</a:t>
             </a:r>
           </a:p>
           <a:p>
             <a:pPr>
               <a:spcAft>
-                <a:spcPts val="1000"/>
+                <a:spcPts val="1100"/>
               </a:spcAft>
             </a:pPr>
             <a:r>
               <a:rPr sz="1600" b="1" i="0">
                 <a:solidFill>
-                  <a:srgbClr val="2E3A80"/>
-                </a:solidFill>
-                <a:latin typeface="Montserrat"/>
-              </a:rPr>
-              <a:t>•  </a:t>
+                  <a:srgbClr val="E8801A"/>
+                </a:solidFill>
+                <a:latin typeface="Montserrat"/>
+              </a:rPr>
+              <a:t>▸  </a:t>
             </a:r>
             <a:r>
               <a:rPr sz="1600" b="0" i="0">
@@ -11638,23 +12944,23 @@
                 </a:solidFill>
                 <a:latin typeface="Montserrat"/>
               </a:rPr>
-              <a:t>Las demás dependen del tipo</a:t>
+              <a:t>Tipo B: aire del local, humos por conducto</a:t>
             </a:r>
           </a:p>
           <a:p>
             <a:pPr>
               <a:spcAft>
-                <a:spcPts val="1000"/>
+                <a:spcPts val="1100"/>
               </a:spcAft>
             </a:pPr>
             <a:r>
               <a:rPr sz="1600" b="1" i="0">
                 <a:solidFill>
-                  <a:srgbClr val="2E3A80"/>
-                </a:solidFill>
-                <a:latin typeface="Montserrat"/>
-              </a:rPr>
-              <a:t>•  </a:t>
+                  <a:srgbClr val="E8801A"/>
+                </a:solidFill>
+                <a:latin typeface="Montserrat"/>
+              </a:rPr>
+              <a:t>▸  </a:t>
             </a:r>
             <a:r>
               <a:rPr sz="1600" b="0" i="0">
@@ -11663,23 +12969,23 @@
                 </a:solidFill>
                 <a:latin typeface="Montserrat"/>
               </a:rPr>
-              <a:t>Si algo falla: llave cerrada, bloqueada, precintada</a:t>
+              <a:t>Tipo C: estanco, aire y humos de fuera</a:t>
             </a:r>
           </a:p>
           <a:p>
             <a:pPr>
               <a:spcAft>
-                <a:spcPts val="1000"/>
+                <a:spcPts val="1100"/>
               </a:spcAft>
             </a:pPr>
             <a:r>
               <a:rPr sz="1600" b="1" i="0">
                 <a:solidFill>
-                  <a:srgbClr val="2E3A80"/>
-                </a:solidFill>
-                <a:latin typeface="Montserrat"/>
-              </a:rPr>
-              <a:t>•  </a:t>
+                  <a:srgbClr val="E8801A"/>
+                </a:solidFill>
+                <a:latin typeface="Montserrat"/>
+              </a:rPr>
+              <a:t>▸  </a:t>
             </a:r>
             <a:r>
               <a:rPr sz="1600" b="0" i="0">
@@ -11688,14 +12994,14 @@
                 </a:solidFill>
                 <a:latin typeface="Montserrat"/>
               </a:rPr>
-              <a:t>El aparato no se pone en marcha</a:t>
-            </a:r>
-          </a:p>
-        </p:txBody>
-      </p:sp>
-      <p:sp>
-        <p:nvSpPr>
-          <p:cNvPr id="8" name="imgph" descr="IMGQ:gas appliance shut off valve sealed"/>
+              <a:t>El tipo marca qué comprobaciones tocan</a:t>
+            </a:r>
+          </a:p>
+        </p:txBody>
+      </p:sp>
+      <p:sp>
+        <p:nvSpPr>
+          <p:cNvPr id="9" name="imgph" descr="IMGQ:sealed balanced flue gas boiler"/>
           <p:cNvSpPr/>
           <p:nvPr/>
         </p:nvSpPr>
@@ -11741,7 +13047,7 @@
       </p:sp>
       <p:sp>
         <p:nvSpPr>
-          <p:cNvPr id="9" name="TextBox 8"/>
+          <p:cNvPr id="10" name="TextBox 9"/>
           <p:cNvSpPr txBox="1"/>
           <p:nvPr/>
         </p:nvSpPr>
@@ -11781,7 +13087,7 @@
                 </a:solidFill>
                 <a:latin typeface="Montserrat"/>
               </a:rPr>
-              <a:t>gas appliance shut off valve sealed</a:t>
+              <a:t>sealed balanced flue gas boiler</a:t>
             </a:r>
           </a:p>
         </p:txBody>
@@ -11878,7 +13184,7 @@
                 </a:solidFill>
                 <a:latin typeface="Montserrat"/>
               </a:rPr>
-              <a:t>009 / 018</a:t>
+              <a:t>009 / 019</a:t>
             </a:r>
           </a:p>
         </p:txBody>
@@ -11926,7 +13232,7 @@
         <p:spPr>
           <a:xfrm>
             <a:off x="822960" y="457200"/>
-            <a:ext cx="8229600" cy="365760"/>
+            <a:ext cx="10058400" cy="365760"/>
           </a:xfrm>
           <a:prstGeom prst="rect">
             <a:avLst/>
@@ -11940,13 +13246,13 @@
           <a:lstStyle/>
           <a:p>
             <a:r>
-              <a:rPr sz="1200" b="1" i="0">
-                <a:solidFill>
-                  <a:srgbClr val="64748B"/>
-                </a:solidFill>
-                <a:latin typeface="Montserrat"/>
-              </a:rPr>
-              <a:t>TABLA 1 · MATIZ</a:t>
+              <a:rPr sz="1300" b="1" i="0">
+                <a:solidFill>
+                  <a:srgbClr val="E8801A"/>
+                </a:solidFill>
+                <a:latin typeface="Montserrat"/>
+              </a:rPr>
+              <a:t>TABLA 1 · REGLAS</a:t>
             </a:r>
           </a:p>
         </p:txBody>
@@ -11974,26 +13280,70 @@
           <a:lstStyle/>
           <a:p>
             <a:r>
-              <a:rPr sz="2700" b="1" i="0">
+              <a:rPr sz="2800" b="1" i="0">
                 <a:solidFill>
                   <a:srgbClr val="1E2761"/>
                 </a:solidFill>
                 <a:latin typeface="Montserrat"/>
               </a:rPr>
-              <a:t>La coletilla de la zona exterior</a:t>
-            </a:r>
-          </a:p>
-        </p:txBody>
-      </p:sp>
-      <p:sp>
-        <p:nvSpPr>
-          <p:cNvPr id="7" name="TextBox 6"/>
+              <a:t>Dos a todos, y la consecuencia</a:t>
+            </a:r>
+          </a:p>
+        </p:txBody>
+      </p:sp>
+      <p:sp>
+        <p:nvSpPr>
+          <p:cNvPr id="7" name="Rounded Rectangle 6"/>
+          <p:cNvSpPr/>
+          <p:nvPr/>
+        </p:nvSpPr>
+        <p:spPr>
+          <a:xfrm>
+            <a:off x="868680" y="1627632"/>
+            <a:ext cx="2011680" cy="73152"/>
+          </a:xfrm>
+          <a:prstGeom prst="roundRect">
+            <a:avLst/>
+          </a:prstGeom>
+          <a:solidFill>
+            <a:srgbClr val="E8801A"/>
+          </a:solidFill>
+          <a:ln>
+            <a:noFill/>
+          </a:ln>
+          <a:effectLst/>
+        </p:spPr>
+        <p:style>
+          <a:lnRef idx="1">
+            <a:schemeClr val="accent1"/>
+          </a:lnRef>
+          <a:fillRef idx="3">
+            <a:schemeClr val="accent1"/>
+          </a:fillRef>
+          <a:effectRef idx="2">
+            <a:schemeClr val="accent1"/>
+          </a:effectRef>
+          <a:fontRef idx="minor">
+            <a:schemeClr val="lt1"/>
+          </a:fontRef>
+        </p:style>
+        <p:txBody>
+          <a:bodyPr rtlCol="0" anchor="ctr"/>
+          <a:lstStyle/>
+          <a:p>
+            <a:pPr algn="ctr"/>
+          </a:p>
+        </p:txBody>
+      </p:sp>
+      <p:sp>
+        <p:nvSpPr>
+          <p:cNvPr id="8" name="TextBox 7"/>
           <p:cNvSpPr txBox="1"/>
           <p:nvPr/>
         </p:nvSpPr>
         <p:spPr>
           <a:xfrm>
-            <a:off x="822960" y="1920240"/>
+            <a:off x="822960" y="1965960"/>
             <a:ext cx="4983480" cy="4206240"/>
           </a:xfrm>
           <a:prstGeom prst="rect">
@@ -12009,17 +13359,17 @@
           <a:p>
             <a:pPr>
               <a:spcAft>
-                <a:spcPts val="1000"/>
+                <a:spcPts val="1100"/>
               </a:spcAft>
             </a:pPr>
             <a:r>
               <a:rPr sz="1600" b="1" i="0">
                 <a:solidFill>
-                  <a:srgbClr val="2E3A80"/>
-                </a:solidFill>
-                <a:latin typeface="Montserrat"/>
-              </a:rPr>
-              <a:t>•  </a:t>
+                  <a:srgbClr val="E8801A"/>
+                </a:solidFill>
+                <a:latin typeface="Montserrat"/>
+              </a:rPr>
+              <a:t>▸  </a:t>
             </a:r>
             <a:r>
               <a:rPr sz="1600" b="0" i="0">
@@ -12028,23 +13378,23 @@
                 </a:solidFill>
                 <a:latin typeface="Montserrat"/>
               </a:rPr>
-              <a:t>Varias casillas llevan un asterisco</a:t>
+              <a:t>Montaje y estanquidad: a todos los aparatos</a:t>
             </a:r>
           </a:p>
           <a:p>
             <a:pPr>
               <a:spcAft>
-                <a:spcPts val="1000"/>
+                <a:spcPts val="1100"/>
               </a:spcAft>
             </a:pPr>
             <a:r>
               <a:rPr sz="1600" b="1" i="0">
                 <a:solidFill>
-                  <a:srgbClr val="2E3A80"/>
-                </a:solidFill>
-                <a:latin typeface="Montserrat"/>
-              </a:rPr>
-              <a:t>•  </a:t>
+                  <a:srgbClr val="E8801A"/>
+                </a:solidFill>
+                <a:latin typeface="Montserrat"/>
+              </a:rPr>
+              <a:t>▸  </a:t>
             </a:r>
             <a:r>
               <a:rPr sz="1600" b="0" i="0">
@@ -12053,23 +13403,23 @@
                 </a:solidFill>
                 <a:latin typeface="Montserrat"/>
               </a:rPr>
-              <a:t>Solo se exigen si no es zona exterior</a:t>
+              <a:t>Las demás dependen del tipo</a:t>
             </a:r>
           </a:p>
           <a:p>
             <a:pPr>
               <a:spcAft>
-                <a:spcPts val="1000"/>
+                <a:spcPts val="1100"/>
               </a:spcAft>
             </a:pPr>
             <a:r>
               <a:rPr sz="1600" b="1" i="0">
                 <a:solidFill>
-                  <a:srgbClr val="2E3A80"/>
-                </a:solidFill>
-                <a:latin typeface="Montserrat"/>
-              </a:rPr>
-              <a:t>•  </a:t>
+                  <a:srgbClr val="E8801A"/>
+                </a:solidFill>
+                <a:latin typeface="Montserrat"/>
+              </a:rPr>
+              <a:t>▸  </a:t>
             </a:r>
             <a:r>
               <a:rPr sz="1600" b="0" i="0">
@@ -12078,23 +13428,23 @@
                 </a:solidFill>
                 <a:latin typeface="Montserrat"/>
               </a:rPr>
-              <a:t>Al aire libre los humos se dispersan</a:t>
+              <a:t>Si algo falla: llave cerrada, bloqueada, precintada</a:t>
             </a:r>
           </a:p>
           <a:p>
             <a:pPr>
               <a:spcAft>
-                <a:spcPts val="1000"/>
+                <a:spcPts val="1100"/>
               </a:spcAft>
             </a:pPr>
             <a:r>
               <a:rPr sz="1600" b="1" i="0">
                 <a:solidFill>
-                  <a:srgbClr val="2E3A80"/>
-                </a:solidFill>
-                <a:latin typeface="Montserrat"/>
-              </a:rPr>
-              <a:t>•  </a:t>
+                  <a:srgbClr val="E8801A"/>
+                </a:solidFill>
+                <a:latin typeface="Montserrat"/>
+              </a:rPr>
+              <a:t>▸  </a:t>
             </a:r>
             <a:r>
               <a:rPr sz="1600" b="0" i="0">
@@ -12103,14 +13453,14 @@
                 </a:solidFill>
                 <a:latin typeface="Montserrat"/>
               </a:rPr>
-              <a:t>En local cerrado sí hay riesgo</a:t>
-            </a:r>
-          </a:p>
-        </p:txBody>
-      </p:sp>
-      <p:sp>
-        <p:nvSpPr>
-          <p:cNvPr id="8" name="imgph" descr="IMGQ:rooftop gas appliance open air"/>
+              <a:t>El aparato no se pone en marcha</a:t>
+            </a:r>
+          </a:p>
+        </p:txBody>
+      </p:sp>
+      <p:sp>
+        <p:nvSpPr>
+          <p:cNvPr id="9" name="imgph" descr="IMGQ:gas appliance shut off valve sealed"/>
           <p:cNvSpPr/>
           <p:nvPr/>
         </p:nvSpPr>
@@ -12156,7 +13506,7 @@
       </p:sp>
       <p:sp>
         <p:nvSpPr>
-          <p:cNvPr id="9" name="TextBox 8"/>
+          <p:cNvPr id="10" name="TextBox 9"/>
           <p:cNvSpPr txBox="1"/>
           <p:nvPr/>
         </p:nvSpPr>
@@ -12196,7 +13546,7 @@
                 </a:solidFill>
                 <a:latin typeface="Montserrat"/>
               </a:rPr>
-              <a:t>rooftop gas appliance open air</a:t>
+              <a:t>gas appliance shut off valve sealed</a:t>
             </a:r>
           </a:p>
         </p:txBody>

--- a/Curso Gas B/15 - UNE 60670 - Pruebas y puesta en servicio/15 - UNE 60670 - Pruebas y puesta en servicio - Vídeo 3.pptx
+++ b/Curso Gas B/15 - UNE 60670 - Pruebas y puesta en servicio/15 - UNE 60670 - Pruebas y puesta en servicio - Vídeo 3.pptx
@@ -1038,12 +1038,12 @@
           <a:lstStyle/>
           <a:p>
             <a:r>
-              <a:t>N1: Uno de los números estrella del tema. ¿Cuál es el tope de monóxido en los humos?</a:t>
-            </a:r>
-          </a:p>
-          <a:p>
-            <a:r>
-              <a:t>N2: No lo confundas con el del ambiente, que es mucho más bajo. Este se mide dentro del humo.</a:t>
+              <a:t>N1: Uno de los números estrella del tema. Escucha la pregunta y las cuatro opciones. ¿Cuál es el tope de monóxido corregido no diluido en los humos para poder arrancar? Opción A, quince partes por millón. Opción B, doscientas cincuenta partes por millón. Opción C, quinientas partes por millón. Opción D, dos mil quinientas partes por millón. Piénsalo un momento.</a:t>
+            </a:r>
+          </a:p>
+          <a:p>
+            <a:r>
+              <a:t>N2: Pista: no lo confundas con el del ambiente, que es mucho más bajo. Este se mide dentro del humo.</a:t>
             </a:r>
           </a:p>
         </p:txBody>
@@ -1113,12 +1113,12 @@
           <a:lstStyle/>
           <a:p>
             <a:r>
-              <a:t>N1: ¿Por qué la ce?</a:t>
-            </a:r>
-          </a:p>
-          <a:p>
-            <a:r>
-              <a:t>N2: El monóxido corregido no diluido en los humos no puede pasar de quinientas partes por millón; si las supera, el aparato no arranca. Ojo a las trampas: quince es el del ambiente, y dos mil quinientas es el del dióxido en ambiente.</a:t>
+              <a:t>N2: La respuesta correcta es la opción C: quinientas partes por millón. Por encima de quinientas partes por millón de monóxido corregido no diluido en los humos, el aparato no se pone en marcha. El truco para no fallar: quince es el del ambiente y dos mil quinientas es el del dióxido en ambiente; no los mezcles.</a:t>
+            </a:r>
+          </a:p>
+          <a:p>
+            <a:r>
+              <a:t>N1: Quinientas en humos; ese es el tope.</a:t>
             </a:r>
           </a:p>
         </p:txBody>
@@ -1273,12 +1273,12 @@
           <a:lstStyle/>
           <a:p>
             <a:r>
-              <a:t>N1: El trío de la medida del monóxido en ambiente. ¿Dónde va la sonda y cuándo mides?</a:t>
-            </a:r>
-          </a:p>
-          <a:p>
-            <a:r>
-              <a:t>N2: Recuerda que se mide donde respira la gente, más o menos a la altura de la cara.</a:t>
+              <a:t>N1: El trío de la medida del monóxido en ambiente. Atento a la pregunta y a las cuatro opciones. En la medición del monóxido en el ambiente, ¿dónde y cuándo se coloca la sonda? Opción A, a dos metros de los aparatos y al minuto. Opción B, a un metro de los aparatos, a uno coma ochenta de altura, a los cinco minutos. Opción C, pegada al quemador, nada más encender. Opción D, a uno coma ochenta de altura, a los quince minutos. Piénsalo un momento.</a:t>
+            </a:r>
+          </a:p>
+          <a:p>
+            <a:r>
+              <a:t>N2: Pista: se mide donde respira la gente, más o menos a la altura de la cara.</a:t>
             </a:r>
           </a:p>
         </p:txBody>
@@ -1348,12 +1348,12 @@
           <a:lstStyle/>
           <a:p>
             <a:r>
-              <a:t>N1: ¿Por qué la be?</a:t>
-            </a:r>
-          </a:p>
-          <a:p>
-            <a:r>
-              <a:t>N2: Cinco minutos, un metro de los aparatos y uno coma ochenta de altura. La de quince minutos es la del anexo B para radiantes de tipo A, no la general. Memoriza el trío: cinco minutos, un metro, uno coma ochenta.</a:t>
+              <a:t>N2: La respuesta correcta es la opción B: a un metro de los aparatos, a uno coma ochenta de altura, a los cinco minutos. La de quince minutos, la opción D, es la del anexo B para radiantes de tipo A, no la general. El truco para no fallar, memoriza el trío: cinco minutos, un metro, uno coma ochenta.</a:t>
+            </a:r>
+          </a:p>
+          <a:p>
+            <a:r>
+              <a:t>N1: Cinco minutos, un metro, uno coma ochenta de altura.</a:t>
             </a:r>
           </a:p>
         </p:txBody>
@@ -1753,12 +1753,12 @@
           <a:lstStyle/>
           <a:p>
             <a:r>
-              <a:t>N1: Los tres números de los equipos. ¿Cuál es el máximo entre calibración y calibración?</a:t>
-            </a:r>
-          </a:p>
-          <a:p>
-            <a:r>
-              <a:t>N2: Recuerda el truco: dieciocho meses de vigencia, cinco años de papeles, cinco por ciento de margen.</a:t>
+              <a:t>N1: Los tres números de los equipos. Escucha la pregunta y las cuatro opciones. ¿Cada cuánto, como máximo, debe calibrarse el analizador de combustión? Opción A, cada seis meses. Opción B, cada doce meses. Opción C, cada dieciocho meses. Opción D, cada veinticuatro meses. Tómate un momento.</a:t>
+            </a:r>
+          </a:p>
+          <a:p>
+            <a:r>
+              <a:t>N2: Pista: recuerda el truco, dieciocho meses de vigencia, cinco años de papeles, cinco por ciento de margen.</a:t>
             </a:r>
           </a:p>
         </p:txBody>
@@ -1828,12 +1828,12 @@
           <a:lstStyle/>
           <a:p>
             <a:r>
-              <a:t>N1: ¿Por qué la ce?</a:t>
-            </a:r>
-          </a:p>
-          <a:p>
-            <a:r>
-              <a:t>N2: Dieciocho meses es el tope entre calibraciones; puede hacerse antes si mides mucho, pero nunca después. No lo mezcles con los cinco años del registro documental ni con el más menos cinco por ciento de incertidumbre.</a:t>
+              <a:t>N2: La respuesta correcta es la opción C: cada dieciocho meses. Es el tope entre calibración y calibración; puede hacerse antes si mides mucho, pero nunca después. El truco para no fallar: no lo mezcles con los cinco años del registro documental ni con el más menos cinco por ciento de incertidumbre.</a:t>
+            </a:r>
+          </a:p>
+          <a:p>
+            <a:r>
+              <a:t>N1: Dieciocho meses como máximo; antes sí, después no.</a:t>
             </a:r>
           </a:p>
         </p:txBody>
